--- a/output/wordlabs-care-3day.pptx
+++ b/output/wordlabs-care-3day.pptx
@@ -4240,7 +4240,7 @@
                 <a:ea typeface="Calibri" pitchFamily="34" charset="-122"/>
                 <a:cs typeface="Calibri" pitchFamily="34" charset="-120"/>
               </a:rPr>
-              <a:t>"worry, concern, look after"</a:t>
+              <a:t>"worry, attention, looking after"</a:t>
             </a:r>
             <a:endParaRPr lang="en-US" sz="2200" dirty="0"/>
           </a:p>
@@ -5288,7 +5288,7 @@
                 <a:ea typeface="Calibri" pitchFamily="34" charset="-122"/>
                 <a:cs typeface="Calibri" pitchFamily="34" charset="-120"/>
               </a:rPr>
-              <a:t>Word Labs  •  wordlabs.app  •  Root: 'care' = worry, concern, look after</a:t>
+              <a:t>Word Labs  •  wordlabs.app  •  Root: 'care' = worry, attention, looking after</a:t>
             </a:r>
             <a:endParaRPr lang="en-US" sz="800" dirty="0"/>
           </a:p>
@@ -5928,7 +5928,7 @@
                 <a:ea typeface="Calibri" pitchFamily="34" charset="-122"/>
                 <a:cs typeface="Calibri" pitchFamily="34" charset="-120"/>
               </a:rPr>
-              <a:t>Word Labs  •  wordlabs.app  •  Root: 'care' = worry, concern, look after</a:t>
+              <a:t>Word Labs  •  wordlabs.app  •  Root: 'care' = worry, attention, looking after</a:t>
             </a:r>
             <a:endParaRPr lang="en-US" sz="800" dirty="0"/>
           </a:p>
@@ -6057,7 +6057,7 @@
                 <a:ea typeface="Calibri" pitchFamily="34" charset="-122"/>
                 <a:cs typeface="Calibri" pitchFamily="34" charset="-120"/>
               </a:rPr>
-              <a:t>caregiver</a:t>
+              <a:t>careful</a:t>
             </a:r>
             <a:pPr algn="l" indent="0" marL="0">
               <a:buNone/>
@@ -6071,7 +6071,7 @@
                 <a:ea typeface="Calibri" pitchFamily="34" charset="-122"/>
                 <a:cs typeface="Calibri" pitchFamily="34" charset="-120"/>
               </a:rPr>
-              <a:t> was very </a:t>
+              <a:t> nurse was never </a:t>
             </a:r>
             <a:pPr algn="l" indent="0" marL="0">
               <a:buNone/>
@@ -6088,7 +6088,7 @@
                 <a:ea typeface="Calibri" pitchFamily="34" charset="-122"/>
                 <a:cs typeface="Calibri" pitchFamily="34" charset="-120"/>
               </a:rPr>
-              <a:t>careful</a:t>
+              <a:t>careless</a:t>
             </a:r>
             <a:pPr algn="l" indent="0" marL="0">
               <a:buNone/>
@@ -6102,7 +6102,7 @@
                 <a:ea typeface="Calibri" pitchFamily="34" charset="-122"/>
                 <a:cs typeface="Calibri" pitchFamily="34" charset="-120"/>
               </a:rPr>
-              <a:t> when helping the elderly woman cross the busy road.</a:t>
+              <a:t> when giving medicine to her patients.</a:t>
             </a:r>
             <a:endParaRPr lang="en-US" sz="1800" dirty="0"/>
           </a:p>
@@ -6257,7 +6257,7 @@
                 <a:ea typeface="Trebuchet MS" pitchFamily="34" charset="-122"/>
                 <a:cs typeface="Trebuchet MS" pitchFamily="34" charset="-120"/>
               </a:rPr>
-              <a:t>caregiver</a:t>
+              <a:t>careful</a:t>
             </a:r>
             <a:endParaRPr lang="en-US" sz="1400" dirty="0"/>
           </a:p>
@@ -6385,7 +6385,7 @@
                 <a:ea typeface="Trebuchet MS" pitchFamily="34" charset="-122"/>
                 <a:cs typeface="Trebuchet MS" pitchFamily="34" charset="-120"/>
               </a:rPr>
-              <a:t>careful</a:t>
+              <a:t>careless</a:t>
             </a:r>
             <a:endParaRPr lang="en-US" sz="1400" dirty="0"/>
           </a:p>
@@ -6716,7 +6716,7 @@
                 <a:ea typeface="Calibri" pitchFamily="34" charset="-122"/>
                 <a:cs typeface="Calibri" pitchFamily="34" charset="-120"/>
               </a:rPr>
-              <a:t>Word Labs  •  wordlabs.app  •  Root: 'care' = worry, concern, look after</a:t>
+              <a:t>Word Labs  •  wordlabs.app  •  Root: 'care' = worry, attention, looking after</a:t>
             </a:r>
             <a:endParaRPr lang="en-US" sz="800" dirty="0"/>
           </a:p>
@@ -6855,7 +6855,7 @@
                 <a:ea typeface="Trebuchet MS" pitchFamily="34" charset="-122"/>
                 <a:cs typeface="Trebuchet MS" pitchFamily="34" charset="-120"/>
               </a:rPr>
-              <a:t>caregiver</a:t>
+              <a:t>careful</a:t>
             </a:r>
             <a:endParaRPr lang="en-US" sz="2800" dirty="0"/>
           </a:p>
@@ -7543,7 +7543,7 @@
                 <a:ea typeface="Calibri" pitchFamily="34" charset="-122"/>
                 <a:cs typeface="Calibri" pitchFamily="34" charset="-120"/>
               </a:rPr>
-              <a:t>Word Labs  •  wordlabs.app  •  Root: 'care' = worry, concern, look after</a:t>
+              <a:t>Word Labs  •  wordlabs.app  •  Root: 'care' = worry, attention, looking after</a:t>
             </a:r>
             <a:endParaRPr lang="en-US" sz="800" dirty="0"/>
           </a:p>
@@ -7682,7 +7682,7 @@
                 <a:ea typeface="Trebuchet MS" pitchFamily="34" charset="-122"/>
                 <a:cs typeface="Trebuchet MS" pitchFamily="34" charset="-120"/>
               </a:rPr>
-              <a:t>caregiver</a:t>
+              <a:t>careful</a:t>
             </a:r>
             <a:endParaRPr lang="en-US" sz="2800" dirty="0"/>
           </a:p>
@@ -7860,7 +7860,7 @@
                 <a:ea typeface="Calibri" pitchFamily="34" charset="-122"/>
                 <a:cs typeface="Calibri" pitchFamily="34" charset="-120"/>
               </a:rPr>
-              <a:t>to look after</a:t>
+              <a:t>attention, worry</a:t>
             </a:r>
             <a:endParaRPr lang="en-US" sz="850" dirty="0"/>
           </a:p>
@@ -7933,7 +7933,7 @@
                 <a:ea typeface="Trebuchet MS" pitchFamily="34" charset="-122"/>
                 <a:cs typeface="Trebuchet MS" pitchFamily="34" charset="-120"/>
               </a:rPr>
-              <a:t>giver</a:t>
+              <a:t>ful</a:t>
             </a:r>
             <a:endParaRPr lang="en-US" sz="1300" dirty="0"/>
           </a:p>
@@ -7972,7 +7972,7 @@
                 <a:ea typeface="Calibri" pitchFamily="34" charset="-122"/>
                 <a:cs typeface="Calibri" pitchFamily="34" charset="-120"/>
               </a:rPr>
-              <a:t>one who gives</a:t>
+              <a:t>full of</a:t>
             </a:r>
             <a:endParaRPr lang="en-US" sz="850" dirty="0"/>
           </a:p>
@@ -8528,7 +8528,7 @@
                 <a:ea typeface="Calibri" pitchFamily="34" charset="-122"/>
                 <a:cs typeface="Calibri" pitchFamily="34" charset="-120"/>
               </a:rPr>
-              <a:t>Word Labs  •  wordlabs.app  •  Root: 'care' = worry, concern, look after</a:t>
+              <a:t>Word Labs  •  wordlabs.app  •  Root: 'care' = worry, attention, looking after</a:t>
             </a:r>
             <a:endParaRPr lang="en-US" sz="800" dirty="0"/>
           </a:p>
@@ -8667,7 +8667,7 @@
                 <a:ea typeface="Trebuchet MS" pitchFamily="34" charset="-122"/>
                 <a:cs typeface="Trebuchet MS" pitchFamily="34" charset="-120"/>
               </a:rPr>
-              <a:t>caregiver</a:t>
+              <a:t>careful</a:t>
             </a:r>
             <a:endParaRPr lang="en-US" sz="2800" dirty="0"/>
           </a:p>
@@ -8845,7 +8845,7 @@
                 <a:ea typeface="Calibri" pitchFamily="34" charset="-122"/>
                 <a:cs typeface="Calibri" pitchFamily="34" charset="-120"/>
               </a:rPr>
-              <a:t>to look after</a:t>
+              <a:t>attention, worry</a:t>
             </a:r>
             <a:endParaRPr lang="en-US" sz="850" dirty="0"/>
           </a:p>
@@ -8918,7 +8918,7 @@
                 <a:ea typeface="Trebuchet MS" pitchFamily="34" charset="-122"/>
                 <a:cs typeface="Trebuchet MS" pitchFamily="34" charset="-120"/>
               </a:rPr>
-              <a:t>giver</a:t>
+              <a:t>ful</a:t>
             </a:r>
             <a:endParaRPr lang="en-US" sz="1300" dirty="0"/>
           </a:p>
@@ -8957,7 +8957,7 @@
                 <a:ea typeface="Calibri" pitchFamily="34" charset="-122"/>
                 <a:cs typeface="Calibri" pitchFamily="34" charset="-120"/>
               </a:rPr>
-              <a:t>one who gives</a:t>
+              <a:t>full of</a:t>
             </a:r>
             <a:endParaRPr lang="en-US" sz="850" dirty="0"/>
           </a:p>
@@ -9064,7 +9064,7 @@
         </p:nvSpPr>
         <p:spPr>
           <a:xfrm>
-            <a:off x="2313432" y="3364992"/>
+            <a:off x="2999232" y="3364992"/>
             <a:ext cx="1645920" cy="475488"/>
           </a:xfrm>
           <a:prstGeom prst="rect">
@@ -9091,7 +9091,7 @@
         </p:nvSpPr>
         <p:spPr>
           <a:xfrm>
-            <a:off x="2313432" y="3364992"/>
+            <a:off x="2999232" y="3364992"/>
             <a:ext cx="1645920" cy="475488"/>
           </a:xfrm>
           <a:prstGeom prst="rect">
@@ -9130,8 +9130,8 @@
         </p:nvSpPr>
         <p:spPr>
           <a:xfrm>
-            <a:off x="3959352" y="3364992"/>
-            <a:ext cx="411480" cy="475488"/>
+            <a:off x="4645152" y="3364992"/>
+            <a:ext cx="1097280" cy="475488"/>
           </a:xfrm>
           <a:prstGeom prst="rect">
             <a:avLst/>
@@ -9169,7 +9169,7 @@
         </p:nvSpPr>
         <p:spPr>
           <a:xfrm>
-            <a:off x="4370832" y="3364992"/>
+            <a:off x="5742432" y="3364992"/>
             <a:ext cx="1645920" cy="475488"/>
           </a:xfrm>
           <a:prstGeom prst="rect">
@@ -9196,7 +9196,7 @@
         </p:nvSpPr>
         <p:spPr>
           <a:xfrm>
-            <a:off x="4370832" y="3364992"/>
+            <a:off x="5742432" y="3364992"/>
             <a:ext cx="1645920" cy="475488"/>
           </a:xfrm>
           <a:prstGeom prst="rect">
@@ -9221,7 +9221,7 @@
                 <a:ea typeface="Trebuchet MS" pitchFamily="34" charset="-122"/>
                 <a:cs typeface="Trebuchet MS" pitchFamily="34" charset="-120"/>
               </a:rPr>
-              <a:t>giv</a:t>
+              <a:t>ful</a:t>
             </a:r>
             <a:endParaRPr lang="en-US" sz="1400" dirty="0"/>
           </a:p>
@@ -9229,119 +9229,80 @@
       </p:sp>
       <p:sp>
         <p:nvSpPr>
-          <p:cNvPr id="30" name="Text 28"/>
-          <p:cNvSpPr/>
-          <p:nvPr/>
-        </p:nvSpPr>
-        <p:spPr>
-          <a:xfrm>
-            <a:off x="6016752" y="3364992"/>
-            <a:ext cx="411480" cy="475488"/>
-          </a:xfrm>
-          <a:prstGeom prst="rect">
-            <a:avLst/>
-          </a:prstGeom>
-          <a:noFill/>
-          <a:ln/>
-        </p:spPr>
-        <p:txBody>
-          <a:bodyPr wrap="square" lIns="0" tIns="0" rIns="0" bIns="0" rtlCol="0" anchor="ctr"/>
-          <a:lstStyle/>
-          <a:p>
-            <a:pPr algn="ctr" indent="0" marL="0">
-              <a:buNone/>
-            </a:pPr>
-            <a:r>
-              <a:rPr lang="en-US" sz="1600" b="1" dirty="0">
-                <a:solidFill>
-                  <a:srgbClr val="0D9488"/>
+          <p:cNvPr id="30" name="Shape 28"/>
+          <p:cNvSpPr/>
+          <p:nvPr/>
+        </p:nvSpPr>
+        <p:spPr>
+          <a:xfrm>
+            <a:off x="365760" y="4096512"/>
+            <a:ext cx="1371600" cy="804672"/>
+          </a:xfrm>
+          <a:prstGeom prst="rect">
+            <a:avLst>
+              <a:gd name="adj" fmla="val 6818"/>
+            </a:avLst>
+          </a:prstGeom>
+          <a:solidFill>
+            <a:srgbClr val="E2E8F0"/>
+          </a:solidFill>
+          <a:ln w="12700">
+            <a:solidFill>
+              <a:srgbClr val="E2E8F0"/>
+            </a:solidFill>
+            <a:prstDash val="solid"/>
+          </a:ln>
+        </p:spPr>
+      </p:sp>
+      <p:sp>
+        <p:nvSpPr>
+          <p:cNvPr id="31" name="Text 29"/>
+          <p:cNvSpPr/>
+          <p:nvPr/>
+        </p:nvSpPr>
+        <p:spPr>
+          <a:xfrm>
+            <a:off x="365760" y="4096512"/>
+            <a:ext cx="1371600" cy="804672"/>
+          </a:xfrm>
+          <a:prstGeom prst="rect">
+            <a:avLst/>
+          </a:prstGeom>
+          <a:noFill/>
+          <a:ln/>
+        </p:spPr>
+        <p:txBody>
+          <a:bodyPr wrap="square" lIns="0" tIns="0" rIns="0" bIns="0" rtlCol="0" anchor="ctr"/>
+          <a:lstStyle/>
+          <a:p>
+            <a:pPr algn="ctr" indent="0" marL="0">
+              <a:buNone/>
+            </a:pPr>
+            <a:r>
+              <a:rPr lang="en-US" sz="1100" b="1" dirty="0">
+                <a:solidFill>
+                  <a:srgbClr val="475569"/>
                 </a:solidFill>
                 <a:latin typeface="Trebuchet MS" pitchFamily="34" charset="0"/>
                 <a:ea typeface="Trebuchet MS" pitchFamily="34" charset="-122"/>
                 <a:cs typeface="Trebuchet MS" pitchFamily="34" charset="-120"/>
               </a:rPr>
-              <a:t>·</a:t>
-            </a:r>
-            <a:endParaRPr lang="en-US" sz="1600" dirty="0"/>
-          </a:p>
-        </p:txBody>
-      </p:sp>
-      <p:sp>
-        <p:nvSpPr>
-          <p:cNvPr id="31" name="Shape 29"/>
-          <p:cNvSpPr/>
-          <p:nvPr/>
-        </p:nvSpPr>
-        <p:spPr>
-          <a:xfrm>
-            <a:off x="6428232" y="3364992"/>
-            <a:ext cx="1645920" cy="475488"/>
-          </a:xfrm>
-          <a:prstGeom prst="rect">
-            <a:avLst>
-              <a:gd name="adj" fmla="val 9615"/>
-            </a:avLst>
-          </a:prstGeom>
-          <a:solidFill>
-            <a:srgbClr val="FFFFFF"/>
-          </a:solidFill>
-          <a:ln w="12700">
-            <a:solidFill>
-              <a:srgbClr val="0D9488"/>
-            </a:solidFill>
-            <a:prstDash val="solid"/>
-          </a:ln>
-        </p:spPr>
-      </p:sp>
-      <p:sp>
-        <p:nvSpPr>
-          <p:cNvPr id="32" name="Text 30"/>
-          <p:cNvSpPr/>
-          <p:nvPr/>
-        </p:nvSpPr>
-        <p:spPr>
-          <a:xfrm>
-            <a:off x="6428232" y="3364992"/>
-            <a:ext cx="1645920" cy="475488"/>
-          </a:xfrm>
-          <a:prstGeom prst="rect">
-            <a:avLst/>
-          </a:prstGeom>
-          <a:noFill/>
-          <a:ln/>
-        </p:spPr>
-        <p:txBody>
-          <a:bodyPr wrap="square" lIns="0" tIns="0" rIns="0" bIns="0" rtlCol="0" anchor="ctr"/>
-          <a:lstStyle/>
-          <a:p>
-            <a:pPr algn="ctr" indent="0" marL="0">
-              <a:buNone/>
-            </a:pPr>
-            <a:r>
-              <a:rPr lang="en-US" sz="1400" b="1" dirty="0">
-                <a:solidFill>
-                  <a:srgbClr val="0D9488"/>
-                </a:solidFill>
-                <a:latin typeface="Trebuchet MS" pitchFamily="34" charset="0"/>
-                <a:ea typeface="Trebuchet MS" pitchFamily="34" charset="-122"/>
-                <a:cs typeface="Trebuchet MS" pitchFamily="34" charset="-120"/>
-              </a:rPr>
-              <a:t>er</a:t>
-            </a:r>
-            <a:endParaRPr lang="en-US" sz="1400" dirty="0"/>
-          </a:p>
-        </p:txBody>
-      </p:sp>
-      <p:sp>
-        <p:nvSpPr>
-          <p:cNvPr id="33" name="Shape 31"/>
-          <p:cNvSpPr/>
-          <p:nvPr/>
-        </p:nvSpPr>
-        <p:spPr>
-          <a:xfrm>
-            <a:off x="365760" y="4096512"/>
-            <a:ext cx="1371600" cy="804672"/>
+              <a:t>Phonemes</a:t>
+            </a:r>
+            <a:endParaRPr lang="en-US" sz="1100" dirty="0"/>
+          </a:p>
+        </p:txBody>
+      </p:sp>
+      <p:sp>
+        <p:nvSpPr>
+          <p:cNvPr id="32" name="Shape 30"/>
+          <p:cNvSpPr/>
+          <p:nvPr/>
+        </p:nvSpPr>
+        <p:spPr>
+          <a:xfrm>
+            <a:off x="1874520" y="4096512"/>
+            <a:ext cx="6903720" cy="804672"/>
           </a:xfrm>
           <a:prstGeom prst="rect">
             <a:avLst>
@@ -9349,85 +9310,19 @@
             </a:avLst>
           </a:prstGeom>
           <a:solidFill>
-            <a:srgbClr val="E2E8F0"/>
+            <a:srgbClr val="F8FAFC"/>
           </a:solidFill>
           <a:ln w="12700">
             <a:solidFill>
               <a:srgbClr val="E2E8F0"/>
             </a:solidFill>
-            <a:prstDash val="solid"/>
-          </a:ln>
-        </p:spPr>
-      </p:sp>
-      <p:sp>
-        <p:nvSpPr>
-          <p:cNvPr id="34" name="Text 32"/>
-          <p:cNvSpPr/>
-          <p:nvPr/>
-        </p:nvSpPr>
-        <p:spPr>
-          <a:xfrm>
-            <a:off x="365760" y="4096512"/>
-            <a:ext cx="1371600" cy="804672"/>
-          </a:xfrm>
-          <a:prstGeom prst="rect">
-            <a:avLst/>
-          </a:prstGeom>
-          <a:noFill/>
-          <a:ln/>
-        </p:spPr>
-        <p:txBody>
-          <a:bodyPr wrap="square" lIns="0" tIns="0" rIns="0" bIns="0" rtlCol="0" anchor="ctr"/>
-          <a:lstStyle/>
-          <a:p>
-            <a:pPr algn="ctr" indent="0" marL="0">
-              <a:buNone/>
-            </a:pPr>
-            <a:r>
-              <a:rPr lang="en-US" sz="1100" b="1" dirty="0">
-                <a:solidFill>
-                  <a:srgbClr val="475569"/>
-                </a:solidFill>
-                <a:latin typeface="Trebuchet MS" pitchFamily="34" charset="0"/>
-                <a:ea typeface="Trebuchet MS" pitchFamily="34" charset="-122"/>
-                <a:cs typeface="Trebuchet MS" pitchFamily="34" charset="-120"/>
-              </a:rPr>
-              <a:t>Phonemes</a:t>
-            </a:r>
-            <a:endParaRPr lang="en-US" sz="1100" dirty="0"/>
-          </a:p>
-        </p:txBody>
-      </p:sp>
-      <p:sp>
-        <p:nvSpPr>
-          <p:cNvPr id="35" name="Shape 33"/>
-          <p:cNvSpPr/>
-          <p:nvPr/>
-        </p:nvSpPr>
-        <p:spPr>
-          <a:xfrm>
-            <a:off x="1874520" y="4096512"/>
-            <a:ext cx="6903720" cy="804672"/>
-          </a:xfrm>
-          <a:prstGeom prst="rect">
-            <a:avLst>
-              <a:gd name="adj" fmla="val 6818"/>
-            </a:avLst>
-          </a:prstGeom>
-          <a:solidFill>
-            <a:srgbClr val="F8FAFC"/>
-          </a:solidFill>
-          <a:ln w="12700">
-            <a:solidFill>
-              <a:srgbClr val="E2E8F0"/>
-            </a:solidFill>
             <a:prstDash val="dash"/>
           </a:ln>
         </p:spPr>
       </p:sp>
       <p:sp>
         <p:nvSpPr>
-          <p:cNvPr id="36" name="Text 34"/>
+          <p:cNvPr id="33" name="Text 31"/>
           <p:cNvSpPr/>
           <p:nvPr/>
         </p:nvSpPr>
@@ -9750,7 +9645,7 @@
                 <a:ea typeface="Calibri" pitchFamily="34" charset="-122"/>
                 <a:cs typeface="Calibri" pitchFamily="34" charset="-120"/>
               </a:rPr>
-              <a:t>Word Labs  •  wordlabs.app  •  Root: 'care' = worry, concern, look after</a:t>
+              <a:t>Word Labs  •  wordlabs.app  •  Root: 'care' = worry, attention, looking after</a:t>
             </a:r>
             <a:endParaRPr lang="en-US" sz="800" dirty="0"/>
           </a:p>
@@ -9889,7 +9784,7 @@
                 <a:ea typeface="Trebuchet MS" pitchFamily="34" charset="-122"/>
                 <a:cs typeface="Trebuchet MS" pitchFamily="34" charset="-120"/>
               </a:rPr>
-              <a:t>caregiver</a:t>
+              <a:t>careful</a:t>
             </a:r>
             <a:endParaRPr lang="en-US" sz="2800" dirty="0"/>
           </a:p>
@@ -10067,7 +9962,7 @@
                 <a:ea typeface="Calibri" pitchFamily="34" charset="-122"/>
                 <a:cs typeface="Calibri" pitchFamily="34" charset="-120"/>
               </a:rPr>
-              <a:t>to look after</a:t>
+              <a:t>attention, worry</a:t>
             </a:r>
             <a:endParaRPr lang="en-US" sz="850" dirty="0"/>
           </a:p>
@@ -10140,7 +10035,7 @@
                 <a:ea typeface="Trebuchet MS" pitchFamily="34" charset="-122"/>
                 <a:cs typeface="Trebuchet MS" pitchFamily="34" charset="-120"/>
               </a:rPr>
-              <a:t>giver</a:t>
+              <a:t>ful</a:t>
             </a:r>
             <a:endParaRPr lang="en-US" sz="1300" dirty="0"/>
           </a:p>
@@ -10179,7 +10074,7 @@
                 <a:ea typeface="Calibri" pitchFamily="34" charset="-122"/>
                 <a:cs typeface="Calibri" pitchFamily="34" charset="-120"/>
               </a:rPr>
-              <a:t>one who gives</a:t>
+              <a:t>full of</a:t>
             </a:r>
             <a:endParaRPr lang="en-US" sz="850" dirty="0"/>
           </a:p>
@@ -10286,7 +10181,7 @@
         </p:nvSpPr>
         <p:spPr>
           <a:xfrm>
-            <a:off x="2313432" y="3364992"/>
+            <a:off x="2999232" y="3364992"/>
             <a:ext cx="1645920" cy="475488"/>
           </a:xfrm>
           <a:prstGeom prst="rect">
@@ -10313,7 +10208,7 @@
         </p:nvSpPr>
         <p:spPr>
           <a:xfrm>
-            <a:off x="2313432" y="3364992"/>
+            <a:off x="2999232" y="3364992"/>
             <a:ext cx="1645920" cy="475488"/>
           </a:xfrm>
           <a:prstGeom prst="rect">
@@ -10352,8 +10247,8 @@
         </p:nvSpPr>
         <p:spPr>
           <a:xfrm>
-            <a:off x="3959352" y="3364992"/>
-            <a:ext cx="411480" cy="475488"/>
+            <a:off x="4645152" y="3364992"/>
+            <a:ext cx="1097280" cy="475488"/>
           </a:xfrm>
           <a:prstGeom prst="rect">
             <a:avLst/>
@@ -10391,7 +10286,7 @@
         </p:nvSpPr>
         <p:spPr>
           <a:xfrm>
-            <a:off x="4370832" y="3364992"/>
+            <a:off x="5742432" y="3364992"/>
             <a:ext cx="1645920" cy="475488"/>
           </a:xfrm>
           <a:prstGeom prst="rect">
@@ -10418,7 +10313,7 @@
         </p:nvSpPr>
         <p:spPr>
           <a:xfrm>
-            <a:off x="4370832" y="3364992"/>
+            <a:off x="5742432" y="3364992"/>
             <a:ext cx="1645920" cy="475488"/>
           </a:xfrm>
           <a:prstGeom prst="rect">
@@ -10443,7 +10338,7 @@
                 <a:ea typeface="Trebuchet MS" pitchFamily="34" charset="-122"/>
                 <a:cs typeface="Trebuchet MS" pitchFamily="34" charset="-120"/>
               </a:rPr>
-              <a:t>giv</a:t>
+              <a:t>ful</a:t>
             </a:r>
             <a:endParaRPr lang="en-US" sz="1400" dirty="0"/>
           </a:p>
@@ -10451,211 +10346,277 @@
       </p:sp>
       <p:sp>
         <p:nvSpPr>
-          <p:cNvPr id="30" name="Text 28"/>
-          <p:cNvSpPr/>
-          <p:nvPr/>
-        </p:nvSpPr>
-        <p:spPr>
-          <a:xfrm>
-            <a:off x="6016752" y="3364992"/>
-            <a:ext cx="411480" cy="475488"/>
-          </a:xfrm>
-          <a:prstGeom prst="rect">
-            <a:avLst/>
-          </a:prstGeom>
-          <a:noFill/>
-          <a:ln/>
-        </p:spPr>
-        <p:txBody>
-          <a:bodyPr wrap="square" lIns="0" tIns="0" rIns="0" bIns="0" rtlCol="0" anchor="ctr"/>
-          <a:lstStyle/>
-          <a:p>
-            <a:pPr algn="ctr" indent="0" marL="0">
-              <a:buNone/>
-            </a:pPr>
-            <a:r>
-              <a:rPr lang="en-US" sz="1600" b="1" dirty="0">
-                <a:solidFill>
-                  <a:srgbClr val="0D9488"/>
+          <p:cNvPr id="30" name="Shape 28"/>
+          <p:cNvSpPr/>
+          <p:nvPr/>
+        </p:nvSpPr>
+        <p:spPr>
+          <a:xfrm>
+            <a:off x="365760" y="4096512"/>
+            <a:ext cx="1371600" cy="804672"/>
+          </a:xfrm>
+          <a:prstGeom prst="rect">
+            <a:avLst>
+              <a:gd name="adj" fmla="val 6818"/>
+            </a:avLst>
+          </a:prstGeom>
+          <a:solidFill>
+            <a:srgbClr val="E2E8F0"/>
+          </a:solidFill>
+          <a:ln w="12700">
+            <a:solidFill>
+              <a:srgbClr val="E2E8F0"/>
+            </a:solidFill>
+            <a:prstDash val="solid"/>
+          </a:ln>
+        </p:spPr>
+      </p:sp>
+      <p:sp>
+        <p:nvSpPr>
+          <p:cNvPr id="31" name="Text 29"/>
+          <p:cNvSpPr/>
+          <p:nvPr/>
+        </p:nvSpPr>
+        <p:spPr>
+          <a:xfrm>
+            <a:off x="365760" y="4096512"/>
+            <a:ext cx="1371600" cy="804672"/>
+          </a:xfrm>
+          <a:prstGeom prst="rect">
+            <a:avLst/>
+          </a:prstGeom>
+          <a:noFill/>
+          <a:ln/>
+        </p:spPr>
+        <p:txBody>
+          <a:bodyPr wrap="square" lIns="0" tIns="0" rIns="0" bIns="0" rtlCol="0" anchor="ctr"/>
+          <a:lstStyle/>
+          <a:p>
+            <a:pPr algn="ctr" indent="0" marL="0">
+              <a:buNone/>
+            </a:pPr>
+            <a:r>
+              <a:rPr lang="en-US" sz="1100" b="1" dirty="0">
+                <a:solidFill>
+                  <a:srgbClr val="475569"/>
                 </a:solidFill>
                 <a:latin typeface="Trebuchet MS" pitchFamily="34" charset="0"/>
                 <a:ea typeface="Trebuchet MS" pitchFamily="34" charset="-122"/>
                 <a:cs typeface="Trebuchet MS" pitchFamily="34" charset="-120"/>
               </a:rPr>
-              <a:t>·</a:t>
-            </a:r>
-            <a:endParaRPr lang="en-US" sz="1600" dirty="0"/>
-          </a:p>
-        </p:txBody>
-      </p:sp>
-      <p:sp>
-        <p:nvSpPr>
-          <p:cNvPr id="31" name="Shape 29"/>
-          <p:cNvSpPr/>
-          <p:nvPr/>
-        </p:nvSpPr>
-        <p:spPr>
-          <a:xfrm>
-            <a:off x="6428232" y="3364992"/>
-            <a:ext cx="1645920" cy="475488"/>
+              <a:t>Phonemes</a:t>
+            </a:r>
+            <a:endParaRPr lang="en-US" sz="1100" dirty="0"/>
+          </a:p>
+        </p:txBody>
+      </p:sp>
+      <p:sp>
+        <p:nvSpPr>
+          <p:cNvPr id="32" name="Shape 30"/>
+          <p:cNvSpPr/>
+          <p:nvPr/>
+        </p:nvSpPr>
+        <p:spPr>
+          <a:xfrm>
+            <a:off x="1874520" y="4096512"/>
+            <a:ext cx="6903720" cy="804672"/>
           </a:xfrm>
           <a:prstGeom prst="rect">
             <a:avLst>
-              <a:gd name="adj" fmla="val 9615"/>
+              <a:gd name="adj" fmla="val 6818"/>
             </a:avLst>
           </a:prstGeom>
           <a:solidFill>
+            <a:srgbClr val="FCE7F3"/>
+          </a:solidFill>
+          <a:ln w="12700">
+            <a:solidFill>
+              <a:srgbClr val="DB2777"/>
+            </a:solidFill>
+            <a:prstDash val="solid"/>
+          </a:ln>
+        </p:spPr>
+      </p:sp>
+      <p:sp>
+        <p:nvSpPr>
+          <p:cNvPr id="33" name="Shape 31"/>
+          <p:cNvSpPr/>
+          <p:nvPr/>
+        </p:nvSpPr>
+        <p:spPr>
+          <a:xfrm>
+            <a:off x="2254649" y="4169664"/>
+            <a:ext cx="685800" cy="384048"/>
+          </a:xfrm>
+          <a:prstGeom prst="rect">
+            <a:avLst>
+              <a:gd name="adj" fmla="val 9524"/>
+            </a:avLst>
+          </a:prstGeom>
+          <a:solidFill>
             <a:srgbClr val="FFFFFF"/>
           </a:solidFill>
           <a:ln w="12700">
             <a:solidFill>
-              <a:srgbClr val="0D9488"/>
-            </a:solidFill>
-            <a:prstDash val="solid"/>
-          </a:ln>
-        </p:spPr>
-      </p:sp>
-      <p:sp>
-        <p:nvSpPr>
-          <p:cNvPr id="32" name="Text 30"/>
-          <p:cNvSpPr/>
-          <p:nvPr/>
-        </p:nvSpPr>
-        <p:spPr>
-          <a:xfrm>
-            <a:off x="6428232" y="3364992"/>
-            <a:ext cx="1645920" cy="475488"/>
-          </a:xfrm>
-          <a:prstGeom prst="rect">
-            <a:avLst/>
-          </a:prstGeom>
-          <a:noFill/>
-          <a:ln/>
-        </p:spPr>
-        <p:txBody>
-          <a:bodyPr wrap="square" lIns="0" tIns="0" rIns="0" bIns="0" rtlCol="0" anchor="ctr"/>
-          <a:lstStyle/>
-          <a:p>
-            <a:pPr algn="ctr" indent="0" marL="0">
-              <a:buNone/>
-            </a:pPr>
-            <a:r>
-              <a:rPr lang="en-US" sz="1400" b="1" dirty="0">
-                <a:solidFill>
-                  <a:srgbClr val="0D9488"/>
+              <a:srgbClr val="DB2777"/>
+            </a:solidFill>
+            <a:prstDash val="solid"/>
+          </a:ln>
+        </p:spPr>
+      </p:sp>
+      <p:sp>
+        <p:nvSpPr>
+          <p:cNvPr id="34" name="Text 32"/>
+          <p:cNvSpPr/>
+          <p:nvPr/>
+        </p:nvSpPr>
+        <p:spPr>
+          <a:xfrm>
+            <a:off x="2254649" y="4169664"/>
+            <a:ext cx="685800" cy="384048"/>
+          </a:xfrm>
+          <a:prstGeom prst="rect">
+            <a:avLst/>
+          </a:prstGeom>
+          <a:noFill/>
+          <a:ln/>
+        </p:spPr>
+        <p:txBody>
+          <a:bodyPr wrap="square" lIns="0" tIns="0" rIns="0" bIns="0" rtlCol="0" anchor="ctr"/>
+          <a:lstStyle/>
+          <a:p>
+            <a:pPr algn="ctr" indent="0" marL="0">
+              <a:buNone/>
+            </a:pPr>
+            <a:r>
+              <a:rPr lang="en-US" sz="900" b="1" dirty="0">
+                <a:solidFill>
+                  <a:srgbClr val="9D174D"/>
                 </a:solidFill>
                 <a:latin typeface="Trebuchet MS" pitchFamily="34" charset="0"/>
                 <a:ea typeface="Trebuchet MS" pitchFamily="34" charset="-122"/>
                 <a:cs typeface="Trebuchet MS" pitchFamily="34" charset="-120"/>
               </a:rPr>
-              <a:t>er</a:t>
-            </a:r>
-            <a:endParaRPr lang="en-US" sz="1400" dirty="0"/>
-          </a:p>
-        </p:txBody>
-      </p:sp>
-      <p:sp>
-        <p:nvSpPr>
-          <p:cNvPr id="33" name="Shape 31"/>
-          <p:cNvSpPr/>
-          <p:nvPr/>
-        </p:nvSpPr>
-        <p:spPr>
-          <a:xfrm>
-            <a:off x="365760" y="4096512"/>
-            <a:ext cx="1371600" cy="804672"/>
+              <a:t>c</a:t>
+            </a:r>
+            <a:endParaRPr lang="en-US" sz="900" dirty="0"/>
+          </a:p>
+        </p:txBody>
+      </p:sp>
+      <p:sp>
+        <p:nvSpPr>
+          <p:cNvPr id="35" name="Text 33"/>
+          <p:cNvSpPr/>
+          <p:nvPr/>
+        </p:nvSpPr>
+        <p:spPr>
+          <a:xfrm>
+            <a:off x="2254649" y="4572000"/>
+            <a:ext cx="685800" cy="219456"/>
+          </a:xfrm>
+          <a:prstGeom prst="rect">
+            <a:avLst/>
+          </a:prstGeom>
+          <a:noFill/>
+          <a:ln/>
+        </p:spPr>
+        <p:txBody>
+          <a:bodyPr wrap="square" lIns="0" tIns="0" rIns="0" bIns="0" rtlCol="0" anchor="t"/>
+          <a:lstStyle/>
+          <a:p>
+            <a:pPr algn="ctr" indent="0" marL="0">
+              <a:buNone/>
+            </a:pPr>
+            <a:r>
+              <a:rPr lang="en-US" sz="750" i="1" dirty="0">
+                <a:solidFill>
+                  <a:srgbClr val="94A3B8"/>
+                </a:solidFill>
+                <a:latin typeface="Calibri" pitchFamily="34" charset="0"/>
+                <a:ea typeface="Calibri" pitchFamily="34" charset="-122"/>
+                <a:cs typeface="Calibri" pitchFamily="34" charset="-120"/>
+              </a:rPr>
+              <a:t>/k/</a:t>
+            </a:r>
+            <a:endParaRPr lang="en-US" sz="750" dirty="0"/>
+          </a:p>
+        </p:txBody>
+      </p:sp>
+      <p:sp>
+        <p:nvSpPr>
+          <p:cNvPr id="36" name="Shape 34"/>
+          <p:cNvSpPr/>
+          <p:nvPr/>
+        </p:nvSpPr>
+        <p:spPr>
+          <a:xfrm>
+            <a:off x="3293146" y="4169664"/>
+            <a:ext cx="685800" cy="384048"/>
           </a:xfrm>
           <a:prstGeom prst="rect">
             <a:avLst>
-              <a:gd name="adj" fmla="val 6818"/>
+              <a:gd name="adj" fmla="val 9524"/>
             </a:avLst>
           </a:prstGeom>
           <a:solidFill>
-            <a:srgbClr val="E2E8F0"/>
-          </a:solidFill>
-          <a:ln w="12700">
-            <a:solidFill>
-              <a:srgbClr val="E2E8F0"/>
-            </a:solidFill>
-            <a:prstDash val="solid"/>
-          </a:ln>
-        </p:spPr>
-      </p:sp>
-      <p:sp>
-        <p:nvSpPr>
-          <p:cNvPr id="34" name="Text 32"/>
-          <p:cNvSpPr/>
-          <p:nvPr/>
-        </p:nvSpPr>
-        <p:spPr>
-          <a:xfrm>
-            <a:off x="365760" y="4096512"/>
-            <a:ext cx="1371600" cy="804672"/>
-          </a:xfrm>
-          <a:prstGeom prst="rect">
-            <a:avLst/>
-          </a:prstGeom>
-          <a:noFill/>
-          <a:ln/>
-        </p:spPr>
-        <p:txBody>
-          <a:bodyPr wrap="square" lIns="0" tIns="0" rIns="0" bIns="0" rtlCol="0" anchor="ctr"/>
-          <a:lstStyle/>
-          <a:p>
-            <a:pPr algn="ctr" indent="0" marL="0">
-              <a:buNone/>
-            </a:pPr>
-            <a:r>
-              <a:rPr lang="en-US" sz="1100" b="1" dirty="0">
-                <a:solidFill>
-                  <a:srgbClr val="475569"/>
+            <a:srgbClr val="FFFFFF"/>
+          </a:solidFill>
+          <a:ln w="12700">
+            <a:solidFill>
+              <a:srgbClr val="DB2777"/>
+            </a:solidFill>
+            <a:prstDash val="solid"/>
+          </a:ln>
+        </p:spPr>
+      </p:sp>
+      <p:sp>
+        <p:nvSpPr>
+          <p:cNvPr id="37" name="Text 35"/>
+          <p:cNvSpPr/>
+          <p:nvPr/>
+        </p:nvSpPr>
+        <p:spPr>
+          <a:xfrm>
+            <a:off x="3293146" y="4169664"/>
+            <a:ext cx="685800" cy="384048"/>
+          </a:xfrm>
+          <a:prstGeom prst="rect">
+            <a:avLst/>
+          </a:prstGeom>
+          <a:noFill/>
+          <a:ln/>
+        </p:spPr>
+        <p:txBody>
+          <a:bodyPr wrap="square" lIns="0" tIns="0" rIns="0" bIns="0" rtlCol="0" anchor="ctr"/>
+          <a:lstStyle/>
+          <a:p>
+            <a:pPr algn="ctr" indent="0" marL="0">
+              <a:buNone/>
+            </a:pPr>
+            <a:r>
+              <a:rPr lang="en-US" sz="900" b="1" dirty="0">
+                <a:solidFill>
+                  <a:srgbClr val="9D174D"/>
                 </a:solidFill>
                 <a:latin typeface="Trebuchet MS" pitchFamily="34" charset="0"/>
                 <a:ea typeface="Trebuchet MS" pitchFamily="34" charset="-122"/>
                 <a:cs typeface="Trebuchet MS" pitchFamily="34" charset="-120"/>
               </a:rPr>
-              <a:t>Phonemes</a:t>
-            </a:r>
-            <a:endParaRPr lang="en-US" sz="1100" dirty="0"/>
-          </a:p>
-        </p:txBody>
-      </p:sp>
-      <p:sp>
-        <p:nvSpPr>
-          <p:cNvPr id="35" name="Shape 33"/>
-          <p:cNvSpPr/>
-          <p:nvPr/>
-        </p:nvSpPr>
-        <p:spPr>
-          <a:xfrm>
-            <a:off x="1874520" y="4096512"/>
-            <a:ext cx="6903720" cy="804672"/>
-          </a:xfrm>
-          <a:prstGeom prst="rect">
-            <a:avLst>
-              <a:gd name="adj" fmla="val 6818"/>
-            </a:avLst>
-          </a:prstGeom>
-          <a:solidFill>
-            <a:srgbClr val="FCE7F3"/>
-          </a:solidFill>
-          <a:ln w="12700">
-            <a:solidFill>
-              <a:srgbClr val="DB2777"/>
-            </a:solidFill>
-            <a:prstDash val="solid"/>
-          </a:ln>
-        </p:spPr>
-      </p:sp>
-      <p:sp>
-        <p:nvSpPr>
-          <p:cNvPr id="36" name="Shape 34"/>
-          <p:cNvSpPr/>
-          <p:nvPr/>
-        </p:nvSpPr>
-        <p:spPr>
-          <a:xfrm>
-            <a:off x="2254649" y="4169664"/>
+              <a:t>ar</a:t>
+            </a:r>
+            <a:endParaRPr lang="en-US" sz="900" dirty="0"/>
+          </a:p>
+        </p:txBody>
+      </p:sp>
+      <p:sp>
+        <p:nvSpPr>
+          <p:cNvPr id="38" name="Shape 36"/>
+          <p:cNvSpPr/>
+          <p:nvPr/>
+        </p:nvSpPr>
+        <p:spPr>
+          <a:xfrm>
+            <a:off x="4331643" y="4169664"/>
             <a:ext cx="685800" cy="384048"/>
           </a:xfrm>
           <a:prstGeom prst="rect">
@@ -10676,13 +10637,13 @@
       </p:sp>
       <p:sp>
         <p:nvSpPr>
-          <p:cNvPr id="37" name="Text 35"/>
-          <p:cNvSpPr/>
-          <p:nvPr/>
-        </p:nvSpPr>
-        <p:spPr>
-          <a:xfrm>
-            <a:off x="2254649" y="4169664"/>
+          <p:cNvPr id="39" name="Text 37"/>
+          <p:cNvSpPr/>
+          <p:nvPr/>
+        </p:nvSpPr>
+        <p:spPr>
+          <a:xfrm>
+            <a:off x="4331643" y="4169664"/>
             <a:ext cx="685800" cy="384048"/>
           </a:xfrm>
           <a:prstGeom prst="rect">
@@ -10707,7 +10668,7 @@
                 <a:ea typeface="Trebuchet MS" pitchFamily="34" charset="-122"/>
                 <a:cs typeface="Trebuchet MS" pitchFamily="34" charset="-120"/>
               </a:rPr>
-              <a:t>c</a:t>
+              <a:t>e</a:t>
             </a:r>
             <a:endParaRPr lang="en-US" sz="900" dirty="0"/>
           </a:p>
@@ -10715,52 +10676,13 @@
       </p:sp>
       <p:sp>
         <p:nvSpPr>
-          <p:cNvPr id="38" name="Text 36"/>
-          <p:cNvSpPr/>
-          <p:nvPr/>
-        </p:nvSpPr>
-        <p:spPr>
-          <a:xfrm>
-            <a:off x="2254649" y="4572000"/>
-            <a:ext cx="685800" cy="219456"/>
-          </a:xfrm>
-          <a:prstGeom prst="rect">
-            <a:avLst/>
-          </a:prstGeom>
-          <a:noFill/>
-          <a:ln/>
-        </p:spPr>
-        <p:txBody>
-          <a:bodyPr wrap="square" lIns="0" tIns="0" rIns="0" bIns="0" rtlCol="0" anchor="t"/>
-          <a:lstStyle/>
-          <a:p>
-            <a:pPr algn="ctr" indent="0" marL="0">
-              <a:buNone/>
-            </a:pPr>
-            <a:r>
-              <a:rPr lang="en-US" sz="750" i="1" dirty="0">
-                <a:solidFill>
-                  <a:srgbClr val="94A3B8"/>
-                </a:solidFill>
-                <a:latin typeface="Calibri" pitchFamily="34" charset="0"/>
-                <a:ea typeface="Calibri" pitchFamily="34" charset="-122"/>
-                <a:cs typeface="Calibri" pitchFamily="34" charset="-120"/>
-              </a:rPr>
-              <a:t>/k/</a:t>
-            </a:r>
-            <a:endParaRPr lang="en-US" sz="750" dirty="0"/>
-          </a:p>
-        </p:txBody>
-      </p:sp>
-      <p:sp>
-        <p:nvSpPr>
-          <p:cNvPr id="39" name="Shape 37"/>
-          <p:cNvSpPr/>
-          <p:nvPr/>
-        </p:nvSpPr>
-        <p:spPr>
-          <a:xfrm>
-            <a:off x="3293146" y="4169664"/>
+          <p:cNvPr id="40" name="Shape 38"/>
+          <p:cNvSpPr/>
+          <p:nvPr/>
+        </p:nvSpPr>
+        <p:spPr>
+          <a:xfrm>
+            <a:off x="5370141" y="4169664"/>
             <a:ext cx="685800" cy="384048"/>
           </a:xfrm>
           <a:prstGeom prst="rect">
@@ -10781,13 +10703,13 @@
       </p:sp>
       <p:sp>
         <p:nvSpPr>
-          <p:cNvPr id="40" name="Text 38"/>
-          <p:cNvSpPr/>
-          <p:nvPr/>
-        </p:nvSpPr>
-        <p:spPr>
-          <a:xfrm>
-            <a:off x="3293146" y="4169664"/>
+          <p:cNvPr id="41" name="Text 39"/>
+          <p:cNvSpPr/>
+          <p:nvPr/>
+        </p:nvSpPr>
+        <p:spPr>
+          <a:xfrm>
+            <a:off x="5370141" y="4169664"/>
             <a:ext cx="685800" cy="384048"/>
           </a:xfrm>
           <a:prstGeom prst="rect">
@@ -10812,7 +10734,7 @@
                 <a:ea typeface="Trebuchet MS" pitchFamily="34" charset="-122"/>
                 <a:cs typeface="Trebuchet MS" pitchFamily="34" charset="-120"/>
               </a:rPr>
-              <a:t>air</a:t>
+              <a:t>f</a:t>
             </a:r>
             <a:endParaRPr lang="en-US" sz="900" dirty="0"/>
           </a:p>
@@ -10820,13 +10742,13 @@
       </p:sp>
       <p:sp>
         <p:nvSpPr>
-          <p:cNvPr id="41" name="Shape 39"/>
-          <p:cNvSpPr/>
-          <p:nvPr/>
-        </p:nvSpPr>
-        <p:spPr>
-          <a:xfrm>
-            <a:off x="4331643" y="4169664"/>
+          <p:cNvPr id="42" name="Shape 40"/>
+          <p:cNvSpPr/>
+          <p:nvPr/>
+        </p:nvSpPr>
+        <p:spPr>
+          <a:xfrm>
+            <a:off x="6408638" y="4169664"/>
             <a:ext cx="685800" cy="384048"/>
           </a:xfrm>
           <a:prstGeom prst="rect">
@@ -10847,13 +10769,13 @@
       </p:sp>
       <p:sp>
         <p:nvSpPr>
-          <p:cNvPr id="42" name="Text 40"/>
-          <p:cNvSpPr/>
-          <p:nvPr/>
-        </p:nvSpPr>
-        <p:spPr>
-          <a:xfrm>
-            <a:off x="4331643" y="4169664"/>
+          <p:cNvPr id="43" name="Text 41"/>
+          <p:cNvSpPr/>
+          <p:nvPr/>
+        </p:nvSpPr>
+        <p:spPr>
+          <a:xfrm>
+            <a:off x="6408638" y="4169664"/>
             <a:ext cx="685800" cy="384048"/>
           </a:xfrm>
           <a:prstGeom prst="rect">
@@ -10878,7 +10800,7 @@
                 <a:ea typeface="Trebuchet MS" pitchFamily="34" charset="-122"/>
                 <a:cs typeface="Trebuchet MS" pitchFamily="34" charset="-120"/>
               </a:rPr>
-              <a:t>g</a:t>
+              <a:t>u</a:t>
             </a:r>
             <a:endParaRPr lang="en-US" sz="900" dirty="0"/>
           </a:p>
@@ -10886,13 +10808,13 @@
       </p:sp>
       <p:sp>
         <p:nvSpPr>
-          <p:cNvPr id="43" name="Shape 41"/>
-          <p:cNvSpPr/>
-          <p:nvPr/>
-        </p:nvSpPr>
-        <p:spPr>
-          <a:xfrm>
-            <a:off x="5370141" y="4169664"/>
+          <p:cNvPr id="44" name="Shape 42"/>
+          <p:cNvSpPr/>
+          <p:nvPr/>
+        </p:nvSpPr>
+        <p:spPr>
+          <a:xfrm>
+            <a:off x="7447135" y="4169664"/>
             <a:ext cx="685800" cy="384048"/>
           </a:xfrm>
           <a:prstGeom prst="rect">
@@ -10913,13 +10835,13 @@
       </p:sp>
       <p:sp>
         <p:nvSpPr>
-          <p:cNvPr id="44" name="Text 42"/>
-          <p:cNvSpPr/>
-          <p:nvPr/>
-        </p:nvSpPr>
-        <p:spPr>
-          <a:xfrm>
-            <a:off x="5370141" y="4169664"/>
+          <p:cNvPr id="45" name="Text 43"/>
+          <p:cNvSpPr/>
+          <p:nvPr/>
+        </p:nvSpPr>
+        <p:spPr>
+          <a:xfrm>
+            <a:off x="7447135" y="4169664"/>
             <a:ext cx="685800" cy="384048"/>
           </a:xfrm>
           <a:prstGeom prst="rect">
@@ -10944,139 +10866,7 @@
                 <a:ea typeface="Trebuchet MS" pitchFamily="34" charset="-122"/>
                 <a:cs typeface="Trebuchet MS" pitchFamily="34" charset="-120"/>
               </a:rPr>
-              <a:t>i</a:t>
-            </a:r>
-            <a:endParaRPr lang="en-US" sz="900" dirty="0"/>
-          </a:p>
-        </p:txBody>
-      </p:sp>
-      <p:sp>
-        <p:nvSpPr>
-          <p:cNvPr id="45" name="Shape 43"/>
-          <p:cNvSpPr/>
-          <p:nvPr/>
-        </p:nvSpPr>
-        <p:spPr>
-          <a:xfrm>
-            <a:off x="6408638" y="4169664"/>
-            <a:ext cx="685800" cy="384048"/>
-          </a:xfrm>
-          <a:prstGeom prst="rect">
-            <a:avLst>
-              <a:gd name="adj" fmla="val 9524"/>
-            </a:avLst>
-          </a:prstGeom>
-          <a:solidFill>
-            <a:srgbClr val="FFFFFF"/>
-          </a:solidFill>
-          <a:ln w="12700">
-            <a:solidFill>
-              <a:srgbClr val="DB2777"/>
-            </a:solidFill>
-            <a:prstDash val="solid"/>
-          </a:ln>
-        </p:spPr>
-      </p:sp>
-      <p:sp>
-        <p:nvSpPr>
-          <p:cNvPr id="46" name="Text 44"/>
-          <p:cNvSpPr/>
-          <p:nvPr/>
-        </p:nvSpPr>
-        <p:spPr>
-          <a:xfrm>
-            <a:off x="6408638" y="4169664"/>
-            <a:ext cx="685800" cy="384048"/>
-          </a:xfrm>
-          <a:prstGeom prst="rect">
-            <a:avLst/>
-          </a:prstGeom>
-          <a:noFill/>
-          <a:ln/>
-        </p:spPr>
-        <p:txBody>
-          <a:bodyPr wrap="square" lIns="0" tIns="0" rIns="0" bIns="0" rtlCol="0" anchor="ctr"/>
-          <a:lstStyle/>
-          <a:p>
-            <a:pPr algn="ctr" indent="0" marL="0">
-              <a:buNone/>
-            </a:pPr>
-            <a:r>
-              <a:rPr lang="en-US" sz="900" b="1" dirty="0">
-                <a:solidFill>
-                  <a:srgbClr val="9D174D"/>
-                </a:solidFill>
-                <a:latin typeface="Trebuchet MS" pitchFamily="34" charset="0"/>
-                <a:ea typeface="Trebuchet MS" pitchFamily="34" charset="-122"/>
-                <a:cs typeface="Trebuchet MS" pitchFamily="34" charset="-120"/>
-              </a:rPr>
-              <a:t>v</a:t>
-            </a:r>
-            <a:endParaRPr lang="en-US" sz="900" dirty="0"/>
-          </a:p>
-        </p:txBody>
-      </p:sp>
-      <p:sp>
-        <p:nvSpPr>
-          <p:cNvPr id="47" name="Shape 45"/>
-          <p:cNvSpPr/>
-          <p:nvPr/>
-        </p:nvSpPr>
-        <p:spPr>
-          <a:xfrm>
-            <a:off x="7447135" y="4169664"/>
-            <a:ext cx="685800" cy="384048"/>
-          </a:xfrm>
-          <a:prstGeom prst="rect">
-            <a:avLst>
-              <a:gd name="adj" fmla="val 9524"/>
-            </a:avLst>
-          </a:prstGeom>
-          <a:solidFill>
-            <a:srgbClr val="FFFFFF"/>
-          </a:solidFill>
-          <a:ln w="12700">
-            <a:solidFill>
-              <a:srgbClr val="DB2777"/>
-            </a:solidFill>
-            <a:prstDash val="solid"/>
-          </a:ln>
-        </p:spPr>
-      </p:sp>
-      <p:sp>
-        <p:nvSpPr>
-          <p:cNvPr id="48" name="Text 46"/>
-          <p:cNvSpPr/>
-          <p:nvPr/>
-        </p:nvSpPr>
-        <p:spPr>
-          <a:xfrm>
-            <a:off x="7447135" y="4169664"/>
-            <a:ext cx="685800" cy="384048"/>
-          </a:xfrm>
-          <a:prstGeom prst="rect">
-            <a:avLst/>
-          </a:prstGeom>
-          <a:noFill/>
-          <a:ln/>
-        </p:spPr>
-        <p:txBody>
-          <a:bodyPr wrap="square" lIns="0" tIns="0" rIns="0" bIns="0" rtlCol="0" anchor="ctr"/>
-          <a:lstStyle/>
-          <a:p>
-            <a:pPr algn="ctr" indent="0" marL="0">
-              <a:buNone/>
-            </a:pPr>
-            <a:r>
-              <a:rPr lang="en-US" sz="900" b="1" dirty="0">
-                <a:solidFill>
-                  <a:srgbClr val="9D174D"/>
-                </a:solidFill>
-                <a:latin typeface="Trebuchet MS" pitchFamily="34" charset="0"/>
-                <a:ea typeface="Trebuchet MS" pitchFamily="34" charset="-122"/>
-                <a:cs typeface="Trebuchet MS" pitchFamily="34" charset="-120"/>
-              </a:rPr>
-              <a:t>er</a:t>
+              <a:t>l</a:t>
             </a:r>
             <a:endParaRPr lang="en-US" sz="900" dirty="0"/>
           </a:p>
@@ -11368,7 +11158,7 @@
                 <a:ea typeface="Calibri" pitchFamily="34" charset="-122"/>
                 <a:cs typeface="Calibri" pitchFamily="34" charset="-120"/>
               </a:rPr>
-              <a:t>Word Labs  •  wordlabs.app  •  Root: 'care' = worry, concern, look after</a:t>
+              <a:t>Word Labs  •  wordlabs.app  •  Root: 'care' = worry, attention, looking after</a:t>
             </a:r>
             <a:endParaRPr lang="en-US" sz="800" dirty="0"/>
           </a:p>
@@ -11507,7 +11297,7 @@
                 <a:ea typeface="Trebuchet MS" pitchFamily="34" charset="-122"/>
                 <a:cs typeface="Trebuchet MS" pitchFamily="34" charset="-120"/>
               </a:rPr>
-              <a:t>careful</a:t>
+              <a:t>careless</a:t>
             </a:r>
             <a:endParaRPr lang="en-US" sz="2800" dirty="0"/>
           </a:p>
@@ -12195,7 +11985,7 @@
                 <a:ea typeface="Calibri" pitchFamily="34" charset="-122"/>
                 <a:cs typeface="Calibri" pitchFamily="34" charset="-120"/>
               </a:rPr>
-              <a:t>Word Labs  •  wordlabs.app  •  Root: 'care' = worry, concern, look after</a:t>
+              <a:t>Word Labs  •  wordlabs.app  •  Root: 'care' = worry, attention, looking after</a:t>
             </a:r>
             <a:endParaRPr lang="en-US" sz="800" dirty="0"/>
           </a:p>
@@ -12334,7 +12124,7 @@
                 <a:ea typeface="Trebuchet MS" pitchFamily="34" charset="-122"/>
                 <a:cs typeface="Trebuchet MS" pitchFamily="34" charset="-120"/>
               </a:rPr>
-              <a:t>careful</a:t>
+              <a:t>careless</a:t>
             </a:r>
             <a:endParaRPr lang="en-US" sz="2800" dirty="0"/>
           </a:p>
@@ -12512,7 +12302,7 @@
                 <a:ea typeface="Calibri" pitchFamily="34" charset="-122"/>
                 <a:cs typeface="Calibri" pitchFamily="34" charset="-120"/>
               </a:rPr>
-              <a:t>to look after</a:t>
+              <a:t>attention, worry</a:t>
             </a:r>
             <a:endParaRPr lang="en-US" sz="850" dirty="0"/>
           </a:p>
@@ -12535,11 +12325,11 @@
             </a:avLst>
           </a:prstGeom>
           <a:solidFill>
-            <a:srgbClr val="FCE7F3"/>
+            <a:srgbClr val="DDD6FE"/>
           </a:solidFill>
           <a:ln w="19050">
             <a:solidFill>
-              <a:srgbClr val="DB2777"/>
+              <a:srgbClr val="7C3AED"/>
             </a:solidFill>
             <a:prstDash val="solid"/>
           </a:ln>
@@ -12579,13 +12369,13 @@
             <a:r>
               <a:rPr lang="en-US" sz="1300" b="1" dirty="0">
                 <a:solidFill>
-                  <a:srgbClr val="9D174D"/>
+                  <a:srgbClr val="4C1D95"/>
                 </a:solidFill>
                 <a:latin typeface="Trebuchet MS" pitchFamily="34" charset="0"/>
                 <a:ea typeface="Trebuchet MS" pitchFamily="34" charset="-122"/>
                 <a:cs typeface="Trebuchet MS" pitchFamily="34" charset="-120"/>
               </a:rPr>
-              <a:t>ful</a:t>
+              <a:t>less</a:t>
             </a:r>
             <a:endParaRPr lang="en-US" sz="1300" dirty="0"/>
           </a:p>
@@ -12624,7 +12414,7 @@
                 <a:ea typeface="Calibri" pitchFamily="34" charset="-122"/>
                 <a:cs typeface="Calibri" pitchFamily="34" charset="-120"/>
               </a:rPr>
-              <a:t>full of</a:t>
+              <a:t>without</a:t>
             </a:r>
             <a:endParaRPr lang="en-US" sz="850" dirty="0"/>
           </a:p>
@@ -13180,7 +12970,7 @@
                 <a:ea typeface="Calibri" pitchFamily="34" charset="-122"/>
                 <a:cs typeface="Calibri" pitchFamily="34" charset="-120"/>
               </a:rPr>
-              <a:t>Word Labs  •  wordlabs.app  •  Root: 'care' = worry, concern, look after</a:t>
+              <a:t>Word Labs  •  wordlabs.app  •  Root: 'care' = worry, attention, looking after</a:t>
             </a:r>
             <a:endParaRPr lang="en-US" sz="800" dirty="0"/>
           </a:p>
@@ -13319,7 +13109,7 @@
                 <a:ea typeface="Trebuchet MS" pitchFamily="34" charset="-122"/>
                 <a:cs typeface="Trebuchet MS" pitchFamily="34" charset="-120"/>
               </a:rPr>
-              <a:t>careful</a:t>
+              <a:t>careless</a:t>
             </a:r>
             <a:endParaRPr lang="en-US" sz="2800" dirty="0"/>
           </a:p>
@@ -13497,7 +13287,7 @@
                 <a:ea typeface="Calibri" pitchFamily="34" charset="-122"/>
                 <a:cs typeface="Calibri" pitchFamily="34" charset="-120"/>
               </a:rPr>
-              <a:t>to look after</a:t>
+              <a:t>attention, worry</a:t>
             </a:r>
             <a:endParaRPr lang="en-US" sz="850" dirty="0"/>
           </a:p>
@@ -13520,11 +13310,11 @@
             </a:avLst>
           </a:prstGeom>
           <a:solidFill>
-            <a:srgbClr val="FCE7F3"/>
+            <a:srgbClr val="DDD6FE"/>
           </a:solidFill>
           <a:ln w="19050">
             <a:solidFill>
-              <a:srgbClr val="DB2777"/>
+              <a:srgbClr val="7C3AED"/>
             </a:solidFill>
             <a:prstDash val="solid"/>
           </a:ln>
@@ -13564,13 +13354,13 @@
             <a:r>
               <a:rPr lang="en-US" sz="1300" b="1" dirty="0">
                 <a:solidFill>
-                  <a:srgbClr val="9D174D"/>
+                  <a:srgbClr val="4C1D95"/>
                 </a:solidFill>
                 <a:latin typeface="Trebuchet MS" pitchFamily="34" charset="0"/>
                 <a:ea typeface="Trebuchet MS" pitchFamily="34" charset="-122"/>
                 <a:cs typeface="Trebuchet MS" pitchFamily="34" charset="-120"/>
               </a:rPr>
-              <a:t>ful</a:t>
+              <a:t>less</a:t>
             </a:r>
             <a:endParaRPr lang="en-US" sz="1300" dirty="0"/>
           </a:p>
@@ -13609,7 +13399,7 @@
                 <a:ea typeface="Calibri" pitchFamily="34" charset="-122"/>
                 <a:cs typeface="Calibri" pitchFamily="34" charset="-120"/>
               </a:rPr>
-              <a:t>full of</a:t>
+              <a:t>without</a:t>
             </a:r>
             <a:endParaRPr lang="en-US" sz="850" dirty="0"/>
           </a:p>
@@ -13873,7 +13663,7 @@
                 <a:ea typeface="Trebuchet MS" pitchFamily="34" charset="-122"/>
                 <a:cs typeface="Trebuchet MS" pitchFamily="34" charset="-120"/>
               </a:rPr>
-              <a:t>ful</a:t>
+              <a:t>less</a:t>
             </a:r>
             <a:endParaRPr lang="en-US" sz="1400" dirty="0"/>
           </a:p>
@@ -14206,7 +13996,7 @@
                 <a:ea typeface="Calibri" pitchFamily="34" charset="-122"/>
                 <a:cs typeface="Calibri" pitchFamily="34" charset="-120"/>
               </a:rPr>
-              <a:t>Root 'care' — worry, concern, look after</a:t>
+              <a:t>Root 'care' — worry, attention, looking after</a:t>
             </a:r>
             <a:endParaRPr lang="en-US" sz="1600" dirty="0"/>
           </a:p>
@@ -14562,7 +14352,7 @@
                 <a:ea typeface="Calibri" pitchFamily="34" charset="-122"/>
                 <a:cs typeface="Calibri" pitchFamily="34" charset="-120"/>
               </a:rPr>
-              <a:t>Word Labs  •  wordlabs.app  •  Root: 'care' = worry, concern, look after</a:t>
+              <a:t>Word Labs  •  wordlabs.app  •  Root: 'care' = worry, attention, looking after</a:t>
             </a:r>
             <a:endParaRPr lang="en-US" sz="800" dirty="0"/>
           </a:p>
@@ -14701,7 +14491,7 @@
                 <a:ea typeface="Trebuchet MS" pitchFamily="34" charset="-122"/>
                 <a:cs typeface="Trebuchet MS" pitchFamily="34" charset="-120"/>
               </a:rPr>
-              <a:t>careful</a:t>
+              <a:t>careless</a:t>
             </a:r>
             <a:endParaRPr lang="en-US" sz="2800" dirty="0"/>
           </a:p>
@@ -14879,7 +14669,7 @@
                 <a:ea typeface="Calibri" pitchFamily="34" charset="-122"/>
                 <a:cs typeface="Calibri" pitchFamily="34" charset="-120"/>
               </a:rPr>
-              <a:t>to look after</a:t>
+              <a:t>attention, worry</a:t>
             </a:r>
             <a:endParaRPr lang="en-US" sz="850" dirty="0"/>
           </a:p>
@@ -14902,11 +14692,11 @@
             </a:avLst>
           </a:prstGeom>
           <a:solidFill>
-            <a:srgbClr val="FCE7F3"/>
+            <a:srgbClr val="DDD6FE"/>
           </a:solidFill>
           <a:ln w="19050">
             <a:solidFill>
-              <a:srgbClr val="DB2777"/>
+              <a:srgbClr val="7C3AED"/>
             </a:solidFill>
             <a:prstDash val="solid"/>
           </a:ln>
@@ -14946,13 +14736,13 @@
             <a:r>
               <a:rPr lang="en-US" sz="1300" b="1" dirty="0">
                 <a:solidFill>
-                  <a:srgbClr val="9D174D"/>
+                  <a:srgbClr val="4C1D95"/>
                 </a:solidFill>
                 <a:latin typeface="Trebuchet MS" pitchFamily="34" charset="0"/>
                 <a:ea typeface="Trebuchet MS" pitchFamily="34" charset="-122"/>
                 <a:cs typeface="Trebuchet MS" pitchFamily="34" charset="-120"/>
               </a:rPr>
-              <a:t>ful</a:t>
+              <a:t>less</a:t>
             </a:r>
             <a:endParaRPr lang="en-US" sz="1300" dirty="0"/>
           </a:p>
@@ -14991,7 +14781,7 @@
                 <a:ea typeface="Calibri" pitchFamily="34" charset="-122"/>
                 <a:cs typeface="Calibri" pitchFamily="34" charset="-120"/>
               </a:rPr>
-              <a:t>full of</a:t>
+              <a:t>without</a:t>
             </a:r>
             <a:endParaRPr lang="en-US" sz="850" dirty="0"/>
           </a:p>
@@ -15255,7 +15045,7 @@
                 <a:ea typeface="Trebuchet MS" pitchFamily="34" charset="-122"/>
                 <a:cs typeface="Trebuchet MS" pitchFamily="34" charset="-120"/>
               </a:rPr>
-              <a:t>ful</a:t>
+              <a:t>less</a:t>
             </a:r>
             <a:endParaRPr lang="en-US" sz="1400" dirty="0"/>
           </a:p>
@@ -15362,7 +15152,7 @@
         </p:nvSpPr>
         <p:spPr>
           <a:xfrm>
-            <a:off x="2427732" y="4169664"/>
+            <a:off x="2254649" y="4169664"/>
             <a:ext cx="685800" cy="384048"/>
           </a:xfrm>
           <a:prstGeom prst="rect">
@@ -15389,7 +15179,7 @@
         </p:nvSpPr>
         <p:spPr>
           <a:xfrm>
-            <a:off x="2427732" y="4169664"/>
+            <a:off x="2254649" y="4169664"/>
             <a:ext cx="685800" cy="384048"/>
           </a:xfrm>
           <a:prstGeom prst="rect">
@@ -15428,7 +15218,7 @@
         </p:nvSpPr>
         <p:spPr>
           <a:xfrm>
-            <a:off x="2427732" y="4572000"/>
+            <a:off x="2254649" y="4572000"/>
             <a:ext cx="685800" cy="219456"/>
           </a:xfrm>
           <a:prstGeom prst="rect">
@@ -15467,7 +15257,7 @@
         </p:nvSpPr>
         <p:spPr>
           <a:xfrm>
-            <a:off x="3639312" y="4169664"/>
+            <a:off x="3293146" y="4169664"/>
             <a:ext cx="685800" cy="384048"/>
           </a:xfrm>
           <a:prstGeom prst="rect">
@@ -15494,7 +15284,7 @@
         </p:nvSpPr>
         <p:spPr>
           <a:xfrm>
-            <a:off x="3639312" y="4169664"/>
+            <a:off x="3293146" y="4169664"/>
             <a:ext cx="685800" cy="384048"/>
           </a:xfrm>
           <a:prstGeom prst="rect">
@@ -15519,7 +15309,7 @@
                 <a:ea typeface="Trebuchet MS" pitchFamily="34" charset="-122"/>
                 <a:cs typeface="Trebuchet MS" pitchFamily="34" charset="-120"/>
               </a:rPr>
-              <a:t>air</a:t>
+              <a:t>ar</a:t>
             </a:r>
             <a:endParaRPr lang="en-US" sz="900" dirty="0"/>
           </a:p>
@@ -15533,7 +15323,7 @@
         </p:nvSpPr>
         <p:spPr>
           <a:xfrm>
-            <a:off x="4850892" y="4169664"/>
+            <a:off x="4331643" y="4169664"/>
             <a:ext cx="685800" cy="384048"/>
           </a:xfrm>
           <a:prstGeom prst="rect">
@@ -15560,7 +15350,7 @@
         </p:nvSpPr>
         <p:spPr>
           <a:xfrm>
-            <a:off x="4850892" y="4169664"/>
+            <a:off x="4331643" y="4169664"/>
             <a:ext cx="685800" cy="384048"/>
           </a:xfrm>
           <a:prstGeom prst="rect">
@@ -15585,7 +15375,7 @@
                 <a:ea typeface="Trebuchet MS" pitchFamily="34" charset="-122"/>
                 <a:cs typeface="Trebuchet MS" pitchFamily="34" charset="-120"/>
               </a:rPr>
-              <a:t>f</a:t>
+              <a:t>e</a:t>
             </a:r>
             <a:endParaRPr lang="en-US" sz="900" dirty="0"/>
           </a:p>
@@ -15599,7 +15389,7 @@
         </p:nvSpPr>
         <p:spPr>
           <a:xfrm>
-            <a:off x="6062472" y="4169664"/>
+            <a:off x="5370141" y="4169664"/>
             <a:ext cx="685800" cy="384048"/>
           </a:xfrm>
           <a:prstGeom prst="rect">
@@ -15626,7 +15416,7 @@
         </p:nvSpPr>
         <p:spPr>
           <a:xfrm>
-            <a:off x="6062472" y="4169664"/>
+            <a:off x="5370141" y="4169664"/>
             <a:ext cx="685800" cy="384048"/>
           </a:xfrm>
           <a:prstGeom prst="rect">
@@ -15651,7 +15441,7 @@
                 <a:ea typeface="Trebuchet MS" pitchFamily="34" charset="-122"/>
                 <a:cs typeface="Trebuchet MS" pitchFamily="34" charset="-120"/>
               </a:rPr>
-              <a:t>u</a:t>
+              <a:t>l</a:t>
             </a:r>
             <a:endParaRPr lang="en-US" sz="900" dirty="0"/>
           </a:p>
@@ -15665,7 +15455,7 @@
         </p:nvSpPr>
         <p:spPr>
           <a:xfrm>
-            <a:off x="7274052" y="4169664"/>
+            <a:off x="6408638" y="4169664"/>
             <a:ext cx="685800" cy="384048"/>
           </a:xfrm>
           <a:prstGeom prst="rect">
@@ -15692,7 +15482,7 @@
         </p:nvSpPr>
         <p:spPr>
           <a:xfrm>
-            <a:off x="7274052" y="4169664"/>
+            <a:off x="6408638" y="4169664"/>
             <a:ext cx="685800" cy="384048"/>
           </a:xfrm>
           <a:prstGeom prst="rect">
@@ -15717,7 +15507,73 @@
                 <a:ea typeface="Trebuchet MS" pitchFamily="34" charset="-122"/>
                 <a:cs typeface="Trebuchet MS" pitchFamily="34" charset="-120"/>
               </a:rPr>
-              <a:t>l</a:t>
+              <a:t>e</a:t>
+            </a:r>
+            <a:endParaRPr lang="en-US" sz="900" dirty="0"/>
+          </a:p>
+        </p:txBody>
+      </p:sp>
+      <p:sp>
+        <p:nvSpPr>
+          <p:cNvPr id="44" name="Shape 42"/>
+          <p:cNvSpPr/>
+          <p:nvPr/>
+        </p:nvSpPr>
+        <p:spPr>
+          <a:xfrm>
+            <a:off x="7447135" y="4169664"/>
+            <a:ext cx="685800" cy="384048"/>
+          </a:xfrm>
+          <a:prstGeom prst="rect">
+            <a:avLst>
+              <a:gd name="adj" fmla="val 9524"/>
+            </a:avLst>
+          </a:prstGeom>
+          <a:solidFill>
+            <a:srgbClr val="FFFFFF"/>
+          </a:solidFill>
+          <a:ln w="12700">
+            <a:solidFill>
+              <a:srgbClr val="DB2777"/>
+            </a:solidFill>
+            <a:prstDash val="solid"/>
+          </a:ln>
+        </p:spPr>
+      </p:sp>
+      <p:sp>
+        <p:nvSpPr>
+          <p:cNvPr id="45" name="Text 43"/>
+          <p:cNvSpPr/>
+          <p:nvPr/>
+        </p:nvSpPr>
+        <p:spPr>
+          <a:xfrm>
+            <a:off x="7447135" y="4169664"/>
+            <a:ext cx="685800" cy="384048"/>
+          </a:xfrm>
+          <a:prstGeom prst="rect">
+            <a:avLst/>
+          </a:prstGeom>
+          <a:noFill/>
+          <a:ln/>
+        </p:spPr>
+        <p:txBody>
+          <a:bodyPr wrap="square" lIns="0" tIns="0" rIns="0" bIns="0" rtlCol="0" anchor="ctr"/>
+          <a:lstStyle/>
+          <a:p>
+            <a:pPr algn="ctr" indent="0" marL="0">
+              <a:buNone/>
+            </a:pPr>
+            <a:r>
+              <a:rPr lang="en-US" sz="900" b="1" dirty="0">
+                <a:solidFill>
+                  <a:srgbClr val="9D174D"/>
+                </a:solidFill>
+                <a:latin typeface="Trebuchet MS" pitchFamily="34" charset="0"/>
+                <a:ea typeface="Trebuchet MS" pitchFamily="34" charset="-122"/>
+                <a:cs typeface="Trebuchet MS" pitchFamily="34" charset="-120"/>
+              </a:rPr>
+              <a:t>ss</a:t>
             </a:r>
             <a:endParaRPr lang="en-US" sz="900" dirty="0"/>
           </a:p>
@@ -16291,7 +16147,7 @@
                 <a:ea typeface="Calibri" pitchFamily="34" charset="-122"/>
                 <a:cs typeface="Calibri" pitchFamily="34" charset="-120"/>
               </a:rPr>
-              <a:t>Word Labs  •  wordlabs.app  •  Root: 'care' = worry, concern, look after</a:t>
+              <a:t>Word Labs  •  wordlabs.app  •  Root: 'care' = worry, attention, looking after</a:t>
             </a:r>
             <a:endParaRPr lang="en-US" sz="800" dirty="0"/>
           </a:p>
@@ -16625,7 +16481,7 @@
                 <a:ea typeface="Trebuchet MS" pitchFamily="34" charset="-122"/>
                 <a:cs typeface="Trebuchet MS" pitchFamily="34" charset="-120"/>
               </a:rPr>
-              <a:t>0</a:t>
+              <a:t>2</a:t>
             </a:r>
             <a:pPr algn="ctr" indent="0" marL="0">
               <a:buNone/>
@@ -16639,7 +16495,7 @@
                 <a:ea typeface="Trebuchet MS" pitchFamily="34" charset="-122"/>
                 <a:cs typeface="Trebuchet MS" pitchFamily="34" charset="-120"/>
               </a:rPr>
-              <a:t>  punctuation mark</a:t>
+              <a:t>  punctuation marks</a:t>
             </a:r>
             <a:endParaRPr lang="en-US" sz="2800" dirty="0"/>
           </a:p>
@@ -16931,7 +16787,7 @@
                 <a:ea typeface="Calibri" pitchFamily="34" charset="-122"/>
                 <a:cs typeface="Calibri" pitchFamily="34" charset="-120"/>
               </a:rPr>
-              <a:t>Word Labs  •  wordlabs.app  •  Root: 'care' = worry, concern, look after</a:t>
+              <a:t>Word Labs  •  wordlabs.app  •  Root: 'care' = worry, attention, looking after</a:t>
             </a:r>
             <a:endParaRPr lang="en-US" sz="800" dirty="0"/>
           </a:p>
@@ -17060,7 +16916,7 @@
                 <a:ea typeface="Calibri" pitchFamily="34" charset="-122"/>
                 <a:cs typeface="Calibri" pitchFamily="34" charset="-120"/>
               </a:rPr>
-              <a:t>caregivers</a:t>
+              <a:t>caregiver</a:t>
             </a:r>
             <a:pPr algn="l" indent="0" marL="0">
               <a:buNone/>
@@ -17105,7 +16961,7 @@
                 <a:ea typeface="Calibri" pitchFamily="34" charset="-122"/>
                 <a:cs typeface="Calibri" pitchFamily="34" charset="-120"/>
               </a:rPr>
-              <a:t> reminded the children to be less </a:t>
+              <a:t> reminded the children to handle the animals gently, but </a:t>
             </a:r>
             <a:pPr algn="l" indent="0" marL="0">
               <a:buNone/>
@@ -17122,7 +16978,7 @@
                 <a:ea typeface="Calibri" pitchFamily="34" charset="-122"/>
                 <a:cs typeface="Calibri" pitchFamily="34" charset="-120"/>
               </a:rPr>
-              <a:t>careless</a:t>
+              <a:t>carelessly</a:t>
             </a:r>
             <a:pPr algn="l" indent="0" marL="0">
               <a:buNone/>
@@ -17136,7 +16992,7 @@
                 <a:ea typeface="Calibri" pitchFamily="34" charset="-122"/>
                 <a:cs typeface="Calibri" pitchFamily="34" charset="-120"/>
               </a:rPr>
-              <a:t> when packing up their equipment.</a:t>
+              <a:t> left the gate open.</a:t>
             </a:r>
             <a:endParaRPr lang="en-US" sz="1800" dirty="0"/>
           </a:p>
@@ -17291,7 +17147,7 @@
                 <a:ea typeface="Trebuchet MS" pitchFamily="34" charset="-122"/>
                 <a:cs typeface="Trebuchet MS" pitchFamily="34" charset="-120"/>
               </a:rPr>
-              <a:t>caregivers</a:t>
+              <a:t>caregiver</a:t>
             </a:r>
             <a:endParaRPr lang="en-US" sz="1400" dirty="0"/>
           </a:p>
@@ -17547,7 +17403,7 @@
                 <a:ea typeface="Trebuchet MS" pitchFamily="34" charset="-122"/>
                 <a:cs typeface="Trebuchet MS" pitchFamily="34" charset="-120"/>
               </a:rPr>
-              <a:t>careless</a:t>
+              <a:t>carelessly</a:t>
             </a:r>
             <a:endParaRPr lang="en-US" sz="1400" dirty="0"/>
           </a:p>
@@ -17878,7 +17734,7 @@
                 <a:ea typeface="Calibri" pitchFamily="34" charset="-122"/>
                 <a:cs typeface="Calibri" pitchFamily="34" charset="-120"/>
               </a:rPr>
-              <a:t>Word Labs  •  wordlabs.app  •  Root: 'care' = worry, concern, look after</a:t>
+              <a:t>Word Labs  •  wordlabs.app  •  Root: 'care' = worry, attention, looking after</a:t>
             </a:r>
             <a:endParaRPr lang="en-US" sz="800" dirty="0"/>
           </a:p>
@@ -18017,7 +17873,7 @@
                 <a:ea typeface="Trebuchet MS" pitchFamily="34" charset="-122"/>
                 <a:cs typeface="Trebuchet MS" pitchFamily="34" charset="-120"/>
               </a:rPr>
-              <a:t>caregivers</a:t>
+              <a:t>caregiver</a:t>
             </a:r>
             <a:endParaRPr lang="en-US" sz="2800" dirty="0"/>
           </a:p>
@@ -18705,7 +18561,7 @@
                 <a:ea typeface="Calibri" pitchFamily="34" charset="-122"/>
                 <a:cs typeface="Calibri" pitchFamily="34" charset="-120"/>
               </a:rPr>
-              <a:t>Word Labs  •  wordlabs.app  •  Root: 'care' = worry, concern, look after</a:t>
+              <a:t>Word Labs  •  wordlabs.app  •  Root: 'care' = worry, attention, looking after</a:t>
             </a:r>
             <a:endParaRPr lang="en-US" sz="800" dirty="0"/>
           </a:p>
@@ -18844,7 +18700,7 @@
                 <a:ea typeface="Trebuchet MS" pitchFamily="34" charset="-122"/>
                 <a:cs typeface="Trebuchet MS" pitchFamily="34" charset="-120"/>
               </a:rPr>
-              <a:t>caregivers</a:t>
+              <a:t>caregiver</a:t>
             </a:r>
             <a:endParaRPr lang="en-US" sz="2800" dirty="0"/>
           </a:p>
@@ -18924,7 +18780,7 @@
         </p:nvSpPr>
         <p:spPr>
           <a:xfrm>
-            <a:off x="2221992" y="2258568"/>
+            <a:off x="2938272" y="2258568"/>
             <a:ext cx="1828800" cy="292608"/>
           </a:xfrm>
           <a:prstGeom prst="rect">
@@ -18958,7 +18814,7 @@
         </p:nvSpPr>
         <p:spPr>
           <a:xfrm>
-            <a:off x="2221992" y="2258568"/>
+            <a:off x="2938272" y="2258568"/>
             <a:ext cx="1828800" cy="292608"/>
           </a:xfrm>
           <a:prstGeom prst="rect">
@@ -18997,7 +18853,7 @@
         </p:nvSpPr>
         <p:spPr>
           <a:xfrm>
-            <a:off x="2221992" y="2569464"/>
+            <a:off x="2938272" y="2569464"/>
             <a:ext cx="1828800" cy="201168"/>
           </a:xfrm>
           <a:prstGeom prst="rect">
@@ -19022,7 +18878,7 @@
                 <a:ea typeface="Calibri" pitchFamily="34" charset="-122"/>
                 <a:cs typeface="Calibri" pitchFamily="34" charset="-120"/>
               </a:rPr>
-              <a:t>to look after</a:t>
+              <a:t>attention, looking after</a:t>
             </a:r>
             <a:endParaRPr lang="en-US" sz="850" dirty="0"/>
           </a:p>
@@ -19036,7 +18892,7 @@
         </p:nvSpPr>
         <p:spPr>
           <a:xfrm>
-            <a:off x="4370832" y="2258568"/>
+            <a:off x="5803392" y="2258568"/>
             <a:ext cx="1828800" cy="292608"/>
           </a:xfrm>
           <a:prstGeom prst="rect">
@@ -19070,7 +18926,7 @@
         </p:nvSpPr>
         <p:spPr>
           <a:xfrm>
-            <a:off x="4370832" y="2258568"/>
+            <a:off x="5803392" y="2258568"/>
             <a:ext cx="1828800" cy="292608"/>
           </a:xfrm>
           <a:prstGeom prst="rect">
@@ -19109,7 +18965,7 @@
         </p:nvSpPr>
         <p:spPr>
           <a:xfrm>
-            <a:off x="4370832" y="2569464"/>
+            <a:off x="5803392" y="2569464"/>
             <a:ext cx="1828800" cy="201168"/>
           </a:xfrm>
           <a:prstGeom prst="rect">
@@ -19148,30 +19004,23 @@
         </p:nvSpPr>
         <p:spPr>
           <a:xfrm>
-            <a:off x="6519672" y="2258568"/>
-            <a:ext cx="1828800" cy="292608"/>
+            <a:off x="365760" y="3273552"/>
+            <a:ext cx="1371600" cy="658368"/>
           </a:xfrm>
           <a:prstGeom prst="rect">
             <a:avLst>
-              <a:gd name="adj" fmla="val 25000"/>
+              <a:gd name="adj" fmla="val 8333"/>
             </a:avLst>
           </a:prstGeom>
           <a:solidFill>
-            <a:srgbClr val="FCE7F3"/>
-          </a:solidFill>
-          <a:ln w="19050">
-            <a:solidFill>
-              <a:srgbClr val="DB2777"/>
-            </a:solidFill>
-            <a:prstDash val="solid"/>
-          </a:ln>
-          <a:effectLst>
-            <a:outerShdw sx="100000" sy="100000" kx="0" ky="0" algn="bl" rotWithShape="0" blurRad="101600" dist="38100" dir="8100000">
-              <a:srgbClr val="000000">
-                <a:alpha val="12000"/>
-              </a:srgbClr>
-            </a:outerShdw>
-          </a:effectLst>
+            <a:srgbClr val="E2E8F0"/>
+          </a:solidFill>
+          <a:ln w="12700">
+            <a:solidFill>
+              <a:srgbClr val="E2E8F0"/>
+            </a:solidFill>
+            <a:prstDash val="solid"/>
+          </a:ln>
         </p:spPr>
       </p:sp>
       <p:sp>
@@ -19182,90 +19031,117 @@
         </p:nvSpPr>
         <p:spPr>
           <a:xfrm>
-            <a:off x="6519672" y="2258568"/>
-            <a:ext cx="1828800" cy="292608"/>
-          </a:xfrm>
-          <a:prstGeom prst="rect">
-            <a:avLst/>
-          </a:prstGeom>
-          <a:noFill/>
-          <a:ln/>
-        </p:spPr>
-        <p:txBody>
-          <a:bodyPr wrap="square" lIns="0" tIns="0" rIns="0" bIns="0" rtlCol="0" anchor="ctr"/>
-          <a:lstStyle/>
-          <a:p>
-            <a:pPr algn="ctr" indent="0" marL="0">
-              <a:buNone/>
-            </a:pPr>
-            <a:r>
-              <a:rPr lang="en-US" sz="1300" b="1" dirty="0">
-                <a:solidFill>
-                  <a:srgbClr val="9D174D"/>
+            <a:off x="365760" y="3273552"/>
+            <a:ext cx="1371600" cy="658368"/>
+          </a:xfrm>
+          <a:prstGeom prst="rect">
+            <a:avLst/>
+          </a:prstGeom>
+          <a:noFill/>
+          <a:ln/>
+        </p:spPr>
+        <p:txBody>
+          <a:bodyPr wrap="square" lIns="0" tIns="0" rIns="0" bIns="0" rtlCol="0" anchor="ctr"/>
+          <a:lstStyle/>
+          <a:p>
+            <a:pPr algn="ctr" indent="0" marL="0">
+              <a:buNone/>
+            </a:pPr>
+            <a:r>
+              <a:rPr lang="en-US" sz="1100" b="1" dirty="0">
+                <a:solidFill>
+                  <a:srgbClr val="475569"/>
                 </a:solidFill>
                 <a:latin typeface="Trebuchet MS" pitchFamily="34" charset="0"/>
                 <a:ea typeface="Trebuchet MS" pitchFamily="34" charset="-122"/>
                 <a:cs typeface="Trebuchet MS" pitchFamily="34" charset="-120"/>
               </a:rPr>
-              <a:t>s</a:t>
-            </a:r>
-            <a:endParaRPr lang="en-US" sz="1300" dirty="0"/>
-          </a:p>
-        </p:txBody>
-      </p:sp>
-      <p:sp>
-        <p:nvSpPr>
-          <p:cNvPr id="24" name="Text 22"/>
-          <p:cNvSpPr/>
-          <p:nvPr/>
-        </p:nvSpPr>
-        <p:spPr>
-          <a:xfrm>
-            <a:off x="6519672" y="2569464"/>
-            <a:ext cx="1828800" cy="201168"/>
-          </a:xfrm>
-          <a:prstGeom prst="rect">
-            <a:avLst/>
-          </a:prstGeom>
-          <a:noFill/>
-          <a:ln/>
-        </p:spPr>
-        <p:txBody>
-          <a:bodyPr wrap="square" lIns="0" tIns="0" rIns="0" bIns="0" rtlCol="0" anchor="t"/>
-          <a:lstStyle/>
-          <a:p>
-            <a:pPr algn="ctr" indent="0" marL="0">
-              <a:buNone/>
-            </a:pPr>
-            <a:r>
-              <a:rPr lang="en-US" sz="850" dirty="0">
-                <a:solidFill>
-                  <a:srgbClr val="475569"/>
+              <a:t>Syllables</a:t>
+            </a:r>
+            <a:endParaRPr lang="en-US" sz="1100" dirty="0"/>
+          </a:p>
+        </p:txBody>
+      </p:sp>
+      <p:sp>
+        <p:nvSpPr>
+          <p:cNvPr id="24" name="Shape 22"/>
+          <p:cNvSpPr/>
+          <p:nvPr/>
+        </p:nvSpPr>
+        <p:spPr>
+          <a:xfrm>
+            <a:off x="1874520" y="3273552"/>
+            <a:ext cx="6903720" cy="658368"/>
+          </a:xfrm>
+          <a:prstGeom prst="rect">
+            <a:avLst>
+              <a:gd name="adj" fmla="val 8333"/>
+            </a:avLst>
+          </a:prstGeom>
+          <a:solidFill>
+            <a:srgbClr val="F8FAFC"/>
+          </a:solidFill>
+          <a:ln w="12700">
+            <a:solidFill>
+              <a:srgbClr val="E2E8F0"/>
+            </a:solidFill>
+            <a:prstDash val="dash"/>
+          </a:ln>
+        </p:spPr>
+      </p:sp>
+      <p:sp>
+        <p:nvSpPr>
+          <p:cNvPr id="25" name="Text 23"/>
+          <p:cNvSpPr/>
+          <p:nvPr/>
+        </p:nvSpPr>
+        <p:spPr>
+          <a:xfrm>
+            <a:off x="1874520" y="3273552"/>
+            <a:ext cx="6903720" cy="658368"/>
+          </a:xfrm>
+          <a:prstGeom prst="rect">
+            <a:avLst/>
+          </a:prstGeom>
+          <a:noFill/>
+          <a:ln/>
+        </p:spPr>
+        <p:txBody>
+          <a:bodyPr wrap="square" rtlCol="0" anchor="ctr"/>
+          <a:lstStyle/>
+          <a:p>
+            <a:pPr algn="ctr" indent="0" marL="0">
+              <a:buNone/>
+            </a:pPr>
+            <a:r>
+              <a:rPr lang="en-US" sz="1100" i="1" dirty="0">
+                <a:solidFill>
+                  <a:srgbClr val="CBD5E1"/>
                 </a:solidFill>
                 <a:latin typeface="Calibri" pitchFamily="34" charset="0"/>
                 <a:ea typeface="Calibri" pitchFamily="34" charset="-122"/>
                 <a:cs typeface="Calibri" pitchFamily="34" charset="-120"/>
               </a:rPr>
-              <a:t>more than one</a:t>
-            </a:r>
-            <a:endParaRPr lang="en-US" sz="850" dirty="0"/>
-          </a:p>
-        </p:txBody>
-      </p:sp>
-      <p:sp>
-        <p:nvSpPr>
-          <p:cNvPr id="25" name="Shape 23"/>
-          <p:cNvSpPr/>
-          <p:nvPr/>
-        </p:nvSpPr>
-        <p:spPr>
-          <a:xfrm>
-            <a:off x="365760" y="3273552"/>
-            <a:ext cx="1371600" cy="658368"/>
+              <a:t>Write here...</a:t>
+            </a:r>
+            <a:endParaRPr lang="en-US" sz="1100" dirty="0"/>
+          </a:p>
+        </p:txBody>
+      </p:sp>
+      <p:sp>
+        <p:nvSpPr>
+          <p:cNvPr id="26" name="Shape 24"/>
+          <p:cNvSpPr/>
+          <p:nvPr/>
+        </p:nvSpPr>
+        <p:spPr>
+          <a:xfrm>
+            <a:off x="365760" y="4096512"/>
+            <a:ext cx="1371600" cy="804672"/>
           </a:xfrm>
           <a:prstGeom prst="rect">
             <a:avLst>
-              <a:gd name="adj" fmla="val 8333"/>
+              <a:gd name="adj" fmla="val 6818"/>
             </a:avLst>
           </a:prstGeom>
           <a:solidFill>
@@ -19281,14 +19157,14 @@
       </p:sp>
       <p:sp>
         <p:nvSpPr>
-          <p:cNvPr id="26" name="Text 24"/>
-          <p:cNvSpPr/>
-          <p:nvPr/>
-        </p:nvSpPr>
-        <p:spPr>
-          <a:xfrm>
-            <a:off x="365760" y="3273552"/>
-            <a:ext cx="1371600" cy="658368"/>
+          <p:cNvPr id="27" name="Text 25"/>
+          <p:cNvSpPr/>
+          <p:nvPr/>
+        </p:nvSpPr>
+        <p:spPr>
+          <a:xfrm>
+            <a:off x="365760" y="4096512"/>
+            <a:ext cx="1371600" cy="804672"/>
           </a:xfrm>
           <a:prstGeom prst="rect">
             <a:avLst/>
@@ -19312,7 +19188,7 @@
                 <a:ea typeface="Trebuchet MS" pitchFamily="34" charset="-122"/>
                 <a:cs typeface="Trebuchet MS" pitchFamily="34" charset="-120"/>
               </a:rPr>
-              <a:t>Syllables</a:t>
+              <a:t>Phonemes</a:t>
             </a:r>
             <a:endParaRPr lang="en-US" sz="1100" dirty="0"/>
           </a:p>
@@ -19320,80 +19196,14 @@
       </p:sp>
       <p:sp>
         <p:nvSpPr>
-          <p:cNvPr id="27" name="Shape 25"/>
-          <p:cNvSpPr/>
-          <p:nvPr/>
-        </p:nvSpPr>
-        <p:spPr>
-          <a:xfrm>
-            <a:off x="1874520" y="3273552"/>
-            <a:ext cx="6903720" cy="658368"/>
-          </a:xfrm>
-          <a:prstGeom prst="rect">
-            <a:avLst>
-              <a:gd name="adj" fmla="val 8333"/>
-            </a:avLst>
-          </a:prstGeom>
-          <a:solidFill>
-            <a:srgbClr val="F8FAFC"/>
-          </a:solidFill>
-          <a:ln w="12700">
-            <a:solidFill>
-              <a:srgbClr val="E2E8F0"/>
-            </a:solidFill>
-            <a:prstDash val="dash"/>
-          </a:ln>
-        </p:spPr>
-      </p:sp>
-      <p:sp>
-        <p:nvSpPr>
-          <p:cNvPr id="28" name="Text 26"/>
-          <p:cNvSpPr/>
-          <p:nvPr/>
-        </p:nvSpPr>
-        <p:spPr>
-          <a:xfrm>
-            <a:off x="1874520" y="3273552"/>
-            <a:ext cx="6903720" cy="658368"/>
-          </a:xfrm>
-          <a:prstGeom prst="rect">
-            <a:avLst/>
-          </a:prstGeom>
-          <a:noFill/>
-          <a:ln/>
-        </p:spPr>
-        <p:txBody>
-          <a:bodyPr wrap="square" rtlCol="0" anchor="ctr"/>
-          <a:lstStyle/>
-          <a:p>
-            <a:pPr algn="ctr" indent="0" marL="0">
-              <a:buNone/>
-            </a:pPr>
-            <a:r>
-              <a:rPr lang="en-US" sz="1100" i="1" dirty="0">
-                <a:solidFill>
-                  <a:srgbClr val="CBD5E1"/>
-                </a:solidFill>
-                <a:latin typeface="Calibri" pitchFamily="34" charset="0"/>
-                <a:ea typeface="Calibri" pitchFamily="34" charset="-122"/>
-                <a:cs typeface="Calibri" pitchFamily="34" charset="-120"/>
-              </a:rPr>
-              <a:t>Write here...</a:t>
-            </a:r>
-            <a:endParaRPr lang="en-US" sz="1100" dirty="0"/>
-          </a:p>
-        </p:txBody>
-      </p:sp>
-      <p:sp>
-        <p:nvSpPr>
-          <p:cNvPr id="29" name="Shape 27"/>
-          <p:cNvSpPr/>
-          <p:nvPr/>
-        </p:nvSpPr>
-        <p:spPr>
-          <a:xfrm>
-            <a:off x="365760" y="4096512"/>
-            <a:ext cx="1371600" cy="804672"/>
+          <p:cNvPr id="28" name="Shape 26"/>
+          <p:cNvSpPr/>
+          <p:nvPr/>
+        </p:nvSpPr>
+        <p:spPr>
+          <a:xfrm>
+            <a:off x="1874520" y="4096512"/>
+            <a:ext cx="6903720" cy="804672"/>
           </a:xfrm>
           <a:prstGeom prst="rect">
             <a:avLst>
@@ -19401,85 +19211,19 @@
             </a:avLst>
           </a:prstGeom>
           <a:solidFill>
-            <a:srgbClr val="E2E8F0"/>
+            <a:srgbClr val="F8FAFC"/>
           </a:solidFill>
           <a:ln w="12700">
             <a:solidFill>
               <a:srgbClr val="E2E8F0"/>
             </a:solidFill>
-            <a:prstDash val="solid"/>
-          </a:ln>
-        </p:spPr>
-      </p:sp>
-      <p:sp>
-        <p:nvSpPr>
-          <p:cNvPr id="30" name="Text 28"/>
-          <p:cNvSpPr/>
-          <p:nvPr/>
-        </p:nvSpPr>
-        <p:spPr>
-          <a:xfrm>
-            <a:off x="365760" y="4096512"/>
-            <a:ext cx="1371600" cy="804672"/>
-          </a:xfrm>
-          <a:prstGeom prst="rect">
-            <a:avLst/>
-          </a:prstGeom>
-          <a:noFill/>
-          <a:ln/>
-        </p:spPr>
-        <p:txBody>
-          <a:bodyPr wrap="square" lIns="0" tIns="0" rIns="0" bIns="0" rtlCol="0" anchor="ctr"/>
-          <a:lstStyle/>
-          <a:p>
-            <a:pPr algn="ctr" indent="0" marL="0">
-              <a:buNone/>
-            </a:pPr>
-            <a:r>
-              <a:rPr lang="en-US" sz="1100" b="1" dirty="0">
-                <a:solidFill>
-                  <a:srgbClr val="475569"/>
-                </a:solidFill>
-                <a:latin typeface="Trebuchet MS" pitchFamily="34" charset="0"/>
-                <a:ea typeface="Trebuchet MS" pitchFamily="34" charset="-122"/>
-                <a:cs typeface="Trebuchet MS" pitchFamily="34" charset="-120"/>
-              </a:rPr>
-              <a:t>Phonemes</a:t>
-            </a:r>
-            <a:endParaRPr lang="en-US" sz="1100" dirty="0"/>
-          </a:p>
-        </p:txBody>
-      </p:sp>
-      <p:sp>
-        <p:nvSpPr>
-          <p:cNvPr id="31" name="Shape 29"/>
-          <p:cNvSpPr/>
-          <p:nvPr/>
-        </p:nvSpPr>
-        <p:spPr>
-          <a:xfrm>
-            <a:off x="1874520" y="4096512"/>
-            <a:ext cx="6903720" cy="804672"/>
-          </a:xfrm>
-          <a:prstGeom prst="rect">
-            <a:avLst>
-              <a:gd name="adj" fmla="val 6818"/>
-            </a:avLst>
-          </a:prstGeom>
-          <a:solidFill>
-            <a:srgbClr val="F8FAFC"/>
-          </a:solidFill>
-          <a:ln w="12700">
-            <a:solidFill>
-              <a:srgbClr val="E2E8F0"/>
-            </a:solidFill>
             <a:prstDash val="dash"/>
           </a:ln>
         </p:spPr>
       </p:sp>
       <p:sp>
         <p:nvSpPr>
-          <p:cNvPr id="32" name="Text 30"/>
+          <p:cNvPr id="29" name="Text 27"/>
           <p:cNvSpPr/>
           <p:nvPr/>
         </p:nvSpPr>
@@ -19802,7 +19546,7 @@
                 <a:ea typeface="Calibri" pitchFamily="34" charset="-122"/>
                 <a:cs typeface="Calibri" pitchFamily="34" charset="-120"/>
               </a:rPr>
-              <a:t>Word Labs  •  wordlabs.app  •  Root: 'care' = worry, concern, look after</a:t>
+              <a:t>Word Labs  •  wordlabs.app  •  Root: 'care' = worry, attention, looking after</a:t>
             </a:r>
             <a:endParaRPr lang="en-US" sz="800" dirty="0"/>
           </a:p>
@@ -19941,7 +19685,7 @@
                 <a:ea typeface="Trebuchet MS" pitchFamily="34" charset="-122"/>
                 <a:cs typeface="Trebuchet MS" pitchFamily="34" charset="-120"/>
               </a:rPr>
-              <a:t>caregivers</a:t>
+              <a:t>caregiver</a:t>
             </a:r>
             <a:endParaRPr lang="en-US" sz="2800" dirty="0"/>
           </a:p>
@@ -20021,7 +19765,7 @@
         </p:nvSpPr>
         <p:spPr>
           <a:xfrm>
-            <a:off x="2221992" y="2258568"/>
+            <a:off x="2938272" y="2258568"/>
             <a:ext cx="1828800" cy="292608"/>
           </a:xfrm>
           <a:prstGeom prst="rect">
@@ -20055,7 +19799,7 @@
         </p:nvSpPr>
         <p:spPr>
           <a:xfrm>
-            <a:off x="2221992" y="2258568"/>
+            <a:off x="2938272" y="2258568"/>
             <a:ext cx="1828800" cy="292608"/>
           </a:xfrm>
           <a:prstGeom prst="rect">
@@ -20094,7 +19838,7 @@
         </p:nvSpPr>
         <p:spPr>
           <a:xfrm>
-            <a:off x="2221992" y="2569464"/>
+            <a:off x="2938272" y="2569464"/>
             <a:ext cx="1828800" cy="201168"/>
           </a:xfrm>
           <a:prstGeom prst="rect">
@@ -20119,7 +19863,7 @@
                 <a:ea typeface="Calibri" pitchFamily="34" charset="-122"/>
                 <a:cs typeface="Calibri" pitchFamily="34" charset="-120"/>
               </a:rPr>
-              <a:t>to look after</a:t>
+              <a:t>attention, looking after</a:t>
             </a:r>
             <a:endParaRPr lang="en-US" sz="850" dirty="0"/>
           </a:p>
@@ -20133,7 +19877,7 @@
         </p:nvSpPr>
         <p:spPr>
           <a:xfrm>
-            <a:off x="4370832" y="2258568"/>
+            <a:off x="5803392" y="2258568"/>
             <a:ext cx="1828800" cy="292608"/>
           </a:xfrm>
           <a:prstGeom prst="rect">
@@ -20167,7 +19911,7 @@
         </p:nvSpPr>
         <p:spPr>
           <a:xfrm>
-            <a:off x="4370832" y="2258568"/>
+            <a:off x="5803392" y="2258568"/>
             <a:ext cx="1828800" cy="292608"/>
           </a:xfrm>
           <a:prstGeom prst="rect">
@@ -20206,7 +19950,7 @@
         </p:nvSpPr>
         <p:spPr>
           <a:xfrm>
-            <a:off x="4370832" y="2569464"/>
+            <a:off x="5803392" y="2569464"/>
             <a:ext cx="1828800" cy="201168"/>
           </a:xfrm>
           <a:prstGeom prst="rect">
@@ -20245,30 +19989,23 @@
         </p:nvSpPr>
         <p:spPr>
           <a:xfrm>
-            <a:off x="6519672" y="2258568"/>
-            <a:ext cx="1828800" cy="292608"/>
+            <a:off x="365760" y="3273552"/>
+            <a:ext cx="1371600" cy="658368"/>
           </a:xfrm>
           <a:prstGeom prst="rect">
             <a:avLst>
-              <a:gd name="adj" fmla="val 25000"/>
+              <a:gd name="adj" fmla="val 8333"/>
             </a:avLst>
           </a:prstGeom>
           <a:solidFill>
-            <a:srgbClr val="FCE7F3"/>
-          </a:solidFill>
-          <a:ln w="19050">
-            <a:solidFill>
-              <a:srgbClr val="DB2777"/>
-            </a:solidFill>
-            <a:prstDash val="solid"/>
-          </a:ln>
-          <a:effectLst>
-            <a:outerShdw sx="100000" sy="100000" kx="0" ky="0" algn="bl" rotWithShape="0" blurRad="101600" dist="38100" dir="8100000">
-              <a:srgbClr val="000000">
-                <a:alpha val="12000"/>
-              </a:srgbClr>
-            </a:outerShdw>
-          </a:effectLst>
+            <a:srgbClr val="E2E8F0"/>
+          </a:solidFill>
+          <a:ln w="12700">
+            <a:solidFill>
+              <a:srgbClr val="E2E8F0"/>
+            </a:solidFill>
+            <a:prstDash val="solid"/>
+          </a:ln>
         </p:spPr>
       </p:sp>
       <p:sp>
@@ -20279,86 +20016,47 @@
         </p:nvSpPr>
         <p:spPr>
           <a:xfrm>
-            <a:off x="6519672" y="2258568"/>
-            <a:ext cx="1828800" cy="292608"/>
-          </a:xfrm>
-          <a:prstGeom prst="rect">
-            <a:avLst/>
-          </a:prstGeom>
-          <a:noFill/>
-          <a:ln/>
-        </p:spPr>
-        <p:txBody>
-          <a:bodyPr wrap="square" lIns="0" tIns="0" rIns="0" bIns="0" rtlCol="0" anchor="ctr"/>
-          <a:lstStyle/>
-          <a:p>
-            <a:pPr algn="ctr" indent="0" marL="0">
-              <a:buNone/>
-            </a:pPr>
-            <a:r>
-              <a:rPr lang="en-US" sz="1300" b="1" dirty="0">
-                <a:solidFill>
-                  <a:srgbClr val="9D174D"/>
+            <a:off x="365760" y="3273552"/>
+            <a:ext cx="1371600" cy="658368"/>
+          </a:xfrm>
+          <a:prstGeom prst="rect">
+            <a:avLst/>
+          </a:prstGeom>
+          <a:noFill/>
+          <a:ln/>
+        </p:spPr>
+        <p:txBody>
+          <a:bodyPr wrap="square" lIns="0" tIns="0" rIns="0" bIns="0" rtlCol="0" anchor="ctr"/>
+          <a:lstStyle/>
+          <a:p>
+            <a:pPr algn="ctr" indent="0" marL="0">
+              <a:buNone/>
+            </a:pPr>
+            <a:r>
+              <a:rPr lang="en-US" sz="1100" b="1" dirty="0">
+                <a:solidFill>
+                  <a:srgbClr val="475569"/>
                 </a:solidFill>
                 <a:latin typeface="Trebuchet MS" pitchFamily="34" charset="0"/>
                 <a:ea typeface="Trebuchet MS" pitchFamily="34" charset="-122"/>
                 <a:cs typeface="Trebuchet MS" pitchFamily="34" charset="-120"/>
               </a:rPr>
-              <a:t>s</a:t>
-            </a:r>
-            <a:endParaRPr lang="en-US" sz="1300" dirty="0"/>
-          </a:p>
-        </p:txBody>
-      </p:sp>
-      <p:sp>
-        <p:nvSpPr>
-          <p:cNvPr id="24" name="Text 22"/>
-          <p:cNvSpPr/>
-          <p:nvPr/>
-        </p:nvSpPr>
-        <p:spPr>
-          <a:xfrm>
-            <a:off x="6519672" y="2569464"/>
-            <a:ext cx="1828800" cy="201168"/>
-          </a:xfrm>
-          <a:prstGeom prst="rect">
-            <a:avLst/>
-          </a:prstGeom>
-          <a:noFill/>
-          <a:ln/>
-        </p:spPr>
-        <p:txBody>
-          <a:bodyPr wrap="square" lIns="0" tIns="0" rIns="0" bIns="0" rtlCol="0" anchor="t"/>
-          <a:lstStyle/>
-          <a:p>
-            <a:pPr algn="ctr" indent="0" marL="0">
-              <a:buNone/>
-            </a:pPr>
-            <a:r>
-              <a:rPr lang="en-US" sz="850" dirty="0">
-                <a:solidFill>
-                  <a:srgbClr val="475569"/>
-                </a:solidFill>
-                <a:latin typeface="Calibri" pitchFamily="34" charset="0"/>
-                <a:ea typeface="Calibri" pitchFamily="34" charset="-122"/>
-                <a:cs typeface="Calibri" pitchFamily="34" charset="-120"/>
-              </a:rPr>
-              <a:t>more than one</a:t>
-            </a:r>
-            <a:endParaRPr lang="en-US" sz="850" dirty="0"/>
-          </a:p>
-        </p:txBody>
-      </p:sp>
-      <p:sp>
-        <p:nvSpPr>
-          <p:cNvPr id="25" name="Shape 23"/>
-          <p:cNvSpPr/>
-          <p:nvPr/>
-        </p:nvSpPr>
-        <p:spPr>
-          <a:xfrm>
-            <a:off x="365760" y="3273552"/>
-            <a:ext cx="1371600" cy="658368"/>
+              <a:t>Syllables</a:t>
+            </a:r>
+            <a:endParaRPr lang="en-US" sz="1100" dirty="0"/>
+          </a:p>
+        </p:txBody>
+      </p:sp>
+      <p:sp>
+        <p:nvSpPr>
+          <p:cNvPr id="24" name="Shape 22"/>
+          <p:cNvSpPr/>
+          <p:nvPr/>
+        </p:nvSpPr>
+        <p:spPr>
+          <a:xfrm>
+            <a:off x="1874520" y="3273552"/>
+            <a:ext cx="6903720" cy="658368"/>
           </a:xfrm>
           <a:prstGeom prst="rect">
             <a:avLst>
@@ -20366,11 +20064,38 @@
             </a:avLst>
           </a:prstGeom>
           <a:solidFill>
-            <a:srgbClr val="E2E8F0"/>
-          </a:solidFill>
-          <a:ln w="12700">
-            <a:solidFill>
-              <a:srgbClr val="E2E8F0"/>
+            <a:srgbClr val="CCFBF1"/>
+          </a:solidFill>
+          <a:ln w="12700">
+            <a:solidFill>
+              <a:srgbClr val="0D9488"/>
+            </a:solidFill>
+            <a:prstDash val="solid"/>
+          </a:ln>
+        </p:spPr>
+      </p:sp>
+      <p:sp>
+        <p:nvSpPr>
+          <p:cNvPr id="25" name="Shape 23"/>
+          <p:cNvSpPr/>
+          <p:nvPr/>
+        </p:nvSpPr>
+        <p:spPr>
+          <a:xfrm>
+            <a:off x="2313432" y="3364992"/>
+            <a:ext cx="1645920" cy="475488"/>
+          </a:xfrm>
+          <a:prstGeom prst="rect">
+            <a:avLst>
+              <a:gd name="adj" fmla="val 9615"/>
+            </a:avLst>
+          </a:prstGeom>
+          <a:solidFill>
+            <a:srgbClr val="FFFFFF"/>
+          </a:solidFill>
+          <a:ln w="12700">
+            <a:solidFill>
+              <a:srgbClr val="0D9488"/>
             </a:solidFill>
             <a:prstDash val="solid"/>
           </a:ln>
@@ -20384,63 +20109,75 @@
         </p:nvSpPr>
         <p:spPr>
           <a:xfrm>
-            <a:off x="365760" y="3273552"/>
-            <a:ext cx="1371600" cy="658368"/>
-          </a:xfrm>
-          <a:prstGeom prst="rect">
-            <a:avLst/>
-          </a:prstGeom>
-          <a:noFill/>
-          <a:ln/>
-        </p:spPr>
-        <p:txBody>
-          <a:bodyPr wrap="square" lIns="0" tIns="0" rIns="0" bIns="0" rtlCol="0" anchor="ctr"/>
-          <a:lstStyle/>
-          <a:p>
-            <a:pPr algn="ctr" indent="0" marL="0">
-              <a:buNone/>
-            </a:pPr>
-            <a:r>
-              <a:rPr lang="en-US" sz="1100" b="1" dirty="0">
-                <a:solidFill>
-                  <a:srgbClr val="475569"/>
+            <a:off x="2313432" y="3364992"/>
+            <a:ext cx="1645920" cy="475488"/>
+          </a:xfrm>
+          <a:prstGeom prst="rect">
+            <a:avLst/>
+          </a:prstGeom>
+          <a:noFill/>
+          <a:ln/>
+        </p:spPr>
+        <p:txBody>
+          <a:bodyPr wrap="square" lIns="0" tIns="0" rIns="0" bIns="0" rtlCol="0" anchor="ctr"/>
+          <a:lstStyle/>
+          <a:p>
+            <a:pPr algn="ctr" indent="0" marL="0">
+              <a:buNone/>
+            </a:pPr>
+            <a:r>
+              <a:rPr lang="en-US" sz="1400" b="1" dirty="0">
+                <a:solidFill>
+                  <a:srgbClr val="0D9488"/>
                 </a:solidFill>
                 <a:latin typeface="Trebuchet MS" pitchFamily="34" charset="0"/>
                 <a:ea typeface="Trebuchet MS" pitchFamily="34" charset="-122"/>
                 <a:cs typeface="Trebuchet MS" pitchFamily="34" charset="-120"/>
               </a:rPr>
-              <a:t>Syllables</a:t>
-            </a:r>
-            <a:endParaRPr lang="en-US" sz="1100" dirty="0"/>
-          </a:p>
-        </p:txBody>
-      </p:sp>
-      <p:sp>
-        <p:nvSpPr>
-          <p:cNvPr id="27" name="Shape 25"/>
-          <p:cNvSpPr/>
-          <p:nvPr/>
-        </p:nvSpPr>
-        <p:spPr>
-          <a:xfrm>
-            <a:off x="1874520" y="3273552"/>
-            <a:ext cx="6903720" cy="658368"/>
-          </a:xfrm>
-          <a:prstGeom prst="rect">
-            <a:avLst>
-              <a:gd name="adj" fmla="val 8333"/>
-            </a:avLst>
-          </a:prstGeom>
-          <a:solidFill>
-            <a:srgbClr val="CCFBF1"/>
-          </a:solidFill>
-          <a:ln w="12700">
-            <a:solidFill>
-              <a:srgbClr val="0D9488"/>
-            </a:solidFill>
-            <a:prstDash val="solid"/>
-          </a:ln>
-        </p:spPr>
+              <a:t>care</a:t>
+            </a:r>
+            <a:endParaRPr lang="en-US" sz="1400" dirty="0"/>
+          </a:p>
+        </p:txBody>
+      </p:sp>
+      <p:sp>
+        <p:nvSpPr>
+          <p:cNvPr id="27" name="Text 25"/>
+          <p:cNvSpPr/>
+          <p:nvPr/>
+        </p:nvSpPr>
+        <p:spPr>
+          <a:xfrm>
+            <a:off x="3959352" y="3364992"/>
+            <a:ext cx="411480" cy="475488"/>
+          </a:xfrm>
+          <a:prstGeom prst="rect">
+            <a:avLst/>
+          </a:prstGeom>
+          <a:noFill/>
+          <a:ln/>
+        </p:spPr>
+        <p:txBody>
+          <a:bodyPr wrap="square" lIns="0" tIns="0" rIns="0" bIns="0" rtlCol="0" anchor="ctr"/>
+          <a:lstStyle/>
+          <a:p>
+            <a:pPr algn="ctr" indent="0" marL="0">
+              <a:buNone/>
+            </a:pPr>
+            <a:r>
+              <a:rPr lang="en-US" sz="1600" b="1" dirty="0">
+                <a:solidFill>
+                  <a:srgbClr val="0D9488"/>
+                </a:solidFill>
+                <a:latin typeface="Trebuchet MS" pitchFamily="34" charset="0"/>
+                <a:ea typeface="Trebuchet MS" pitchFamily="34" charset="-122"/>
+                <a:cs typeface="Trebuchet MS" pitchFamily="34" charset="-120"/>
+              </a:rPr>
+              <a:t>·</a:t>
+            </a:r>
+            <a:endParaRPr lang="en-US" sz="1600" dirty="0"/>
+          </a:p>
+        </p:txBody>
       </p:sp>
       <p:sp>
         <p:nvSpPr>
@@ -20450,7 +20187,7 @@
         </p:nvSpPr>
         <p:spPr>
           <a:xfrm>
-            <a:off x="2313432" y="3364992"/>
+            <a:off x="4370832" y="3364992"/>
             <a:ext cx="1645920" cy="475488"/>
           </a:xfrm>
           <a:prstGeom prst="rect">
@@ -20477,7 +20214,7 @@
         </p:nvSpPr>
         <p:spPr>
           <a:xfrm>
-            <a:off x="2313432" y="3364992"/>
+            <a:off x="4370832" y="3364992"/>
             <a:ext cx="1645920" cy="475488"/>
           </a:xfrm>
           <a:prstGeom prst="rect">
@@ -20502,7 +20239,7 @@
                 <a:ea typeface="Trebuchet MS" pitchFamily="34" charset="-122"/>
                 <a:cs typeface="Trebuchet MS" pitchFamily="34" charset="-120"/>
               </a:rPr>
-              <a:t>care</a:t>
+              <a:t>giv</a:t>
             </a:r>
             <a:endParaRPr lang="en-US" sz="1400" dirty="0"/>
           </a:p>
@@ -20516,7 +20253,7 @@
         </p:nvSpPr>
         <p:spPr>
           <a:xfrm>
-            <a:off x="3959352" y="3364992"/>
+            <a:off x="6016752" y="3364992"/>
             <a:ext cx="411480" cy="475488"/>
           </a:xfrm>
           <a:prstGeom prst="rect">
@@ -20555,7 +20292,7 @@
         </p:nvSpPr>
         <p:spPr>
           <a:xfrm>
-            <a:off x="4370832" y="3364992"/>
+            <a:off x="6428232" y="3364992"/>
             <a:ext cx="1645920" cy="475488"/>
           </a:xfrm>
           <a:prstGeom prst="rect">
@@ -20582,7 +20319,7 @@
         </p:nvSpPr>
         <p:spPr>
           <a:xfrm>
-            <a:off x="4370832" y="3364992"/>
+            <a:off x="6428232" y="3364992"/>
             <a:ext cx="1645920" cy="475488"/>
           </a:xfrm>
           <a:prstGeom prst="rect">
@@ -20607,7 +20344,7 @@
                 <a:ea typeface="Trebuchet MS" pitchFamily="34" charset="-122"/>
                 <a:cs typeface="Trebuchet MS" pitchFamily="34" charset="-120"/>
               </a:rPr>
-              <a:t>giv</a:t>
+              <a:t>er</a:t>
             </a:r>
             <a:endParaRPr lang="en-US" sz="1400" dirty="0"/>
           </a:p>
@@ -20615,119 +20352,80 @@
       </p:sp>
       <p:sp>
         <p:nvSpPr>
-          <p:cNvPr id="33" name="Text 31"/>
-          <p:cNvSpPr/>
-          <p:nvPr/>
-        </p:nvSpPr>
-        <p:spPr>
-          <a:xfrm>
-            <a:off x="6016752" y="3364992"/>
-            <a:ext cx="411480" cy="475488"/>
-          </a:xfrm>
-          <a:prstGeom prst="rect">
-            <a:avLst/>
-          </a:prstGeom>
-          <a:noFill/>
-          <a:ln/>
-        </p:spPr>
-        <p:txBody>
-          <a:bodyPr wrap="square" lIns="0" tIns="0" rIns="0" bIns="0" rtlCol="0" anchor="ctr"/>
-          <a:lstStyle/>
-          <a:p>
-            <a:pPr algn="ctr" indent="0" marL="0">
-              <a:buNone/>
-            </a:pPr>
-            <a:r>
-              <a:rPr lang="en-US" sz="1600" b="1" dirty="0">
-                <a:solidFill>
-                  <a:srgbClr val="0D9488"/>
+          <p:cNvPr id="33" name="Shape 31"/>
+          <p:cNvSpPr/>
+          <p:nvPr/>
+        </p:nvSpPr>
+        <p:spPr>
+          <a:xfrm>
+            <a:off x="365760" y="4096512"/>
+            <a:ext cx="1371600" cy="804672"/>
+          </a:xfrm>
+          <a:prstGeom prst="rect">
+            <a:avLst>
+              <a:gd name="adj" fmla="val 6818"/>
+            </a:avLst>
+          </a:prstGeom>
+          <a:solidFill>
+            <a:srgbClr val="E2E8F0"/>
+          </a:solidFill>
+          <a:ln w="12700">
+            <a:solidFill>
+              <a:srgbClr val="E2E8F0"/>
+            </a:solidFill>
+            <a:prstDash val="solid"/>
+          </a:ln>
+        </p:spPr>
+      </p:sp>
+      <p:sp>
+        <p:nvSpPr>
+          <p:cNvPr id="34" name="Text 32"/>
+          <p:cNvSpPr/>
+          <p:nvPr/>
+        </p:nvSpPr>
+        <p:spPr>
+          <a:xfrm>
+            <a:off x="365760" y="4096512"/>
+            <a:ext cx="1371600" cy="804672"/>
+          </a:xfrm>
+          <a:prstGeom prst="rect">
+            <a:avLst/>
+          </a:prstGeom>
+          <a:noFill/>
+          <a:ln/>
+        </p:spPr>
+        <p:txBody>
+          <a:bodyPr wrap="square" lIns="0" tIns="0" rIns="0" bIns="0" rtlCol="0" anchor="ctr"/>
+          <a:lstStyle/>
+          <a:p>
+            <a:pPr algn="ctr" indent="0" marL="0">
+              <a:buNone/>
+            </a:pPr>
+            <a:r>
+              <a:rPr lang="en-US" sz="1100" b="1" dirty="0">
+                <a:solidFill>
+                  <a:srgbClr val="475569"/>
                 </a:solidFill>
                 <a:latin typeface="Trebuchet MS" pitchFamily="34" charset="0"/>
                 <a:ea typeface="Trebuchet MS" pitchFamily="34" charset="-122"/>
                 <a:cs typeface="Trebuchet MS" pitchFamily="34" charset="-120"/>
               </a:rPr>
-              <a:t>·</a:t>
-            </a:r>
-            <a:endParaRPr lang="en-US" sz="1600" dirty="0"/>
-          </a:p>
-        </p:txBody>
-      </p:sp>
-      <p:sp>
-        <p:nvSpPr>
-          <p:cNvPr id="34" name="Shape 32"/>
-          <p:cNvSpPr/>
-          <p:nvPr/>
-        </p:nvSpPr>
-        <p:spPr>
-          <a:xfrm>
-            <a:off x="6428232" y="3364992"/>
-            <a:ext cx="1645920" cy="475488"/>
-          </a:xfrm>
-          <a:prstGeom prst="rect">
-            <a:avLst>
-              <a:gd name="adj" fmla="val 9615"/>
-            </a:avLst>
-          </a:prstGeom>
-          <a:solidFill>
-            <a:srgbClr val="FFFFFF"/>
-          </a:solidFill>
-          <a:ln w="12700">
-            <a:solidFill>
-              <a:srgbClr val="0D9488"/>
-            </a:solidFill>
-            <a:prstDash val="solid"/>
-          </a:ln>
-        </p:spPr>
-      </p:sp>
-      <p:sp>
-        <p:nvSpPr>
-          <p:cNvPr id="35" name="Text 33"/>
-          <p:cNvSpPr/>
-          <p:nvPr/>
-        </p:nvSpPr>
-        <p:spPr>
-          <a:xfrm>
-            <a:off x="6428232" y="3364992"/>
-            <a:ext cx="1645920" cy="475488"/>
-          </a:xfrm>
-          <a:prstGeom prst="rect">
-            <a:avLst/>
-          </a:prstGeom>
-          <a:noFill/>
-          <a:ln/>
-        </p:spPr>
-        <p:txBody>
-          <a:bodyPr wrap="square" lIns="0" tIns="0" rIns="0" bIns="0" rtlCol="0" anchor="ctr"/>
-          <a:lstStyle/>
-          <a:p>
-            <a:pPr algn="ctr" indent="0" marL="0">
-              <a:buNone/>
-            </a:pPr>
-            <a:r>
-              <a:rPr lang="en-US" sz="1400" b="1" dirty="0">
-                <a:solidFill>
-                  <a:srgbClr val="0D9488"/>
-                </a:solidFill>
-                <a:latin typeface="Trebuchet MS" pitchFamily="34" charset="0"/>
-                <a:ea typeface="Trebuchet MS" pitchFamily="34" charset="-122"/>
-                <a:cs typeface="Trebuchet MS" pitchFamily="34" charset="-120"/>
-              </a:rPr>
-              <a:t>ers</a:t>
-            </a:r>
-            <a:endParaRPr lang="en-US" sz="1400" dirty="0"/>
-          </a:p>
-        </p:txBody>
-      </p:sp>
-      <p:sp>
-        <p:nvSpPr>
-          <p:cNvPr id="36" name="Shape 34"/>
-          <p:cNvSpPr/>
-          <p:nvPr/>
-        </p:nvSpPr>
-        <p:spPr>
-          <a:xfrm>
-            <a:off x="365760" y="4096512"/>
-            <a:ext cx="1371600" cy="804672"/>
+              <a:t>Phonemes</a:t>
+            </a:r>
+            <a:endParaRPr lang="en-US" sz="1100" dirty="0"/>
+          </a:p>
+        </p:txBody>
+      </p:sp>
+      <p:sp>
+        <p:nvSpPr>
+          <p:cNvPr id="35" name="Shape 33"/>
+          <p:cNvSpPr/>
+          <p:nvPr/>
+        </p:nvSpPr>
+        <p:spPr>
+          <a:xfrm>
+            <a:off x="1874520" y="4096512"/>
+            <a:ext cx="6903720" cy="804672"/>
           </a:xfrm>
           <a:prstGeom prst="rect">
             <a:avLst>
@@ -20735,85 +20433,19 @@
             </a:avLst>
           </a:prstGeom>
           <a:solidFill>
-            <a:srgbClr val="E2E8F0"/>
+            <a:srgbClr val="F8FAFC"/>
           </a:solidFill>
           <a:ln w="12700">
             <a:solidFill>
               <a:srgbClr val="E2E8F0"/>
             </a:solidFill>
-            <a:prstDash val="solid"/>
-          </a:ln>
-        </p:spPr>
-      </p:sp>
-      <p:sp>
-        <p:nvSpPr>
-          <p:cNvPr id="37" name="Text 35"/>
-          <p:cNvSpPr/>
-          <p:nvPr/>
-        </p:nvSpPr>
-        <p:spPr>
-          <a:xfrm>
-            <a:off x="365760" y="4096512"/>
-            <a:ext cx="1371600" cy="804672"/>
-          </a:xfrm>
-          <a:prstGeom prst="rect">
-            <a:avLst/>
-          </a:prstGeom>
-          <a:noFill/>
-          <a:ln/>
-        </p:spPr>
-        <p:txBody>
-          <a:bodyPr wrap="square" lIns="0" tIns="0" rIns="0" bIns="0" rtlCol="0" anchor="ctr"/>
-          <a:lstStyle/>
-          <a:p>
-            <a:pPr algn="ctr" indent="0" marL="0">
-              <a:buNone/>
-            </a:pPr>
-            <a:r>
-              <a:rPr lang="en-US" sz="1100" b="1" dirty="0">
-                <a:solidFill>
-                  <a:srgbClr val="475569"/>
-                </a:solidFill>
-                <a:latin typeface="Trebuchet MS" pitchFamily="34" charset="0"/>
-                <a:ea typeface="Trebuchet MS" pitchFamily="34" charset="-122"/>
-                <a:cs typeface="Trebuchet MS" pitchFamily="34" charset="-120"/>
-              </a:rPr>
-              <a:t>Phonemes</a:t>
-            </a:r>
-            <a:endParaRPr lang="en-US" sz="1100" dirty="0"/>
-          </a:p>
-        </p:txBody>
-      </p:sp>
-      <p:sp>
-        <p:nvSpPr>
-          <p:cNvPr id="38" name="Shape 36"/>
-          <p:cNvSpPr/>
-          <p:nvPr/>
-        </p:nvSpPr>
-        <p:spPr>
-          <a:xfrm>
-            <a:off x="1874520" y="4096512"/>
-            <a:ext cx="6903720" cy="804672"/>
-          </a:xfrm>
-          <a:prstGeom prst="rect">
-            <a:avLst>
-              <a:gd name="adj" fmla="val 6818"/>
-            </a:avLst>
-          </a:prstGeom>
-          <a:solidFill>
-            <a:srgbClr val="F8FAFC"/>
-          </a:solidFill>
-          <a:ln w="12700">
-            <a:solidFill>
-              <a:srgbClr val="E2E8F0"/>
-            </a:solidFill>
             <a:prstDash val="dash"/>
           </a:ln>
         </p:spPr>
       </p:sp>
       <p:sp>
         <p:nvSpPr>
-          <p:cNvPr id="39" name="Text 37"/>
+          <p:cNvPr id="36" name="Text 34"/>
           <p:cNvSpPr/>
           <p:nvPr/>
         </p:nvSpPr>
@@ -21136,7 +20768,7 @@
                 <a:ea typeface="Calibri" pitchFamily="34" charset="-122"/>
                 <a:cs typeface="Calibri" pitchFamily="34" charset="-120"/>
               </a:rPr>
-              <a:t>Word Labs  •  wordlabs.app  •  Root: 'care' = worry, concern, look after</a:t>
+              <a:t>Word Labs  •  wordlabs.app  •  Root: 'care' = worry, attention, looking after</a:t>
             </a:r>
             <a:endParaRPr lang="en-US" sz="800" dirty="0"/>
           </a:p>
@@ -21275,7 +20907,7 @@
                 <a:ea typeface="Trebuchet MS" pitchFamily="34" charset="-122"/>
                 <a:cs typeface="Trebuchet MS" pitchFamily="34" charset="-120"/>
               </a:rPr>
-              <a:t>caregivers</a:t>
+              <a:t>caregiver</a:t>
             </a:r>
             <a:endParaRPr lang="en-US" sz="2800" dirty="0"/>
           </a:p>
@@ -21355,7 +20987,7 @@
         </p:nvSpPr>
         <p:spPr>
           <a:xfrm>
-            <a:off x="2221992" y="2258568"/>
+            <a:off x="2938272" y="2258568"/>
             <a:ext cx="1828800" cy="292608"/>
           </a:xfrm>
           <a:prstGeom prst="rect">
@@ -21389,7 +21021,7 @@
         </p:nvSpPr>
         <p:spPr>
           <a:xfrm>
-            <a:off x="2221992" y="2258568"/>
+            <a:off x="2938272" y="2258568"/>
             <a:ext cx="1828800" cy="292608"/>
           </a:xfrm>
           <a:prstGeom prst="rect">
@@ -21428,7 +21060,7 @@
         </p:nvSpPr>
         <p:spPr>
           <a:xfrm>
-            <a:off x="2221992" y="2569464"/>
+            <a:off x="2938272" y="2569464"/>
             <a:ext cx="1828800" cy="201168"/>
           </a:xfrm>
           <a:prstGeom prst="rect">
@@ -21453,7 +21085,7 @@
                 <a:ea typeface="Calibri" pitchFamily="34" charset="-122"/>
                 <a:cs typeface="Calibri" pitchFamily="34" charset="-120"/>
               </a:rPr>
-              <a:t>to look after</a:t>
+              <a:t>attention, looking after</a:t>
             </a:r>
             <a:endParaRPr lang="en-US" sz="850" dirty="0"/>
           </a:p>
@@ -21467,7 +21099,7 @@
         </p:nvSpPr>
         <p:spPr>
           <a:xfrm>
-            <a:off x="4370832" y="2258568"/>
+            <a:off x="5803392" y="2258568"/>
             <a:ext cx="1828800" cy="292608"/>
           </a:xfrm>
           <a:prstGeom prst="rect">
@@ -21501,7 +21133,7 @@
         </p:nvSpPr>
         <p:spPr>
           <a:xfrm>
-            <a:off x="4370832" y="2258568"/>
+            <a:off x="5803392" y="2258568"/>
             <a:ext cx="1828800" cy="292608"/>
           </a:xfrm>
           <a:prstGeom prst="rect">
@@ -21540,7 +21172,7 @@
         </p:nvSpPr>
         <p:spPr>
           <a:xfrm>
-            <a:off x="4370832" y="2569464"/>
+            <a:off x="5803392" y="2569464"/>
             <a:ext cx="1828800" cy="201168"/>
           </a:xfrm>
           <a:prstGeom prst="rect">
@@ -21579,30 +21211,23 @@
         </p:nvSpPr>
         <p:spPr>
           <a:xfrm>
-            <a:off x="6519672" y="2258568"/>
-            <a:ext cx="1828800" cy="292608"/>
+            <a:off x="365760" y="3273552"/>
+            <a:ext cx="1371600" cy="658368"/>
           </a:xfrm>
           <a:prstGeom prst="rect">
             <a:avLst>
-              <a:gd name="adj" fmla="val 25000"/>
+              <a:gd name="adj" fmla="val 8333"/>
             </a:avLst>
           </a:prstGeom>
           <a:solidFill>
-            <a:srgbClr val="FCE7F3"/>
-          </a:solidFill>
-          <a:ln w="19050">
-            <a:solidFill>
-              <a:srgbClr val="DB2777"/>
-            </a:solidFill>
-            <a:prstDash val="solid"/>
-          </a:ln>
-          <a:effectLst>
-            <a:outerShdw sx="100000" sy="100000" kx="0" ky="0" algn="bl" rotWithShape="0" blurRad="101600" dist="38100" dir="8100000">
-              <a:srgbClr val="000000">
-                <a:alpha val="12000"/>
-              </a:srgbClr>
-            </a:outerShdw>
-          </a:effectLst>
+            <a:srgbClr val="E2E8F0"/>
+          </a:solidFill>
+          <a:ln w="12700">
+            <a:solidFill>
+              <a:srgbClr val="E2E8F0"/>
+            </a:solidFill>
+            <a:prstDash val="solid"/>
+          </a:ln>
         </p:spPr>
       </p:sp>
       <p:sp>
@@ -21613,47 +21238,509 @@
         </p:nvSpPr>
         <p:spPr>
           <a:xfrm>
-            <a:off x="6519672" y="2258568"/>
-            <a:ext cx="1828800" cy="292608"/>
-          </a:xfrm>
-          <a:prstGeom prst="rect">
-            <a:avLst/>
-          </a:prstGeom>
-          <a:noFill/>
-          <a:ln/>
-        </p:spPr>
-        <p:txBody>
-          <a:bodyPr wrap="square" lIns="0" tIns="0" rIns="0" bIns="0" rtlCol="0" anchor="ctr"/>
-          <a:lstStyle/>
-          <a:p>
-            <a:pPr algn="ctr" indent="0" marL="0">
-              <a:buNone/>
-            </a:pPr>
-            <a:r>
-              <a:rPr lang="en-US" sz="1300" b="1" dirty="0">
-                <a:solidFill>
-                  <a:srgbClr val="9D174D"/>
+            <a:off x="365760" y="3273552"/>
+            <a:ext cx="1371600" cy="658368"/>
+          </a:xfrm>
+          <a:prstGeom prst="rect">
+            <a:avLst/>
+          </a:prstGeom>
+          <a:noFill/>
+          <a:ln/>
+        </p:spPr>
+        <p:txBody>
+          <a:bodyPr wrap="square" lIns="0" tIns="0" rIns="0" bIns="0" rtlCol="0" anchor="ctr"/>
+          <a:lstStyle/>
+          <a:p>
+            <a:pPr algn="ctr" indent="0" marL="0">
+              <a:buNone/>
+            </a:pPr>
+            <a:r>
+              <a:rPr lang="en-US" sz="1100" b="1" dirty="0">
+                <a:solidFill>
+                  <a:srgbClr val="475569"/>
                 </a:solidFill>
                 <a:latin typeface="Trebuchet MS" pitchFamily="34" charset="0"/>
                 <a:ea typeface="Trebuchet MS" pitchFamily="34" charset="-122"/>
                 <a:cs typeface="Trebuchet MS" pitchFamily="34" charset="-120"/>
               </a:rPr>
-              <a:t>s</a:t>
-            </a:r>
-            <a:endParaRPr lang="en-US" sz="1300" dirty="0"/>
-          </a:p>
-        </p:txBody>
-      </p:sp>
-      <p:sp>
-        <p:nvSpPr>
-          <p:cNvPr id="24" name="Text 22"/>
-          <p:cNvSpPr/>
-          <p:nvPr/>
-        </p:nvSpPr>
-        <p:spPr>
-          <a:xfrm>
-            <a:off x="6519672" y="2569464"/>
-            <a:ext cx="1828800" cy="201168"/>
+              <a:t>Syllables</a:t>
+            </a:r>
+            <a:endParaRPr lang="en-US" sz="1100" dirty="0"/>
+          </a:p>
+        </p:txBody>
+      </p:sp>
+      <p:sp>
+        <p:nvSpPr>
+          <p:cNvPr id="24" name="Shape 22"/>
+          <p:cNvSpPr/>
+          <p:nvPr/>
+        </p:nvSpPr>
+        <p:spPr>
+          <a:xfrm>
+            <a:off x="1874520" y="3273552"/>
+            <a:ext cx="6903720" cy="658368"/>
+          </a:xfrm>
+          <a:prstGeom prst="rect">
+            <a:avLst>
+              <a:gd name="adj" fmla="val 8333"/>
+            </a:avLst>
+          </a:prstGeom>
+          <a:solidFill>
+            <a:srgbClr val="CCFBF1"/>
+          </a:solidFill>
+          <a:ln w="12700">
+            <a:solidFill>
+              <a:srgbClr val="0D9488"/>
+            </a:solidFill>
+            <a:prstDash val="solid"/>
+          </a:ln>
+        </p:spPr>
+      </p:sp>
+      <p:sp>
+        <p:nvSpPr>
+          <p:cNvPr id="25" name="Shape 23"/>
+          <p:cNvSpPr/>
+          <p:nvPr/>
+        </p:nvSpPr>
+        <p:spPr>
+          <a:xfrm>
+            <a:off x="2313432" y="3364992"/>
+            <a:ext cx="1645920" cy="475488"/>
+          </a:xfrm>
+          <a:prstGeom prst="rect">
+            <a:avLst>
+              <a:gd name="adj" fmla="val 9615"/>
+            </a:avLst>
+          </a:prstGeom>
+          <a:solidFill>
+            <a:srgbClr val="FFFFFF"/>
+          </a:solidFill>
+          <a:ln w="12700">
+            <a:solidFill>
+              <a:srgbClr val="0D9488"/>
+            </a:solidFill>
+            <a:prstDash val="solid"/>
+          </a:ln>
+        </p:spPr>
+      </p:sp>
+      <p:sp>
+        <p:nvSpPr>
+          <p:cNvPr id="26" name="Text 24"/>
+          <p:cNvSpPr/>
+          <p:nvPr/>
+        </p:nvSpPr>
+        <p:spPr>
+          <a:xfrm>
+            <a:off x="2313432" y="3364992"/>
+            <a:ext cx="1645920" cy="475488"/>
+          </a:xfrm>
+          <a:prstGeom prst="rect">
+            <a:avLst/>
+          </a:prstGeom>
+          <a:noFill/>
+          <a:ln/>
+        </p:spPr>
+        <p:txBody>
+          <a:bodyPr wrap="square" lIns="0" tIns="0" rIns="0" bIns="0" rtlCol="0" anchor="ctr"/>
+          <a:lstStyle/>
+          <a:p>
+            <a:pPr algn="ctr" indent="0" marL="0">
+              <a:buNone/>
+            </a:pPr>
+            <a:r>
+              <a:rPr lang="en-US" sz="1400" b="1" dirty="0">
+                <a:solidFill>
+                  <a:srgbClr val="0D9488"/>
+                </a:solidFill>
+                <a:latin typeface="Trebuchet MS" pitchFamily="34" charset="0"/>
+                <a:ea typeface="Trebuchet MS" pitchFamily="34" charset="-122"/>
+                <a:cs typeface="Trebuchet MS" pitchFamily="34" charset="-120"/>
+              </a:rPr>
+              <a:t>care</a:t>
+            </a:r>
+            <a:endParaRPr lang="en-US" sz="1400" dirty="0"/>
+          </a:p>
+        </p:txBody>
+      </p:sp>
+      <p:sp>
+        <p:nvSpPr>
+          <p:cNvPr id="27" name="Text 25"/>
+          <p:cNvSpPr/>
+          <p:nvPr/>
+        </p:nvSpPr>
+        <p:spPr>
+          <a:xfrm>
+            <a:off x="3959352" y="3364992"/>
+            <a:ext cx="411480" cy="475488"/>
+          </a:xfrm>
+          <a:prstGeom prst="rect">
+            <a:avLst/>
+          </a:prstGeom>
+          <a:noFill/>
+          <a:ln/>
+        </p:spPr>
+        <p:txBody>
+          <a:bodyPr wrap="square" lIns="0" tIns="0" rIns="0" bIns="0" rtlCol="0" anchor="ctr"/>
+          <a:lstStyle/>
+          <a:p>
+            <a:pPr algn="ctr" indent="0" marL="0">
+              <a:buNone/>
+            </a:pPr>
+            <a:r>
+              <a:rPr lang="en-US" sz="1600" b="1" dirty="0">
+                <a:solidFill>
+                  <a:srgbClr val="0D9488"/>
+                </a:solidFill>
+                <a:latin typeface="Trebuchet MS" pitchFamily="34" charset="0"/>
+                <a:ea typeface="Trebuchet MS" pitchFamily="34" charset="-122"/>
+                <a:cs typeface="Trebuchet MS" pitchFamily="34" charset="-120"/>
+              </a:rPr>
+              <a:t>·</a:t>
+            </a:r>
+            <a:endParaRPr lang="en-US" sz="1600" dirty="0"/>
+          </a:p>
+        </p:txBody>
+      </p:sp>
+      <p:sp>
+        <p:nvSpPr>
+          <p:cNvPr id="28" name="Shape 26"/>
+          <p:cNvSpPr/>
+          <p:nvPr/>
+        </p:nvSpPr>
+        <p:spPr>
+          <a:xfrm>
+            <a:off x="4370832" y="3364992"/>
+            <a:ext cx="1645920" cy="475488"/>
+          </a:xfrm>
+          <a:prstGeom prst="rect">
+            <a:avLst>
+              <a:gd name="adj" fmla="val 9615"/>
+            </a:avLst>
+          </a:prstGeom>
+          <a:solidFill>
+            <a:srgbClr val="FFFFFF"/>
+          </a:solidFill>
+          <a:ln w="12700">
+            <a:solidFill>
+              <a:srgbClr val="0D9488"/>
+            </a:solidFill>
+            <a:prstDash val="solid"/>
+          </a:ln>
+        </p:spPr>
+      </p:sp>
+      <p:sp>
+        <p:nvSpPr>
+          <p:cNvPr id="29" name="Text 27"/>
+          <p:cNvSpPr/>
+          <p:nvPr/>
+        </p:nvSpPr>
+        <p:spPr>
+          <a:xfrm>
+            <a:off x="4370832" y="3364992"/>
+            <a:ext cx="1645920" cy="475488"/>
+          </a:xfrm>
+          <a:prstGeom prst="rect">
+            <a:avLst/>
+          </a:prstGeom>
+          <a:noFill/>
+          <a:ln/>
+        </p:spPr>
+        <p:txBody>
+          <a:bodyPr wrap="square" lIns="0" tIns="0" rIns="0" bIns="0" rtlCol="0" anchor="ctr"/>
+          <a:lstStyle/>
+          <a:p>
+            <a:pPr algn="ctr" indent="0" marL="0">
+              <a:buNone/>
+            </a:pPr>
+            <a:r>
+              <a:rPr lang="en-US" sz="1400" b="1" dirty="0">
+                <a:solidFill>
+                  <a:srgbClr val="0D9488"/>
+                </a:solidFill>
+                <a:latin typeface="Trebuchet MS" pitchFamily="34" charset="0"/>
+                <a:ea typeface="Trebuchet MS" pitchFamily="34" charset="-122"/>
+                <a:cs typeface="Trebuchet MS" pitchFamily="34" charset="-120"/>
+              </a:rPr>
+              <a:t>giv</a:t>
+            </a:r>
+            <a:endParaRPr lang="en-US" sz="1400" dirty="0"/>
+          </a:p>
+        </p:txBody>
+      </p:sp>
+      <p:sp>
+        <p:nvSpPr>
+          <p:cNvPr id="30" name="Text 28"/>
+          <p:cNvSpPr/>
+          <p:nvPr/>
+        </p:nvSpPr>
+        <p:spPr>
+          <a:xfrm>
+            <a:off x="6016752" y="3364992"/>
+            <a:ext cx="411480" cy="475488"/>
+          </a:xfrm>
+          <a:prstGeom prst="rect">
+            <a:avLst/>
+          </a:prstGeom>
+          <a:noFill/>
+          <a:ln/>
+        </p:spPr>
+        <p:txBody>
+          <a:bodyPr wrap="square" lIns="0" tIns="0" rIns="0" bIns="0" rtlCol="0" anchor="ctr"/>
+          <a:lstStyle/>
+          <a:p>
+            <a:pPr algn="ctr" indent="0" marL="0">
+              <a:buNone/>
+            </a:pPr>
+            <a:r>
+              <a:rPr lang="en-US" sz="1600" b="1" dirty="0">
+                <a:solidFill>
+                  <a:srgbClr val="0D9488"/>
+                </a:solidFill>
+                <a:latin typeface="Trebuchet MS" pitchFamily="34" charset="0"/>
+                <a:ea typeface="Trebuchet MS" pitchFamily="34" charset="-122"/>
+                <a:cs typeface="Trebuchet MS" pitchFamily="34" charset="-120"/>
+              </a:rPr>
+              <a:t>·</a:t>
+            </a:r>
+            <a:endParaRPr lang="en-US" sz="1600" dirty="0"/>
+          </a:p>
+        </p:txBody>
+      </p:sp>
+      <p:sp>
+        <p:nvSpPr>
+          <p:cNvPr id="31" name="Shape 29"/>
+          <p:cNvSpPr/>
+          <p:nvPr/>
+        </p:nvSpPr>
+        <p:spPr>
+          <a:xfrm>
+            <a:off x="6428232" y="3364992"/>
+            <a:ext cx="1645920" cy="475488"/>
+          </a:xfrm>
+          <a:prstGeom prst="rect">
+            <a:avLst>
+              <a:gd name="adj" fmla="val 9615"/>
+            </a:avLst>
+          </a:prstGeom>
+          <a:solidFill>
+            <a:srgbClr val="FFFFFF"/>
+          </a:solidFill>
+          <a:ln w="12700">
+            <a:solidFill>
+              <a:srgbClr val="0D9488"/>
+            </a:solidFill>
+            <a:prstDash val="solid"/>
+          </a:ln>
+        </p:spPr>
+      </p:sp>
+      <p:sp>
+        <p:nvSpPr>
+          <p:cNvPr id="32" name="Text 30"/>
+          <p:cNvSpPr/>
+          <p:nvPr/>
+        </p:nvSpPr>
+        <p:spPr>
+          <a:xfrm>
+            <a:off x="6428232" y="3364992"/>
+            <a:ext cx="1645920" cy="475488"/>
+          </a:xfrm>
+          <a:prstGeom prst="rect">
+            <a:avLst/>
+          </a:prstGeom>
+          <a:noFill/>
+          <a:ln/>
+        </p:spPr>
+        <p:txBody>
+          <a:bodyPr wrap="square" lIns="0" tIns="0" rIns="0" bIns="0" rtlCol="0" anchor="ctr"/>
+          <a:lstStyle/>
+          <a:p>
+            <a:pPr algn="ctr" indent="0" marL="0">
+              <a:buNone/>
+            </a:pPr>
+            <a:r>
+              <a:rPr lang="en-US" sz="1400" b="1" dirty="0">
+                <a:solidFill>
+                  <a:srgbClr val="0D9488"/>
+                </a:solidFill>
+                <a:latin typeface="Trebuchet MS" pitchFamily="34" charset="0"/>
+                <a:ea typeface="Trebuchet MS" pitchFamily="34" charset="-122"/>
+                <a:cs typeface="Trebuchet MS" pitchFamily="34" charset="-120"/>
+              </a:rPr>
+              <a:t>er</a:t>
+            </a:r>
+            <a:endParaRPr lang="en-US" sz="1400" dirty="0"/>
+          </a:p>
+        </p:txBody>
+      </p:sp>
+      <p:sp>
+        <p:nvSpPr>
+          <p:cNvPr id="33" name="Shape 31"/>
+          <p:cNvSpPr/>
+          <p:nvPr/>
+        </p:nvSpPr>
+        <p:spPr>
+          <a:xfrm>
+            <a:off x="365760" y="4096512"/>
+            <a:ext cx="1371600" cy="804672"/>
+          </a:xfrm>
+          <a:prstGeom prst="rect">
+            <a:avLst>
+              <a:gd name="adj" fmla="val 6818"/>
+            </a:avLst>
+          </a:prstGeom>
+          <a:solidFill>
+            <a:srgbClr val="E2E8F0"/>
+          </a:solidFill>
+          <a:ln w="12700">
+            <a:solidFill>
+              <a:srgbClr val="E2E8F0"/>
+            </a:solidFill>
+            <a:prstDash val="solid"/>
+          </a:ln>
+        </p:spPr>
+      </p:sp>
+      <p:sp>
+        <p:nvSpPr>
+          <p:cNvPr id="34" name="Text 32"/>
+          <p:cNvSpPr/>
+          <p:nvPr/>
+        </p:nvSpPr>
+        <p:spPr>
+          <a:xfrm>
+            <a:off x="365760" y="4096512"/>
+            <a:ext cx="1371600" cy="804672"/>
+          </a:xfrm>
+          <a:prstGeom prst="rect">
+            <a:avLst/>
+          </a:prstGeom>
+          <a:noFill/>
+          <a:ln/>
+        </p:spPr>
+        <p:txBody>
+          <a:bodyPr wrap="square" lIns="0" tIns="0" rIns="0" bIns="0" rtlCol="0" anchor="ctr"/>
+          <a:lstStyle/>
+          <a:p>
+            <a:pPr algn="ctr" indent="0" marL="0">
+              <a:buNone/>
+            </a:pPr>
+            <a:r>
+              <a:rPr lang="en-US" sz="1100" b="1" dirty="0">
+                <a:solidFill>
+                  <a:srgbClr val="475569"/>
+                </a:solidFill>
+                <a:latin typeface="Trebuchet MS" pitchFamily="34" charset="0"/>
+                <a:ea typeface="Trebuchet MS" pitchFamily="34" charset="-122"/>
+                <a:cs typeface="Trebuchet MS" pitchFamily="34" charset="-120"/>
+              </a:rPr>
+              <a:t>Phonemes</a:t>
+            </a:r>
+            <a:endParaRPr lang="en-US" sz="1100" dirty="0"/>
+          </a:p>
+        </p:txBody>
+      </p:sp>
+      <p:sp>
+        <p:nvSpPr>
+          <p:cNvPr id="35" name="Shape 33"/>
+          <p:cNvSpPr/>
+          <p:nvPr/>
+        </p:nvSpPr>
+        <p:spPr>
+          <a:xfrm>
+            <a:off x="1874520" y="4096512"/>
+            <a:ext cx="6903720" cy="804672"/>
+          </a:xfrm>
+          <a:prstGeom prst="rect">
+            <a:avLst>
+              <a:gd name="adj" fmla="val 6818"/>
+            </a:avLst>
+          </a:prstGeom>
+          <a:solidFill>
+            <a:srgbClr val="FCE7F3"/>
+          </a:solidFill>
+          <a:ln w="12700">
+            <a:solidFill>
+              <a:srgbClr val="DB2777"/>
+            </a:solidFill>
+            <a:prstDash val="solid"/>
+          </a:ln>
+        </p:spPr>
+      </p:sp>
+      <p:sp>
+        <p:nvSpPr>
+          <p:cNvPr id="36" name="Shape 34"/>
+          <p:cNvSpPr/>
+          <p:nvPr/>
+        </p:nvSpPr>
+        <p:spPr>
+          <a:xfrm>
+            <a:off x="2124837" y="4169664"/>
+            <a:ext cx="685800" cy="384048"/>
+          </a:xfrm>
+          <a:prstGeom prst="rect">
+            <a:avLst>
+              <a:gd name="adj" fmla="val 9524"/>
+            </a:avLst>
+          </a:prstGeom>
+          <a:solidFill>
+            <a:srgbClr val="FFFFFF"/>
+          </a:solidFill>
+          <a:ln w="12700">
+            <a:solidFill>
+              <a:srgbClr val="DB2777"/>
+            </a:solidFill>
+            <a:prstDash val="solid"/>
+          </a:ln>
+        </p:spPr>
+      </p:sp>
+      <p:sp>
+        <p:nvSpPr>
+          <p:cNvPr id="37" name="Text 35"/>
+          <p:cNvSpPr/>
+          <p:nvPr/>
+        </p:nvSpPr>
+        <p:spPr>
+          <a:xfrm>
+            <a:off x="2124837" y="4169664"/>
+            <a:ext cx="685800" cy="384048"/>
+          </a:xfrm>
+          <a:prstGeom prst="rect">
+            <a:avLst/>
+          </a:prstGeom>
+          <a:noFill/>
+          <a:ln/>
+        </p:spPr>
+        <p:txBody>
+          <a:bodyPr wrap="square" lIns="0" tIns="0" rIns="0" bIns="0" rtlCol="0" anchor="ctr"/>
+          <a:lstStyle/>
+          <a:p>
+            <a:pPr algn="ctr" indent="0" marL="0">
+              <a:buNone/>
+            </a:pPr>
+            <a:r>
+              <a:rPr lang="en-US" sz="900" b="1" dirty="0">
+                <a:solidFill>
+                  <a:srgbClr val="9D174D"/>
+                </a:solidFill>
+                <a:latin typeface="Trebuchet MS" pitchFamily="34" charset="0"/>
+                <a:ea typeface="Trebuchet MS" pitchFamily="34" charset="-122"/>
+                <a:cs typeface="Trebuchet MS" pitchFamily="34" charset="-120"/>
+              </a:rPr>
+              <a:t>c</a:t>
+            </a:r>
+            <a:endParaRPr lang="en-US" sz="900" dirty="0"/>
+          </a:p>
+        </p:txBody>
+      </p:sp>
+      <p:sp>
+        <p:nvSpPr>
+          <p:cNvPr id="38" name="Text 36"/>
+          <p:cNvSpPr/>
+          <p:nvPr/>
+        </p:nvSpPr>
+        <p:spPr>
+          <a:xfrm>
+            <a:off x="2124837" y="4572000"/>
+            <a:ext cx="685800" cy="219456"/>
           </a:xfrm>
           <a:prstGeom prst="rect">
             <a:avLst/>
@@ -21669,232 +21756,232 @@
               <a:buNone/>
             </a:pPr>
             <a:r>
-              <a:rPr lang="en-US" sz="850" dirty="0">
-                <a:solidFill>
-                  <a:srgbClr val="475569"/>
+              <a:rPr lang="en-US" sz="750" i="1" dirty="0">
+                <a:solidFill>
+                  <a:srgbClr val="94A3B8"/>
                 </a:solidFill>
                 <a:latin typeface="Calibri" pitchFamily="34" charset="0"/>
                 <a:ea typeface="Calibri" pitchFamily="34" charset="-122"/>
                 <a:cs typeface="Calibri" pitchFamily="34" charset="-120"/>
               </a:rPr>
-              <a:t>more than one</a:t>
-            </a:r>
-            <a:endParaRPr lang="en-US" sz="850" dirty="0"/>
-          </a:p>
-        </p:txBody>
-      </p:sp>
-      <p:sp>
-        <p:nvSpPr>
-          <p:cNvPr id="25" name="Shape 23"/>
-          <p:cNvSpPr/>
-          <p:nvPr/>
-        </p:nvSpPr>
-        <p:spPr>
-          <a:xfrm>
-            <a:off x="365760" y="3273552"/>
-            <a:ext cx="1371600" cy="658368"/>
+              <a:t>/k/</a:t>
+            </a:r>
+            <a:endParaRPr lang="en-US" sz="750" dirty="0"/>
+          </a:p>
+        </p:txBody>
+      </p:sp>
+      <p:sp>
+        <p:nvSpPr>
+          <p:cNvPr id="39" name="Shape 37"/>
+          <p:cNvSpPr/>
+          <p:nvPr/>
+        </p:nvSpPr>
+        <p:spPr>
+          <a:xfrm>
+            <a:off x="3033522" y="4169664"/>
+            <a:ext cx="685800" cy="384048"/>
           </a:xfrm>
           <a:prstGeom prst="rect">
             <a:avLst>
-              <a:gd name="adj" fmla="val 8333"/>
+              <a:gd name="adj" fmla="val 9524"/>
             </a:avLst>
           </a:prstGeom>
           <a:solidFill>
-            <a:srgbClr val="E2E8F0"/>
-          </a:solidFill>
-          <a:ln w="12700">
-            <a:solidFill>
-              <a:srgbClr val="E2E8F0"/>
-            </a:solidFill>
-            <a:prstDash val="solid"/>
-          </a:ln>
-        </p:spPr>
-      </p:sp>
-      <p:sp>
-        <p:nvSpPr>
-          <p:cNvPr id="26" name="Text 24"/>
-          <p:cNvSpPr/>
-          <p:nvPr/>
-        </p:nvSpPr>
-        <p:spPr>
-          <a:xfrm>
-            <a:off x="365760" y="3273552"/>
-            <a:ext cx="1371600" cy="658368"/>
-          </a:xfrm>
-          <a:prstGeom prst="rect">
-            <a:avLst/>
-          </a:prstGeom>
-          <a:noFill/>
-          <a:ln/>
-        </p:spPr>
-        <p:txBody>
-          <a:bodyPr wrap="square" lIns="0" tIns="0" rIns="0" bIns="0" rtlCol="0" anchor="ctr"/>
-          <a:lstStyle/>
-          <a:p>
-            <a:pPr algn="ctr" indent="0" marL="0">
-              <a:buNone/>
-            </a:pPr>
-            <a:r>
-              <a:rPr lang="en-US" sz="1100" b="1" dirty="0">
-                <a:solidFill>
-                  <a:srgbClr val="475569"/>
+            <a:srgbClr val="FFFFFF"/>
+          </a:solidFill>
+          <a:ln w="12700">
+            <a:solidFill>
+              <a:srgbClr val="DB2777"/>
+            </a:solidFill>
+            <a:prstDash val="solid"/>
+          </a:ln>
+        </p:spPr>
+      </p:sp>
+      <p:sp>
+        <p:nvSpPr>
+          <p:cNvPr id="40" name="Text 38"/>
+          <p:cNvSpPr/>
+          <p:nvPr/>
+        </p:nvSpPr>
+        <p:spPr>
+          <a:xfrm>
+            <a:off x="3033522" y="4169664"/>
+            <a:ext cx="685800" cy="384048"/>
+          </a:xfrm>
+          <a:prstGeom prst="rect">
+            <a:avLst/>
+          </a:prstGeom>
+          <a:noFill/>
+          <a:ln/>
+        </p:spPr>
+        <p:txBody>
+          <a:bodyPr wrap="square" lIns="0" tIns="0" rIns="0" bIns="0" rtlCol="0" anchor="ctr"/>
+          <a:lstStyle/>
+          <a:p>
+            <a:pPr algn="ctr" indent="0" marL="0">
+              <a:buNone/>
+            </a:pPr>
+            <a:r>
+              <a:rPr lang="en-US" sz="900" b="1" dirty="0">
+                <a:solidFill>
+                  <a:srgbClr val="9D174D"/>
                 </a:solidFill>
                 <a:latin typeface="Trebuchet MS" pitchFamily="34" charset="0"/>
                 <a:ea typeface="Trebuchet MS" pitchFamily="34" charset="-122"/>
                 <a:cs typeface="Trebuchet MS" pitchFamily="34" charset="-120"/>
               </a:rPr>
-              <a:t>Syllables</a:t>
-            </a:r>
-            <a:endParaRPr lang="en-US" sz="1100" dirty="0"/>
-          </a:p>
-        </p:txBody>
-      </p:sp>
-      <p:sp>
-        <p:nvSpPr>
-          <p:cNvPr id="27" name="Shape 25"/>
-          <p:cNvSpPr/>
-          <p:nvPr/>
-        </p:nvSpPr>
-        <p:spPr>
-          <a:xfrm>
-            <a:off x="1874520" y="3273552"/>
-            <a:ext cx="6903720" cy="658368"/>
+              <a:t>ar</a:t>
+            </a:r>
+            <a:endParaRPr lang="en-US" sz="900" dirty="0"/>
+          </a:p>
+        </p:txBody>
+      </p:sp>
+      <p:sp>
+        <p:nvSpPr>
+          <p:cNvPr id="41" name="Shape 39"/>
+          <p:cNvSpPr/>
+          <p:nvPr/>
+        </p:nvSpPr>
+        <p:spPr>
+          <a:xfrm>
+            <a:off x="3942207" y="4169664"/>
+            <a:ext cx="685800" cy="384048"/>
           </a:xfrm>
           <a:prstGeom prst="rect">
             <a:avLst>
-              <a:gd name="adj" fmla="val 8333"/>
+              <a:gd name="adj" fmla="val 9524"/>
             </a:avLst>
           </a:prstGeom>
           <a:solidFill>
-            <a:srgbClr val="CCFBF1"/>
-          </a:solidFill>
-          <a:ln w="12700">
-            <a:solidFill>
-              <a:srgbClr val="0D9488"/>
-            </a:solidFill>
-            <a:prstDash val="solid"/>
-          </a:ln>
-        </p:spPr>
-      </p:sp>
-      <p:sp>
-        <p:nvSpPr>
-          <p:cNvPr id="28" name="Shape 26"/>
-          <p:cNvSpPr/>
-          <p:nvPr/>
-        </p:nvSpPr>
-        <p:spPr>
-          <a:xfrm>
-            <a:off x="2313432" y="3364992"/>
-            <a:ext cx="1645920" cy="475488"/>
-          </a:xfrm>
-          <a:prstGeom prst="rect">
-            <a:avLst>
-              <a:gd name="adj" fmla="val 9615"/>
-            </a:avLst>
-          </a:prstGeom>
-          <a:solidFill>
             <a:srgbClr val="FFFFFF"/>
           </a:solidFill>
           <a:ln w="12700">
             <a:solidFill>
-              <a:srgbClr val="0D9488"/>
-            </a:solidFill>
-            <a:prstDash val="solid"/>
-          </a:ln>
-        </p:spPr>
-      </p:sp>
-      <p:sp>
-        <p:nvSpPr>
-          <p:cNvPr id="29" name="Text 27"/>
-          <p:cNvSpPr/>
-          <p:nvPr/>
-        </p:nvSpPr>
-        <p:spPr>
-          <a:xfrm>
-            <a:off x="2313432" y="3364992"/>
-            <a:ext cx="1645920" cy="475488"/>
-          </a:xfrm>
-          <a:prstGeom prst="rect">
-            <a:avLst/>
-          </a:prstGeom>
-          <a:noFill/>
-          <a:ln/>
-        </p:spPr>
-        <p:txBody>
-          <a:bodyPr wrap="square" lIns="0" tIns="0" rIns="0" bIns="0" rtlCol="0" anchor="ctr"/>
-          <a:lstStyle/>
-          <a:p>
-            <a:pPr algn="ctr" indent="0" marL="0">
-              <a:buNone/>
-            </a:pPr>
-            <a:r>
-              <a:rPr lang="en-US" sz="1400" b="1" dirty="0">
-                <a:solidFill>
-                  <a:srgbClr val="0D9488"/>
+              <a:srgbClr val="DB2777"/>
+            </a:solidFill>
+            <a:prstDash val="solid"/>
+          </a:ln>
+        </p:spPr>
+      </p:sp>
+      <p:sp>
+        <p:nvSpPr>
+          <p:cNvPr id="42" name="Text 40"/>
+          <p:cNvSpPr/>
+          <p:nvPr/>
+        </p:nvSpPr>
+        <p:spPr>
+          <a:xfrm>
+            <a:off x="3942207" y="4169664"/>
+            <a:ext cx="685800" cy="384048"/>
+          </a:xfrm>
+          <a:prstGeom prst="rect">
+            <a:avLst/>
+          </a:prstGeom>
+          <a:noFill/>
+          <a:ln/>
+        </p:spPr>
+        <p:txBody>
+          <a:bodyPr wrap="square" lIns="0" tIns="0" rIns="0" bIns="0" rtlCol="0" anchor="ctr"/>
+          <a:lstStyle/>
+          <a:p>
+            <a:pPr algn="ctr" indent="0" marL="0">
+              <a:buNone/>
+            </a:pPr>
+            <a:r>
+              <a:rPr lang="en-US" sz="900" b="1" dirty="0">
+                <a:solidFill>
+                  <a:srgbClr val="9D174D"/>
                 </a:solidFill>
                 <a:latin typeface="Trebuchet MS" pitchFamily="34" charset="0"/>
                 <a:ea typeface="Trebuchet MS" pitchFamily="34" charset="-122"/>
                 <a:cs typeface="Trebuchet MS" pitchFamily="34" charset="-120"/>
               </a:rPr>
-              <a:t>care</a:t>
-            </a:r>
-            <a:endParaRPr lang="en-US" sz="1400" dirty="0"/>
-          </a:p>
-        </p:txBody>
-      </p:sp>
-      <p:sp>
-        <p:nvSpPr>
-          <p:cNvPr id="30" name="Text 28"/>
-          <p:cNvSpPr/>
-          <p:nvPr/>
-        </p:nvSpPr>
-        <p:spPr>
-          <a:xfrm>
-            <a:off x="3959352" y="3364992"/>
-            <a:ext cx="411480" cy="475488"/>
-          </a:xfrm>
-          <a:prstGeom prst="rect">
-            <a:avLst/>
-          </a:prstGeom>
-          <a:noFill/>
-          <a:ln/>
-        </p:spPr>
-        <p:txBody>
-          <a:bodyPr wrap="square" lIns="0" tIns="0" rIns="0" bIns="0" rtlCol="0" anchor="ctr"/>
-          <a:lstStyle/>
-          <a:p>
-            <a:pPr algn="ctr" indent="0" marL="0">
-              <a:buNone/>
-            </a:pPr>
-            <a:r>
-              <a:rPr lang="en-US" sz="1600" b="1" dirty="0">
-                <a:solidFill>
-                  <a:srgbClr val="0D9488"/>
+              <a:t>e</a:t>
+            </a:r>
+            <a:endParaRPr lang="en-US" sz="900" dirty="0"/>
+          </a:p>
+        </p:txBody>
+      </p:sp>
+      <p:sp>
+        <p:nvSpPr>
+          <p:cNvPr id="43" name="Shape 41"/>
+          <p:cNvSpPr/>
+          <p:nvPr/>
+        </p:nvSpPr>
+        <p:spPr>
+          <a:xfrm>
+            <a:off x="4850892" y="4169664"/>
+            <a:ext cx="685800" cy="384048"/>
+          </a:xfrm>
+          <a:prstGeom prst="rect">
+            <a:avLst>
+              <a:gd name="adj" fmla="val 9524"/>
+            </a:avLst>
+          </a:prstGeom>
+          <a:solidFill>
+            <a:srgbClr val="FFFFFF"/>
+          </a:solidFill>
+          <a:ln w="12700">
+            <a:solidFill>
+              <a:srgbClr val="DB2777"/>
+            </a:solidFill>
+            <a:prstDash val="solid"/>
+          </a:ln>
+        </p:spPr>
+      </p:sp>
+      <p:sp>
+        <p:nvSpPr>
+          <p:cNvPr id="44" name="Text 42"/>
+          <p:cNvSpPr/>
+          <p:nvPr/>
+        </p:nvSpPr>
+        <p:spPr>
+          <a:xfrm>
+            <a:off x="4850892" y="4169664"/>
+            <a:ext cx="685800" cy="384048"/>
+          </a:xfrm>
+          <a:prstGeom prst="rect">
+            <a:avLst/>
+          </a:prstGeom>
+          <a:noFill/>
+          <a:ln/>
+        </p:spPr>
+        <p:txBody>
+          <a:bodyPr wrap="square" lIns="0" tIns="0" rIns="0" bIns="0" rtlCol="0" anchor="ctr"/>
+          <a:lstStyle/>
+          <a:p>
+            <a:pPr algn="ctr" indent="0" marL="0">
+              <a:buNone/>
+            </a:pPr>
+            <a:r>
+              <a:rPr lang="en-US" sz="900" b="1" dirty="0">
+                <a:solidFill>
+                  <a:srgbClr val="9D174D"/>
                 </a:solidFill>
                 <a:latin typeface="Trebuchet MS" pitchFamily="34" charset="0"/>
                 <a:ea typeface="Trebuchet MS" pitchFamily="34" charset="-122"/>
                 <a:cs typeface="Trebuchet MS" pitchFamily="34" charset="-120"/>
               </a:rPr>
-              <a:t>·</a:t>
-            </a:r>
-            <a:endParaRPr lang="en-US" sz="1600" dirty="0"/>
-          </a:p>
-        </p:txBody>
-      </p:sp>
-      <p:sp>
-        <p:nvSpPr>
-          <p:cNvPr id="31" name="Shape 29"/>
-          <p:cNvSpPr/>
-          <p:nvPr/>
-        </p:nvSpPr>
-        <p:spPr>
-          <a:xfrm>
-            <a:off x="4370832" y="3364992"/>
-            <a:ext cx="1645920" cy="475488"/>
+              <a:t>g</a:t>
+            </a:r>
+            <a:endParaRPr lang="en-US" sz="900" dirty="0"/>
+          </a:p>
+        </p:txBody>
+      </p:sp>
+      <p:sp>
+        <p:nvSpPr>
+          <p:cNvPr id="45" name="Shape 43"/>
+          <p:cNvSpPr/>
+          <p:nvPr/>
+        </p:nvSpPr>
+        <p:spPr>
+          <a:xfrm>
+            <a:off x="5759577" y="4169664"/>
+            <a:ext cx="685800" cy="384048"/>
           </a:xfrm>
           <a:prstGeom prst="rect">
             <a:avLst>
-              <a:gd name="adj" fmla="val 9615"/>
+              <a:gd name="adj" fmla="val 9524"/>
             </a:avLst>
           </a:prstGeom>
           <a:solidFill>
@@ -21902,104 +21989,131 @@
           </a:solidFill>
           <a:ln w="12700">
             <a:solidFill>
-              <a:srgbClr val="0D9488"/>
-            </a:solidFill>
-            <a:prstDash val="solid"/>
-          </a:ln>
-        </p:spPr>
-      </p:sp>
-      <p:sp>
-        <p:nvSpPr>
-          <p:cNvPr id="32" name="Text 30"/>
-          <p:cNvSpPr/>
-          <p:nvPr/>
-        </p:nvSpPr>
-        <p:spPr>
-          <a:xfrm>
-            <a:off x="4370832" y="3364992"/>
-            <a:ext cx="1645920" cy="475488"/>
-          </a:xfrm>
-          <a:prstGeom prst="rect">
-            <a:avLst/>
-          </a:prstGeom>
-          <a:noFill/>
-          <a:ln/>
-        </p:spPr>
-        <p:txBody>
-          <a:bodyPr wrap="square" lIns="0" tIns="0" rIns="0" bIns="0" rtlCol="0" anchor="ctr"/>
-          <a:lstStyle/>
-          <a:p>
-            <a:pPr algn="ctr" indent="0" marL="0">
-              <a:buNone/>
-            </a:pPr>
-            <a:r>
-              <a:rPr lang="en-US" sz="1400" b="1" dirty="0">
-                <a:solidFill>
-                  <a:srgbClr val="0D9488"/>
+              <a:srgbClr val="DB2777"/>
+            </a:solidFill>
+            <a:prstDash val="solid"/>
+          </a:ln>
+        </p:spPr>
+      </p:sp>
+      <p:sp>
+        <p:nvSpPr>
+          <p:cNvPr id="46" name="Text 44"/>
+          <p:cNvSpPr/>
+          <p:nvPr/>
+        </p:nvSpPr>
+        <p:spPr>
+          <a:xfrm>
+            <a:off x="5759577" y="4169664"/>
+            <a:ext cx="685800" cy="384048"/>
+          </a:xfrm>
+          <a:prstGeom prst="rect">
+            <a:avLst/>
+          </a:prstGeom>
+          <a:noFill/>
+          <a:ln/>
+        </p:spPr>
+        <p:txBody>
+          <a:bodyPr wrap="square" lIns="0" tIns="0" rIns="0" bIns="0" rtlCol="0" anchor="ctr"/>
+          <a:lstStyle/>
+          <a:p>
+            <a:pPr algn="ctr" indent="0" marL="0">
+              <a:buNone/>
+            </a:pPr>
+            <a:r>
+              <a:rPr lang="en-US" sz="900" b="1" dirty="0">
+                <a:solidFill>
+                  <a:srgbClr val="9D174D"/>
                 </a:solidFill>
                 <a:latin typeface="Trebuchet MS" pitchFamily="34" charset="0"/>
                 <a:ea typeface="Trebuchet MS" pitchFamily="34" charset="-122"/>
                 <a:cs typeface="Trebuchet MS" pitchFamily="34" charset="-120"/>
               </a:rPr>
-              <a:t>giv</a:t>
-            </a:r>
-            <a:endParaRPr lang="en-US" sz="1400" dirty="0"/>
-          </a:p>
-        </p:txBody>
-      </p:sp>
-      <p:sp>
-        <p:nvSpPr>
-          <p:cNvPr id="33" name="Text 31"/>
-          <p:cNvSpPr/>
-          <p:nvPr/>
-        </p:nvSpPr>
-        <p:spPr>
-          <a:xfrm>
-            <a:off x="6016752" y="3364992"/>
-            <a:ext cx="411480" cy="475488"/>
-          </a:xfrm>
-          <a:prstGeom prst="rect">
-            <a:avLst/>
-          </a:prstGeom>
-          <a:noFill/>
-          <a:ln/>
-        </p:spPr>
-        <p:txBody>
-          <a:bodyPr wrap="square" lIns="0" tIns="0" rIns="0" bIns="0" rtlCol="0" anchor="ctr"/>
-          <a:lstStyle/>
-          <a:p>
-            <a:pPr algn="ctr" indent="0" marL="0">
-              <a:buNone/>
-            </a:pPr>
-            <a:r>
-              <a:rPr lang="en-US" sz="1600" b="1" dirty="0">
-                <a:solidFill>
-                  <a:srgbClr val="0D9488"/>
+              <a:t>i</a:t>
+            </a:r>
+            <a:endParaRPr lang="en-US" sz="900" dirty="0"/>
+          </a:p>
+        </p:txBody>
+      </p:sp>
+      <p:sp>
+        <p:nvSpPr>
+          <p:cNvPr id="47" name="Shape 45"/>
+          <p:cNvSpPr/>
+          <p:nvPr/>
+        </p:nvSpPr>
+        <p:spPr>
+          <a:xfrm>
+            <a:off x="6668262" y="4169664"/>
+            <a:ext cx="685800" cy="384048"/>
+          </a:xfrm>
+          <a:prstGeom prst="rect">
+            <a:avLst>
+              <a:gd name="adj" fmla="val 9524"/>
+            </a:avLst>
+          </a:prstGeom>
+          <a:solidFill>
+            <a:srgbClr val="FFFFFF"/>
+          </a:solidFill>
+          <a:ln w="12700">
+            <a:solidFill>
+              <a:srgbClr val="DB2777"/>
+            </a:solidFill>
+            <a:prstDash val="solid"/>
+          </a:ln>
+        </p:spPr>
+      </p:sp>
+      <p:sp>
+        <p:nvSpPr>
+          <p:cNvPr id="48" name="Text 46"/>
+          <p:cNvSpPr/>
+          <p:nvPr/>
+        </p:nvSpPr>
+        <p:spPr>
+          <a:xfrm>
+            <a:off x="6668262" y="4169664"/>
+            <a:ext cx="685800" cy="384048"/>
+          </a:xfrm>
+          <a:prstGeom prst="rect">
+            <a:avLst/>
+          </a:prstGeom>
+          <a:noFill/>
+          <a:ln/>
+        </p:spPr>
+        <p:txBody>
+          <a:bodyPr wrap="square" lIns="0" tIns="0" rIns="0" bIns="0" rtlCol="0" anchor="ctr"/>
+          <a:lstStyle/>
+          <a:p>
+            <a:pPr algn="ctr" indent="0" marL="0">
+              <a:buNone/>
+            </a:pPr>
+            <a:r>
+              <a:rPr lang="en-US" sz="900" b="1" dirty="0">
+                <a:solidFill>
+                  <a:srgbClr val="9D174D"/>
                 </a:solidFill>
                 <a:latin typeface="Trebuchet MS" pitchFamily="34" charset="0"/>
                 <a:ea typeface="Trebuchet MS" pitchFamily="34" charset="-122"/>
                 <a:cs typeface="Trebuchet MS" pitchFamily="34" charset="-120"/>
               </a:rPr>
-              <a:t>·</a:t>
-            </a:r>
-            <a:endParaRPr lang="en-US" sz="1600" dirty="0"/>
-          </a:p>
-        </p:txBody>
-      </p:sp>
-      <p:sp>
-        <p:nvSpPr>
-          <p:cNvPr id="34" name="Shape 32"/>
-          <p:cNvSpPr/>
-          <p:nvPr/>
-        </p:nvSpPr>
-        <p:spPr>
-          <a:xfrm>
-            <a:off x="6428232" y="3364992"/>
-            <a:ext cx="1645920" cy="475488"/>
+              <a:t>v</a:t>
+            </a:r>
+            <a:endParaRPr lang="en-US" sz="900" dirty="0"/>
+          </a:p>
+        </p:txBody>
+      </p:sp>
+      <p:sp>
+        <p:nvSpPr>
+          <p:cNvPr id="49" name="Shape 47"/>
+          <p:cNvSpPr/>
+          <p:nvPr/>
+        </p:nvSpPr>
+        <p:spPr>
+          <a:xfrm>
+            <a:off x="7576947" y="4169664"/>
+            <a:ext cx="685800" cy="384048"/>
           </a:xfrm>
           <a:prstGeom prst="rect">
             <a:avLst>
-              <a:gd name="adj" fmla="val 9615"/>
+              <a:gd name="adj" fmla="val 9524"/>
             </a:avLst>
           </a:prstGeom>
           <a:solidFill>
@@ -22007,640 +22121,46 @@
           </a:solidFill>
           <a:ln w="12700">
             <a:solidFill>
-              <a:srgbClr val="0D9488"/>
-            </a:solidFill>
-            <a:prstDash val="solid"/>
-          </a:ln>
-        </p:spPr>
-      </p:sp>
-      <p:sp>
-        <p:nvSpPr>
-          <p:cNvPr id="35" name="Text 33"/>
-          <p:cNvSpPr/>
-          <p:nvPr/>
-        </p:nvSpPr>
-        <p:spPr>
-          <a:xfrm>
-            <a:off x="6428232" y="3364992"/>
-            <a:ext cx="1645920" cy="475488"/>
-          </a:xfrm>
-          <a:prstGeom prst="rect">
-            <a:avLst/>
-          </a:prstGeom>
-          <a:noFill/>
-          <a:ln/>
-        </p:spPr>
-        <p:txBody>
-          <a:bodyPr wrap="square" lIns="0" tIns="0" rIns="0" bIns="0" rtlCol="0" anchor="ctr"/>
-          <a:lstStyle/>
-          <a:p>
-            <a:pPr algn="ctr" indent="0" marL="0">
-              <a:buNone/>
-            </a:pPr>
-            <a:r>
-              <a:rPr lang="en-US" sz="1400" b="1" dirty="0">
-                <a:solidFill>
-                  <a:srgbClr val="0D9488"/>
+              <a:srgbClr val="DB2777"/>
+            </a:solidFill>
+            <a:prstDash val="solid"/>
+          </a:ln>
+        </p:spPr>
+      </p:sp>
+      <p:sp>
+        <p:nvSpPr>
+          <p:cNvPr id="50" name="Text 48"/>
+          <p:cNvSpPr/>
+          <p:nvPr/>
+        </p:nvSpPr>
+        <p:spPr>
+          <a:xfrm>
+            <a:off x="7576947" y="4169664"/>
+            <a:ext cx="685800" cy="384048"/>
+          </a:xfrm>
+          <a:prstGeom prst="rect">
+            <a:avLst/>
+          </a:prstGeom>
+          <a:noFill/>
+          <a:ln/>
+        </p:spPr>
+        <p:txBody>
+          <a:bodyPr wrap="square" lIns="0" tIns="0" rIns="0" bIns="0" rtlCol="0" anchor="ctr"/>
+          <a:lstStyle/>
+          <a:p>
+            <a:pPr algn="ctr" indent="0" marL="0">
+              <a:buNone/>
+            </a:pPr>
+            <a:r>
+              <a:rPr lang="en-US" sz="900" b="1" dirty="0">
+                <a:solidFill>
+                  <a:srgbClr val="9D174D"/>
                 </a:solidFill>
                 <a:latin typeface="Trebuchet MS" pitchFamily="34" charset="0"/>
                 <a:ea typeface="Trebuchet MS" pitchFamily="34" charset="-122"/>
                 <a:cs typeface="Trebuchet MS" pitchFamily="34" charset="-120"/>
               </a:rPr>
-              <a:t>ers</a:t>
-            </a:r>
-            <a:endParaRPr lang="en-US" sz="1400" dirty="0"/>
-          </a:p>
-        </p:txBody>
-      </p:sp>
-      <p:sp>
-        <p:nvSpPr>
-          <p:cNvPr id="36" name="Shape 34"/>
-          <p:cNvSpPr/>
-          <p:nvPr/>
-        </p:nvSpPr>
-        <p:spPr>
-          <a:xfrm>
-            <a:off x="365760" y="4096512"/>
-            <a:ext cx="1371600" cy="804672"/>
-          </a:xfrm>
-          <a:prstGeom prst="rect">
-            <a:avLst>
-              <a:gd name="adj" fmla="val 6818"/>
-            </a:avLst>
-          </a:prstGeom>
-          <a:solidFill>
-            <a:srgbClr val="E2E8F0"/>
-          </a:solidFill>
-          <a:ln w="12700">
-            <a:solidFill>
-              <a:srgbClr val="E2E8F0"/>
-            </a:solidFill>
-            <a:prstDash val="solid"/>
-          </a:ln>
-        </p:spPr>
-      </p:sp>
-      <p:sp>
-        <p:nvSpPr>
-          <p:cNvPr id="37" name="Text 35"/>
-          <p:cNvSpPr/>
-          <p:nvPr/>
-        </p:nvSpPr>
-        <p:spPr>
-          <a:xfrm>
-            <a:off x="365760" y="4096512"/>
-            <a:ext cx="1371600" cy="804672"/>
-          </a:xfrm>
-          <a:prstGeom prst="rect">
-            <a:avLst/>
-          </a:prstGeom>
-          <a:noFill/>
-          <a:ln/>
-        </p:spPr>
-        <p:txBody>
-          <a:bodyPr wrap="square" lIns="0" tIns="0" rIns="0" bIns="0" rtlCol="0" anchor="ctr"/>
-          <a:lstStyle/>
-          <a:p>
-            <a:pPr algn="ctr" indent="0" marL="0">
-              <a:buNone/>
-            </a:pPr>
-            <a:r>
-              <a:rPr lang="en-US" sz="1100" b="1" dirty="0">
-                <a:solidFill>
-                  <a:srgbClr val="475569"/>
-                </a:solidFill>
-                <a:latin typeface="Trebuchet MS" pitchFamily="34" charset="0"/>
-                <a:ea typeface="Trebuchet MS" pitchFamily="34" charset="-122"/>
-                <a:cs typeface="Trebuchet MS" pitchFamily="34" charset="-120"/>
-              </a:rPr>
-              <a:t>Phonemes</a:t>
-            </a:r>
-            <a:endParaRPr lang="en-US" sz="1100" dirty="0"/>
-          </a:p>
-        </p:txBody>
-      </p:sp>
-      <p:sp>
-        <p:nvSpPr>
-          <p:cNvPr id="38" name="Shape 36"/>
-          <p:cNvSpPr/>
-          <p:nvPr/>
-        </p:nvSpPr>
-        <p:spPr>
-          <a:xfrm>
-            <a:off x="1874520" y="4096512"/>
-            <a:ext cx="6903720" cy="804672"/>
-          </a:xfrm>
-          <a:prstGeom prst="rect">
-            <a:avLst>
-              <a:gd name="adj" fmla="val 6818"/>
-            </a:avLst>
-          </a:prstGeom>
-          <a:solidFill>
-            <a:srgbClr val="FCE7F3"/>
-          </a:solidFill>
-          <a:ln w="12700">
-            <a:solidFill>
-              <a:srgbClr val="DB2777"/>
-            </a:solidFill>
-            <a:prstDash val="solid"/>
-          </a:ln>
-        </p:spPr>
-      </p:sp>
-      <p:sp>
-        <p:nvSpPr>
-          <p:cNvPr id="39" name="Shape 37"/>
-          <p:cNvSpPr/>
-          <p:nvPr/>
-        </p:nvSpPr>
-        <p:spPr>
-          <a:xfrm>
-            <a:off x="2124837" y="4169664"/>
-            <a:ext cx="685800" cy="384048"/>
-          </a:xfrm>
-          <a:prstGeom prst="rect">
-            <a:avLst>
-              <a:gd name="adj" fmla="val 9524"/>
-            </a:avLst>
-          </a:prstGeom>
-          <a:solidFill>
-            <a:srgbClr val="FFFFFF"/>
-          </a:solidFill>
-          <a:ln w="12700">
-            <a:solidFill>
-              <a:srgbClr val="DB2777"/>
-            </a:solidFill>
-            <a:prstDash val="solid"/>
-          </a:ln>
-        </p:spPr>
-      </p:sp>
-      <p:sp>
-        <p:nvSpPr>
-          <p:cNvPr id="40" name="Text 38"/>
-          <p:cNvSpPr/>
-          <p:nvPr/>
-        </p:nvSpPr>
-        <p:spPr>
-          <a:xfrm>
-            <a:off x="2124837" y="4169664"/>
-            <a:ext cx="685800" cy="384048"/>
-          </a:xfrm>
-          <a:prstGeom prst="rect">
-            <a:avLst/>
-          </a:prstGeom>
-          <a:noFill/>
-          <a:ln/>
-        </p:spPr>
-        <p:txBody>
-          <a:bodyPr wrap="square" lIns="0" tIns="0" rIns="0" bIns="0" rtlCol="0" anchor="ctr"/>
-          <a:lstStyle/>
-          <a:p>
-            <a:pPr algn="ctr" indent="0" marL="0">
-              <a:buNone/>
-            </a:pPr>
-            <a:r>
-              <a:rPr lang="en-US" sz="900" b="1" dirty="0">
-                <a:solidFill>
-                  <a:srgbClr val="9D174D"/>
-                </a:solidFill>
-                <a:latin typeface="Trebuchet MS" pitchFamily="34" charset="0"/>
-                <a:ea typeface="Trebuchet MS" pitchFamily="34" charset="-122"/>
-                <a:cs typeface="Trebuchet MS" pitchFamily="34" charset="-120"/>
-              </a:rPr>
-              <a:t>c</a:t>
-            </a:r>
-            <a:endParaRPr lang="en-US" sz="900" dirty="0"/>
-          </a:p>
-        </p:txBody>
-      </p:sp>
-      <p:sp>
-        <p:nvSpPr>
-          <p:cNvPr id="41" name="Text 39"/>
-          <p:cNvSpPr/>
-          <p:nvPr/>
-        </p:nvSpPr>
-        <p:spPr>
-          <a:xfrm>
-            <a:off x="2124837" y="4572000"/>
-            <a:ext cx="685800" cy="219456"/>
-          </a:xfrm>
-          <a:prstGeom prst="rect">
-            <a:avLst/>
-          </a:prstGeom>
-          <a:noFill/>
-          <a:ln/>
-        </p:spPr>
-        <p:txBody>
-          <a:bodyPr wrap="square" lIns="0" tIns="0" rIns="0" bIns="0" rtlCol="0" anchor="t"/>
-          <a:lstStyle/>
-          <a:p>
-            <a:pPr algn="ctr" indent="0" marL="0">
-              <a:buNone/>
-            </a:pPr>
-            <a:r>
-              <a:rPr lang="en-US" sz="750" i="1" dirty="0">
-                <a:solidFill>
-                  <a:srgbClr val="94A3B8"/>
-                </a:solidFill>
-                <a:latin typeface="Calibri" pitchFamily="34" charset="0"/>
-                <a:ea typeface="Calibri" pitchFamily="34" charset="-122"/>
-                <a:cs typeface="Calibri" pitchFamily="34" charset="-120"/>
-              </a:rPr>
-              <a:t>/k/</a:t>
-            </a:r>
-            <a:endParaRPr lang="en-US" sz="750" dirty="0"/>
-          </a:p>
-        </p:txBody>
-      </p:sp>
-      <p:sp>
-        <p:nvSpPr>
-          <p:cNvPr id="42" name="Shape 40"/>
-          <p:cNvSpPr/>
-          <p:nvPr/>
-        </p:nvSpPr>
-        <p:spPr>
-          <a:xfrm>
-            <a:off x="3033522" y="4169664"/>
-            <a:ext cx="685800" cy="384048"/>
-          </a:xfrm>
-          <a:prstGeom prst="rect">
-            <a:avLst>
-              <a:gd name="adj" fmla="val 9524"/>
-            </a:avLst>
-          </a:prstGeom>
-          <a:solidFill>
-            <a:srgbClr val="FFFFFF"/>
-          </a:solidFill>
-          <a:ln w="12700">
-            <a:solidFill>
-              <a:srgbClr val="DB2777"/>
-            </a:solidFill>
-            <a:prstDash val="solid"/>
-          </a:ln>
-        </p:spPr>
-      </p:sp>
-      <p:sp>
-        <p:nvSpPr>
-          <p:cNvPr id="43" name="Text 41"/>
-          <p:cNvSpPr/>
-          <p:nvPr/>
-        </p:nvSpPr>
-        <p:spPr>
-          <a:xfrm>
-            <a:off x="3033522" y="4169664"/>
-            <a:ext cx="685800" cy="384048"/>
-          </a:xfrm>
-          <a:prstGeom prst="rect">
-            <a:avLst/>
-          </a:prstGeom>
-          <a:noFill/>
-          <a:ln/>
-        </p:spPr>
-        <p:txBody>
-          <a:bodyPr wrap="square" lIns="0" tIns="0" rIns="0" bIns="0" rtlCol="0" anchor="ctr"/>
-          <a:lstStyle/>
-          <a:p>
-            <a:pPr algn="ctr" indent="0" marL="0">
-              <a:buNone/>
-            </a:pPr>
-            <a:r>
-              <a:rPr lang="en-US" sz="900" b="1" dirty="0">
-                <a:solidFill>
-                  <a:srgbClr val="9D174D"/>
-                </a:solidFill>
-                <a:latin typeface="Trebuchet MS" pitchFamily="34" charset="0"/>
-                <a:ea typeface="Trebuchet MS" pitchFamily="34" charset="-122"/>
-                <a:cs typeface="Trebuchet MS" pitchFamily="34" charset="-120"/>
-              </a:rPr>
-              <a:t>air</a:t>
-            </a:r>
-            <a:endParaRPr lang="en-US" sz="900" dirty="0"/>
-          </a:p>
-        </p:txBody>
-      </p:sp>
-      <p:sp>
-        <p:nvSpPr>
-          <p:cNvPr id="44" name="Shape 42"/>
-          <p:cNvSpPr/>
-          <p:nvPr/>
-        </p:nvSpPr>
-        <p:spPr>
-          <a:xfrm>
-            <a:off x="3942207" y="4169664"/>
-            <a:ext cx="685800" cy="384048"/>
-          </a:xfrm>
-          <a:prstGeom prst="rect">
-            <a:avLst>
-              <a:gd name="adj" fmla="val 9524"/>
-            </a:avLst>
-          </a:prstGeom>
-          <a:solidFill>
-            <a:srgbClr val="FFFFFF"/>
-          </a:solidFill>
-          <a:ln w="12700">
-            <a:solidFill>
-              <a:srgbClr val="DB2777"/>
-            </a:solidFill>
-            <a:prstDash val="solid"/>
-          </a:ln>
-        </p:spPr>
-      </p:sp>
-      <p:sp>
-        <p:nvSpPr>
-          <p:cNvPr id="45" name="Text 43"/>
-          <p:cNvSpPr/>
-          <p:nvPr/>
-        </p:nvSpPr>
-        <p:spPr>
-          <a:xfrm>
-            <a:off x="3942207" y="4169664"/>
-            <a:ext cx="685800" cy="384048"/>
-          </a:xfrm>
-          <a:prstGeom prst="rect">
-            <a:avLst/>
-          </a:prstGeom>
-          <a:noFill/>
-          <a:ln/>
-        </p:spPr>
-        <p:txBody>
-          <a:bodyPr wrap="square" lIns="0" tIns="0" rIns="0" bIns="0" rtlCol="0" anchor="ctr"/>
-          <a:lstStyle/>
-          <a:p>
-            <a:pPr algn="ctr" indent="0" marL="0">
-              <a:buNone/>
-            </a:pPr>
-            <a:r>
-              <a:rPr lang="en-US" sz="900" b="1" dirty="0">
-                <a:solidFill>
-                  <a:srgbClr val="9D174D"/>
-                </a:solidFill>
-                <a:latin typeface="Trebuchet MS" pitchFamily="34" charset="0"/>
-                <a:ea typeface="Trebuchet MS" pitchFamily="34" charset="-122"/>
-                <a:cs typeface="Trebuchet MS" pitchFamily="34" charset="-120"/>
-              </a:rPr>
-              <a:t>g</a:t>
-            </a:r>
-            <a:endParaRPr lang="en-US" sz="900" dirty="0"/>
-          </a:p>
-        </p:txBody>
-      </p:sp>
-      <p:sp>
-        <p:nvSpPr>
-          <p:cNvPr id="46" name="Shape 44"/>
-          <p:cNvSpPr/>
-          <p:nvPr/>
-        </p:nvSpPr>
-        <p:spPr>
-          <a:xfrm>
-            <a:off x="4850892" y="4169664"/>
-            <a:ext cx="685800" cy="384048"/>
-          </a:xfrm>
-          <a:prstGeom prst="rect">
-            <a:avLst>
-              <a:gd name="adj" fmla="val 9524"/>
-            </a:avLst>
-          </a:prstGeom>
-          <a:solidFill>
-            <a:srgbClr val="FFFFFF"/>
-          </a:solidFill>
-          <a:ln w="12700">
-            <a:solidFill>
-              <a:srgbClr val="DB2777"/>
-            </a:solidFill>
-            <a:prstDash val="solid"/>
-          </a:ln>
-        </p:spPr>
-      </p:sp>
-      <p:sp>
-        <p:nvSpPr>
-          <p:cNvPr id="47" name="Text 45"/>
-          <p:cNvSpPr/>
-          <p:nvPr/>
-        </p:nvSpPr>
-        <p:spPr>
-          <a:xfrm>
-            <a:off x="4850892" y="4169664"/>
-            <a:ext cx="685800" cy="384048"/>
-          </a:xfrm>
-          <a:prstGeom prst="rect">
-            <a:avLst/>
-          </a:prstGeom>
-          <a:noFill/>
-          <a:ln/>
-        </p:spPr>
-        <p:txBody>
-          <a:bodyPr wrap="square" lIns="0" tIns="0" rIns="0" bIns="0" rtlCol="0" anchor="ctr"/>
-          <a:lstStyle/>
-          <a:p>
-            <a:pPr algn="ctr" indent="0" marL="0">
-              <a:buNone/>
-            </a:pPr>
-            <a:r>
-              <a:rPr lang="en-US" sz="900" b="1" dirty="0">
-                <a:solidFill>
-                  <a:srgbClr val="9D174D"/>
-                </a:solidFill>
-                <a:latin typeface="Trebuchet MS" pitchFamily="34" charset="0"/>
-                <a:ea typeface="Trebuchet MS" pitchFamily="34" charset="-122"/>
-                <a:cs typeface="Trebuchet MS" pitchFamily="34" charset="-120"/>
-              </a:rPr>
-              <a:t>i</a:t>
-            </a:r>
-            <a:endParaRPr lang="en-US" sz="900" dirty="0"/>
-          </a:p>
-        </p:txBody>
-      </p:sp>
-      <p:sp>
-        <p:nvSpPr>
-          <p:cNvPr id="48" name="Shape 46"/>
-          <p:cNvSpPr/>
-          <p:nvPr/>
-        </p:nvSpPr>
-        <p:spPr>
-          <a:xfrm>
-            <a:off x="5759577" y="4169664"/>
-            <a:ext cx="685800" cy="384048"/>
-          </a:xfrm>
-          <a:prstGeom prst="rect">
-            <a:avLst>
-              <a:gd name="adj" fmla="val 9524"/>
-            </a:avLst>
-          </a:prstGeom>
-          <a:solidFill>
-            <a:srgbClr val="FFFFFF"/>
-          </a:solidFill>
-          <a:ln w="12700">
-            <a:solidFill>
-              <a:srgbClr val="DB2777"/>
-            </a:solidFill>
-            <a:prstDash val="solid"/>
-          </a:ln>
-        </p:spPr>
-      </p:sp>
-      <p:sp>
-        <p:nvSpPr>
-          <p:cNvPr id="49" name="Text 47"/>
-          <p:cNvSpPr/>
-          <p:nvPr/>
-        </p:nvSpPr>
-        <p:spPr>
-          <a:xfrm>
-            <a:off x="5759577" y="4169664"/>
-            <a:ext cx="685800" cy="384048"/>
-          </a:xfrm>
-          <a:prstGeom prst="rect">
-            <a:avLst/>
-          </a:prstGeom>
-          <a:noFill/>
-          <a:ln/>
-        </p:spPr>
-        <p:txBody>
-          <a:bodyPr wrap="square" lIns="0" tIns="0" rIns="0" bIns="0" rtlCol="0" anchor="ctr"/>
-          <a:lstStyle/>
-          <a:p>
-            <a:pPr algn="ctr" indent="0" marL="0">
-              <a:buNone/>
-            </a:pPr>
-            <a:r>
-              <a:rPr lang="en-US" sz="900" b="1" dirty="0">
-                <a:solidFill>
-                  <a:srgbClr val="9D174D"/>
-                </a:solidFill>
-                <a:latin typeface="Trebuchet MS" pitchFamily="34" charset="0"/>
-                <a:ea typeface="Trebuchet MS" pitchFamily="34" charset="-122"/>
-                <a:cs typeface="Trebuchet MS" pitchFamily="34" charset="-120"/>
-              </a:rPr>
-              <a:t>v</a:t>
-            </a:r>
-            <a:endParaRPr lang="en-US" sz="900" dirty="0"/>
-          </a:p>
-        </p:txBody>
-      </p:sp>
-      <p:sp>
-        <p:nvSpPr>
-          <p:cNvPr id="50" name="Shape 48"/>
-          <p:cNvSpPr/>
-          <p:nvPr/>
-        </p:nvSpPr>
-        <p:spPr>
-          <a:xfrm>
-            <a:off x="6668262" y="4169664"/>
-            <a:ext cx="685800" cy="384048"/>
-          </a:xfrm>
-          <a:prstGeom prst="rect">
-            <a:avLst>
-              <a:gd name="adj" fmla="val 9524"/>
-            </a:avLst>
-          </a:prstGeom>
-          <a:solidFill>
-            <a:srgbClr val="FFFFFF"/>
-          </a:solidFill>
-          <a:ln w="12700">
-            <a:solidFill>
-              <a:srgbClr val="DB2777"/>
-            </a:solidFill>
-            <a:prstDash val="solid"/>
-          </a:ln>
-        </p:spPr>
-      </p:sp>
-      <p:sp>
-        <p:nvSpPr>
-          <p:cNvPr id="51" name="Text 49"/>
-          <p:cNvSpPr/>
-          <p:nvPr/>
-        </p:nvSpPr>
-        <p:spPr>
-          <a:xfrm>
-            <a:off x="6668262" y="4169664"/>
-            <a:ext cx="685800" cy="384048"/>
-          </a:xfrm>
-          <a:prstGeom prst="rect">
-            <a:avLst/>
-          </a:prstGeom>
-          <a:noFill/>
-          <a:ln/>
-        </p:spPr>
-        <p:txBody>
-          <a:bodyPr wrap="square" lIns="0" tIns="0" rIns="0" bIns="0" rtlCol="0" anchor="ctr"/>
-          <a:lstStyle/>
-          <a:p>
-            <a:pPr algn="ctr" indent="0" marL="0">
-              <a:buNone/>
-            </a:pPr>
-            <a:r>
-              <a:rPr lang="en-US" sz="900" b="1" dirty="0">
-                <a:solidFill>
-                  <a:srgbClr val="9D174D"/>
-                </a:solidFill>
-                <a:latin typeface="Trebuchet MS" pitchFamily="34" charset="0"/>
-                <a:ea typeface="Trebuchet MS" pitchFamily="34" charset="-122"/>
-                <a:cs typeface="Trebuchet MS" pitchFamily="34" charset="-120"/>
-              </a:rPr>
               <a:t>er</a:t>
-            </a:r>
-            <a:endParaRPr lang="en-US" sz="900" dirty="0"/>
-          </a:p>
-        </p:txBody>
-      </p:sp>
-      <p:sp>
-        <p:nvSpPr>
-          <p:cNvPr id="52" name="Shape 50"/>
-          <p:cNvSpPr/>
-          <p:nvPr/>
-        </p:nvSpPr>
-        <p:spPr>
-          <a:xfrm>
-            <a:off x="7576947" y="4169664"/>
-            <a:ext cx="685800" cy="384048"/>
-          </a:xfrm>
-          <a:prstGeom prst="rect">
-            <a:avLst>
-              <a:gd name="adj" fmla="val 9524"/>
-            </a:avLst>
-          </a:prstGeom>
-          <a:solidFill>
-            <a:srgbClr val="FFFFFF"/>
-          </a:solidFill>
-          <a:ln w="12700">
-            <a:solidFill>
-              <a:srgbClr val="DB2777"/>
-            </a:solidFill>
-            <a:prstDash val="solid"/>
-          </a:ln>
-        </p:spPr>
-      </p:sp>
-      <p:sp>
-        <p:nvSpPr>
-          <p:cNvPr id="53" name="Text 51"/>
-          <p:cNvSpPr/>
-          <p:nvPr/>
-        </p:nvSpPr>
-        <p:spPr>
-          <a:xfrm>
-            <a:off x="7576947" y="4169664"/>
-            <a:ext cx="685800" cy="384048"/>
-          </a:xfrm>
-          <a:prstGeom prst="rect">
-            <a:avLst/>
-          </a:prstGeom>
-          <a:noFill/>
-          <a:ln/>
-        </p:spPr>
-        <p:txBody>
-          <a:bodyPr wrap="square" lIns="0" tIns="0" rIns="0" bIns="0" rtlCol="0" anchor="ctr"/>
-          <a:lstStyle/>
-          <a:p>
-            <a:pPr algn="ctr" indent="0" marL="0">
-              <a:buNone/>
-            </a:pPr>
-            <a:r>
-              <a:rPr lang="en-US" sz="900" b="1" dirty="0">
-                <a:solidFill>
-                  <a:srgbClr val="9D174D"/>
-                </a:solidFill>
-                <a:latin typeface="Trebuchet MS" pitchFamily="34" charset="0"/>
-                <a:ea typeface="Trebuchet MS" pitchFamily="34" charset="-122"/>
-                <a:cs typeface="Trebuchet MS" pitchFamily="34" charset="-120"/>
-              </a:rPr>
-              <a:t>s</a:t>
             </a:r>
             <a:endParaRPr lang="en-US" sz="900" dirty="0"/>
           </a:p>
@@ -22932,7 +22452,7 @@
                 <a:ea typeface="Calibri" pitchFamily="34" charset="-122"/>
                 <a:cs typeface="Calibri" pitchFamily="34" charset="-120"/>
               </a:rPr>
-              <a:t>Word Labs  •  wordlabs.app  •  Root: 'care' = worry, concern, look after</a:t>
+              <a:t>Word Labs  •  wordlabs.app  •  Root: 'care' = worry, attention, looking after</a:t>
             </a:r>
             <a:endParaRPr lang="en-US" sz="800" dirty="0"/>
           </a:p>
@@ -23759,7 +23279,7 @@
                 <a:ea typeface="Calibri" pitchFamily="34" charset="-122"/>
                 <a:cs typeface="Calibri" pitchFamily="34" charset="-120"/>
               </a:rPr>
-              <a:t>Word Labs  •  wordlabs.app  •  Root: 'care' = worry, concern, look after</a:t>
+              <a:t>Word Labs  •  wordlabs.app  •  Root: 'care' = worry, attention, looking after</a:t>
             </a:r>
             <a:endParaRPr lang="en-US" sz="800" dirty="0"/>
           </a:p>
@@ -24076,7 +23596,7 @@
                 <a:ea typeface="Calibri" pitchFamily="34" charset="-122"/>
                 <a:cs typeface="Calibri" pitchFamily="34" charset="-120"/>
               </a:rPr>
-              <a:t>to look after</a:t>
+              <a:t>attention, worry</a:t>
             </a:r>
             <a:endParaRPr lang="en-US" sz="850" dirty="0"/>
           </a:p>
@@ -24856,7 +24376,7 @@
                 <a:ea typeface="Calibri" pitchFamily="34" charset="-122"/>
                 <a:cs typeface="Calibri" pitchFamily="34" charset="-120"/>
               </a:rPr>
-              <a:t>Word Labs  •  wordlabs.app  •  Root: 'care' = worry, concern, look after</a:t>
+              <a:t>Word Labs  •  wordlabs.app  •  Root: 'care' = worry, attention, looking after</a:t>
             </a:r>
             <a:endParaRPr lang="en-US" sz="800" dirty="0"/>
           </a:p>
@@ -24929,7 +24449,7 @@
                 <a:ea typeface="Trebuchet MS" pitchFamily="34" charset="-122"/>
                 <a:cs typeface="Trebuchet MS" pitchFamily="34" charset="-120"/>
               </a:rPr>
-              <a:t>We are learning that the root 'care' means 'worry, concern, look after'.</a:t>
+              <a:t>We are learning that the root 'care' means 'worry, attention, looking after'.</a:t>
             </a:r>
             <a:endParaRPr lang="en-US" sz="2000" dirty="0"/>
           </a:p>
@@ -25575,7 +25095,7 @@
                 <a:ea typeface="Calibri" pitchFamily="34" charset="-122"/>
                 <a:cs typeface="Calibri" pitchFamily="34" charset="-120"/>
               </a:rPr>
-              <a:t>Word Labs  •  wordlabs.app  •  Root: 'care' = worry, concern, look after</a:t>
+              <a:t>Word Labs  •  wordlabs.app  •  Root: 'care' = worry, attention, looking after</a:t>
             </a:r>
             <a:endParaRPr lang="en-US" sz="800" dirty="0"/>
           </a:p>
@@ -25892,7 +25412,7 @@
                 <a:ea typeface="Calibri" pitchFamily="34" charset="-122"/>
                 <a:cs typeface="Calibri" pitchFamily="34" charset="-120"/>
               </a:rPr>
-              <a:t>to look after</a:t>
+              <a:t>attention, worry</a:t>
             </a:r>
             <a:endParaRPr lang="en-US" sz="850" dirty="0"/>
           </a:p>
@@ -26909,7 +26429,7 @@
                 <a:ea typeface="Calibri" pitchFamily="34" charset="-122"/>
                 <a:cs typeface="Calibri" pitchFamily="34" charset="-120"/>
               </a:rPr>
-              <a:t>Word Labs  •  wordlabs.app  •  Root: 'care' = worry, concern, look after</a:t>
+              <a:t>Word Labs  •  wordlabs.app  •  Root: 'care' = worry, attention, looking after</a:t>
             </a:r>
             <a:endParaRPr lang="en-US" sz="800" dirty="0"/>
           </a:p>
@@ -27226,7 +26746,7 @@
                 <a:ea typeface="Calibri" pitchFamily="34" charset="-122"/>
                 <a:cs typeface="Calibri" pitchFamily="34" charset="-120"/>
               </a:rPr>
-              <a:t>to look after</a:t>
+              <a:t>attention, worry</a:t>
             </a:r>
             <a:endParaRPr lang="en-US" sz="850" dirty="0"/>
           </a:p>
@@ -27926,7 +27446,7 @@
         </p:nvSpPr>
         <p:spPr>
           <a:xfrm>
-            <a:off x="2254649" y="4169664"/>
+            <a:off x="2023872" y="4169664"/>
             <a:ext cx="685800" cy="384048"/>
           </a:xfrm>
           <a:prstGeom prst="rect">
@@ -27953,7 +27473,7 @@
         </p:nvSpPr>
         <p:spPr>
           <a:xfrm>
-            <a:off x="2254649" y="4169664"/>
+            <a:off x="2023872" y="4169664"/>
             <a:ext cx="685800" cy="384048"/>
           </a:xfrm>
           <a:prstGeom prst="rect">
@@ -27992,7 +27512,7 @@
         </p:nvSpPr>
         <p:spPr>
           <a:xfrm>
-            <a:off x="2254649" y="4572000"/>
+            <a:off x="2023872" y="4572000"/>
             <a:ext cx="685800" cy="219456"/>
           </a:xfrm>
           <a:prstGeom prst="rect">
@@ -28031,7 +27551,7 @@
         </p:nvSpPr>
         <p:spPr>
           <a:xfrm>
-            <a:off x="3293146" y="4169664"/>
+            <a:off x="2831592" y="4169664"/>
             <a:ext cx="685800" cy="384048"/>
           </a:xfrm>
           <a:prstGeom prst="rect">
@@ -28058,7 +27578,7 @@
         </p:nvSpPr>
         <p:spPr>
           <a:xfrm>
-            <a:off x="3293146" y="4169664"/>
+            <a:off x="2831592" y="4169664"/>
             <a:ext cx="685800" cy="384048"/>
           </a:xfrm>
           <a:prstGeom prst="rect">
@@ -28083,7 +27603,7 @@
                 <a:ea typeface="Trebuchet MS" pitchFamily="34" charset="-122"/>
                 <a:cs typeface="Trebuchet MS" pitchFamily="34" charset="-120"/>
               </a:rPr>
-              <a:t>air</a:t>
+              <a:t>ar</a:t>
             </a:r>
             <a:endParaRPr lang="en-US" sz="900" dirty="0"/>
           </a:p>
@@ -28097,7 +27617,7 @@
         </p:nvSpPr>
         <p:spPr>
           <a:xfrm>
-            <a:off x="4331643" y="4169664"/>
+            <a:off x="3639312" y="4169664"/>
             <a:ext cx="685800" cy="384048"/>
           </a:xfrm>
           <a:prstGeom prst="rect">
@@ -28124,7 +27644,7 @@
         </p:nvSpPr>
         <p:spPr>
           <a:xfrm>
-            <a:off x="4331643" y="4169664"/>
+            <a:off x="3639312" y="4169664"/>
             <a:ext cx="685800" cy="384048"/>
           </a:xfrm>
           <a:prstGeom prst="rect">
@@ -28149,7 +27669,7 @@
                 <a:ea typeface="Trebuchet MS" pitchFamily="34" charset="-122"/>
                 <a:cs typeface="Trebuchet MS" pitchFamily="34" charset="-120"/>
               </a:rPr>
-              <a:t>f</a:t>
+              <a:t>e</a:t>
             </a:r>
             <a:endParaRPr lang="en-US" sz="900" dirty="0"/>
           </a:p>
@@ -28163,7 +27683,7 @@
         </p:nvSpPr>
         <p:spPr>
           <a:xfrm>
-            <a:off x="5370141" y="4169664"/>
+            <a:off x="4447032" y="4169664"/>
             <a:ext cx="685800" cy="384048"/>
           </a:xfrm>
           <a:prstGeom prst="rect">
@@ -28190,7 +27710,7 @@
         </p:nvSpPr>
         <p:spPr>
           <a:xfrm>
-            <a:off x="5370141" y="4169664"/>
+            <a:off x="4447032" y="4169664"/>
             <a:ext cx="685800" cy="384048"/>
           </a:xfrm>
           <a:prstGeom prst="rect">
@@ -28215,7 +27735,7 @@
                 <a:ea typeface="Trebuchet MS" pitchFamily="34" charset="-122"/>
                 <a:cs typeface="Trebuchet MS" pitchFamily="34" charset="-120"/>
               </a:rPr>
-              <a:t>u</a:t>
+              <a:t>f</a:t>
             </a:r>
             <a:endParaRPr lang="en-US" sz="900" dirty="0"/>
           </a:p>
@@ -28229,7 +27749,7 @@
         </p:nvSpPr>
         <p:spPr>
           <a:xfrm>
-            <a:off x="6408638" y="4169664"/>
+            <a:off x="5254752" y="4169664"/>
             <a:ext cx="685800" cy="384048"/>
           </a:xfrm>
           <a:prstGeom prst="rect">
@@ -28256,7 +27776,7 @@
         </p:nvSpPr>
         <p:spPr>
           <a:xfrm>
-            <a:off x="6408638" y="4169664"/>
+            <a:off x="5254752" y="4169664"/>
             <a:ext cx="685800" cy="384048"/>
           </a:xfrm>
           <a:prstGeom prst="rect">
@@ -28281,7 +27801,7 @@
                 <a:ea typeface="Trebuchet MS" pitchFamily="34" charset="-122"/>
                 <a:cs typeface="Trebuchet MS" pitchFamily="34" charset="-120"/>
               </a:rPr>
-              <a:t>ll</a:t>
+              <a:t>u</a:t>
             </a:r>
             <a:endParaRPr lang="en-US" sz="900" dirty="0"/>
           </a:p>
@@ -28295,7 +27815,7 @@
         </p:nvSpPr>
         <p:spPr>
           <a:xfrm>
-            <a:off x="7447135" y="4169664"/>
+            <a:off x="6062472" y="4169664"/>
             <a:ext cx="685800" cy="384048"/>
           </a:xfrm>
           <a:prstGeom prst="rect">
@@ -28322,7 +27842,139 @@
         </p:nvSpPr>
         <p:spPr>
           <a:xfrm>
-            <a:off x="7447135" y="4169664"/>
+            <a:off x="6062472" y="4169664"/>
+            <a:ext cx="685800" cy="384048"/>
+          </a:xfrm>
+          <a:prstGeom prst="rect">
+            <a:avLst/>
+          </a:prstGeom>
+          <a:noFill/>
+          <a:ln/>
+        </p:spPr>
+        <p:txBody>
+          <a:bodyPr wrap="square" lIns="0" tIns="0" rIns="0" bIns="0" rtlCol="0" anchor="ctr"/>
+          <a:lstStyle/>
+          <a:p>
+            <a:pPr algn="ctr" indent="0" marL="0">
+              <a:buNone/>
+            </a:pPr>
+            <a:r>
+              <a:rPr lang="en-US" sz="900" b="1" dirty="0">
+                <a:solidFill>
+                  <a:srgbClr val="9D174D"/>
+                </a:solidFill>
+                <a:latin typeface="Trebuchet MS" pitchFamily="34" charset="0"/>
+                <a:ea typeface="Trebuchet MS" pitchFamily="34" charset="-122"/>
+                <a:cs typeface="Trebuchet MS" pitchFamily="34" charset="-120"/>
+              </a:rPr>
+              <a:t>l</a:t>
+            </a:r>
+            <a:endParaRPr lang="en-US" sz="900" dirty="0"/>
+          </a:p>
+        </p:txBody>
+      </p:sp>
+      <p:sp>
+        <p:nvSpPr>
+          <p:cNvPr id="52" name="Shape 50"/>
+          <p:cNvSpPr/>
+          <p:nvPr/>
+        </p:nvSpPr>
+        <p:spPr>
+          <a:xfrm>
+            <a:off x="6870192" y="4169664"/>
+            <a:ext cx="685800" cy="384048"/>
+          </a:xfrm>
+          <a:prstGeom prst="rect">
+            <a:avLst>
+              <a:gd name="adj" fmla="val 9524"/>
+            </a:avLst>
+          </a:prstGeom>
+          <a:solidFill>
+            <a:srgbClr val="FFFFFF"/>
+          </a:solidFill>
+          <a:ln w="12700">
+            <a:solidFill>
+              <a:srgbClr val="DB2777"/>
+            </a:solidFill>
+            <a:prstDash val="solid"/>
+          </a:ln>
+        </p:spPr>
+      </p:sp>
+      <p:sp>
+        <p:nvSpPr>
+          <p:cNvPr id="53" name="Text 51"/>
+          <p:cNvSpPr/>
+          <p:nvPr/>
+        </p:nvSpPr>
+        <p:spPr>
+          <a:xfrm>
+            <a:off x="6870192" y="4169664"/>
+            <a:ext cx="685800" cy="384048"/>
+          </a:xfrm>
+          <a:prstGeom prst="rect">
+            <a:avLst/>
+          </a:prstGeom>
+          <a:noFill/>
+          <a:ln/>
+        </p:spPr>
+        <p:txBody>
+          <a:bodyPr wrap="square" lIns="0" tIns="0" rIns="0" bIns="0" rtlCol="0" anchor="ctr"/>
+          <a:lstStyle/>
+          <a:p>
+            <a:pPr algn="ctr" indent="0" marL="0">
+              <a:buNone/>
+            </a:pPr>
+            <a:r>
+              <a:rPr lang="en-US" sz="900" b="1" dirty="0">
+                <a:solidFill>
+                  <a:srgbClr val="9D174D"/>
+                </a:solidFill>
+                <a:latin typeface="Trebuchet MS" pitchFamily="34" charset="0"/>
+                <a:ea typeface="Trebuchet MS" pitchFamily="34" charset="-122"/>
+                <a:cs typeface="Trebuchet MS" pitchFamily="34" charset="-120"/>
+              </a:rPr>
+              <a:t>l</a:t>
+            </a:r>
+            <a:endParaRPr lang="en-US" sz="900" dirty="0"/>
+          </a:p>
+        </p:txBody>
+      </p:sp>
+      <p:sp>
+        <p:nvSpPr>
+          <p:cNvPr id="54" name="Shape 52"/>
+          <p:cNvSpPr/>
+          <p:nvPr/>
+        </p:nvSpPr>
+        <p:spPr>
+          <a:xfrm>
+            <a:off x="7677912" y="4169664"/>
+            <a:ext cx="685800" cy="384048"/>
+          </a:xfrm>
+          <a:prstGeom prst="rect">
+            <a:avLst>
+              <a:gd name="adj" fmla="val 9524"/>
+            </a:avLst>
+          </a:prstGeom>
+          <a:solidFill>
+            <a:srgbClr val="FFFFFF"/>
+          </a:solidFill>
+          <a:ln w="12700">
+            <a:solidFill>
+              <a:srgbClr val="DB2777"/>
+            </a:solidFill>
+            <a:prstDash val="solid"/>
+          </a:ln>
+        </p:spPr>
+      </p:sp>
+      <p:sp>
+        <p:nvSpPr>
+          <p:cNvPr id="55" name="Text 53"/>
+          <p:cNvSpPr/>
+          <p:nvPr/>
+        </p:nvSpPr>
+        <p:spPr>
+          <a:xfrm>
+            <a:off x="7677912" y="4169664"/>
             <a:ext cx="685800" cy="384048"/>
           </a:xfrm>
           <a:prstGeom prst="rect">
@@ -28639,7 +28291,7 @@
                 <a:ea typeface="Calibri" pitchFamily="34" charset="-122"/>
                 <a:cs typeface="Calibri" pitchFamily="34" charset="-120"/>
               </a:rPr>
-              <a:t>Word Labs  •  wordlabs.app  •  Root: 'care' = worry, concern, look after</a:t>
+              <a:t>Word Labs  •  wordlabs.app  •  Root: 'care' = worry, attention, looking after</a:t>
             </a:r>
             <a:endParaRPr lang="en-US" sz="800" dirty="0"/>
           </a:p>
@@ -28778,7 +28430,7 @@
                 <a:ea typeface="Trebuchet MS" pitchFamily="34" charset="-122"/>
                 <a:cs typeface="Trebuchet MS" pitchFamily="34" charset="-120"/>
               </a:rPr>
-              <a:t>careless</a:t>
+              <a:t>carelessly</a:t>
             </a:r>
             <a:endParaRPr lang="en-US" sz="2800" dirty="0"/>
           </a:p>
@@ -29466,7 +29118,7 @@
                 <a:ea typeface="Calibri" pitchFamily="34" charset="-122"/>
                 <a:cs typeface="Calibri" pitchFamily="34" charset="-120"/>
               </a:rPr>
-              <a:t>Word Labs  •  wordlabs.app  •  Root: 'care' = worry, concern, look after</a:t>
+              <a:t>Word Labs  •  wordlabs.app  •  Root: 'care' = worry, attention, looking after</a:t>
             </a:r>
             <a:endParaRPr lang="en-US" sz="800" dirty="0"/>
           </a:p>
@@ -29605,7 +29257,7 @@
                 <a:ea typeface="Trebuchet MS" pitchFamily="34" charset="-122"/>
                 <a:cs typeface="Trebuchet MS" pitchFamily="34" charset="-120"/>
               </a:rPr>
-              <a:t>careless</a:t>
+              <a:t>carelessly</a:t>
             </a:r>
             <a:endParaRPr lang="en-US" sz="2800" dirty="0"/>
           </a:p>
@@ -29685,7 +29337,7 @@
         </p:nvSpPr>
         <p:spPr>
           <a:xfrm>
-            <a:off x="2938272" y="2258568"/>
+            <a:off x="2221992" y="2258568"/>
             <a:ext cx="1828800" cy="292608"/>
           </a:xfrm>
           <a:prstGeom prst="rect">
@@ -29719,7 +29371,7 @@
         </p:nvSpPr>
         <p:spPr>
           <a:xfrm>
-            <a:off x="2938272" y="2258568"/>
+            <a:off x="2221992" y="2258568"/>
             <a:ext cx="1828800" cy="292608"/>
           </a:xfrm>
           <a:prstGeom prst="rect">
@@ -29758,7 +29410,7 @@
         </p:nvSpPr>
         <p:spPr>
           <a:xfrm>
-            <a:off x="2938272" y="2569464"/>
+            <a:off x="2221992" y="2569464"/>
             <a:ext cx="1828800" cy="201168"/>
           </a:xfrm>
           <a:prstGeom prst="rect">
@@ -29783,7 +29435,7 @@
                 <a:ea typeface="Calibri" pitchFamily="34" charset="-122"/>
                 <a:cs typeface="Calibri" pitchFamily="34" charset="-120"/>
               </a:rPr>
-              <a:t>to look after</a:t>
+              <a:t>attention, worry</a:t>
             </a:r>
             <a:endParaRPr lang="en-US" sz="850" dirty="0"/>
           </a:p>
@@ -29797,7 +29449,7 @@
         </p:nvSpPr>
         <p:spPr>
           <a:xfrm>
-            <a:off x="5803392" y="2258568"/>
+            <a:off x="4370832" y="2258568"/>
             <a:ext cx="1828800" cy="292608"/>
           </a:xfrm>
           <a:prstGeom prst="rect">
@@ -29831,7 +29483,7 @@
         </p:nvSpPr>
         <p:spPr>
           <a:xfrm>
-            <a:off x="5803392" y="2258568"/>
+            <a:off x="4370832" y="2258568"/>
             <a:ext cx="1828800" cy="292608"/>
           </a:xfrm>
           <a:prstGeom prst="rect">
@@ -29870,7 +29522,7 @@
         </p:nvSpPr>
         <p:spPr>
           <a:xfrm>
-            <a:off x="5803392" y="2569464"/>
+            <a:off x="4370832" y="2569464"/>
             <a:ext cx="1828800" cy="201168"/>
           </a:xfrm>
           <a:prstGeom prst="rect">
@@ -29909,6 +29561,118 @@
         </p:nvSpPr>
         <p:spPr>
           <a:xfrm>
+            <a:off x="6519672" y="2258568"/>
+            <a:ext cx="1828800" cy="292608"/>
+          </a:xfrm>
+          <a:prstGeom prst="rect">
+            <a:avLst>
+              <a:gd name="adj" fmla="val 25000"/>
+            </a:avLst>
+          </a:prstGeom>
+          <a:solidFill>
+            <a:srgbClr val="FCE7F3"/>
+          </a:solidFill>
+          <a:ln w="19050">
+            <a:solidFill>
+              <a:srgbClr val="DB2777"/>
+            </a:solidFill>
+            <a:prstDash val="solid"/>
+          </a:ln>
+          <a:effectLst>
+            <a:outerShdw sx="100000" sy="100000" kx="0" ky="0" algn="bl" rotWithShape="0" blurRad="101600" dist="38100" dir="8100000">
+              <a:srgbClr val="000000">
+                <a:alpha val="12000"/>
+              </a:srgbClr>
+            </a:outerShdw>
+          </a:effectLst>
+        </p:spPr>
+      </p:sp>
+      <p:sp>
+        <p:nvSpPr>
+          <p:cNvPr id="23" name="Text 21"/>
+          <p:cNvSpPr/>
+          <p:nvPr/>
+        </p:nvSpPr>
+        <p:spPr>
+          <a:xfrm>
+            <a:off x="6519672" y="2258568"/>
+            <a:ext cx="1828800" cy="292608"/>
+          </a:xfrm>
+          <a:prstGeom prst="rect">
+            <a:avLst/>
+          </a:prstGeom>
+          <a:noFill/>
+          <a:ln/>
+        </p:spPr>
+        <p:txBody>
+          <a:bodyPr wrap="square" lIns="0" tIns="0" rIns="0" bIns="0" rtlCol="0" anchor="ctr"/>
+          <a:lstStyle/>
+          <a:p>
+            <a:pPr algn="ctr" indent="0" marL="0">
+              <a:buNone/>
+            </a:pPr>
+            <a:r>
+              <a:rPr lang="en-US" sz="1300" b="1" dirty="0">
+                <a:solidFill>
+                  <a:srgbClr val="9D174D"/>
+                </a:solidFill>
+                <a:latin typeface="Trebuchet MS" pitchFamily="34" charset="0"/>
+                <a:ea typeface="Trebuchet MS" pitchFamily="34" charset="-122"/>
+                <a:cs typeface="Trebuchet MS" pitchFamily="34" charset="-120"/>
+              </a:rPr>
+              <a:t>ly</a:t>
+            </a:r>
+            <a:endParaRPr lang="en-US" sz="1300" dirty="0"/>
+          </a:p>
+        </p:txBody>
+      </p:sp>
+      <p:sp>
+        <p:nvSpPr>
+          <p:cNvPr id="24" name="Text 22"/>
+          <p:cNvSpPr/>
+          <p:nvPr/>
+        </p:nvSpPr>
+        <p:spPr>
+          <a:xfrm>
+            <a:off x="6519672" y="2569464"/>
+            <a:ext cx="1828800" cy="201168"/>
+          </a:xfrm>
+          <a:prstGeom prst="rect">
+            <a:avLst/>
+          </a:prstGeom>
+          <a:noFill/>
+          <a:ln/>
+        </p:spPr>
+        <p:txBody>
+          <a:bodyPr wrap="square" lIns="0" tIns="0" rIns="0" bIns="0" rtlCol="0" anchor="t"/>
+          <a:lstStyle/>
+          <a:p>
+            <a:pPr algn="ctr" indent="0" marL="0">
+              <a:buNone/>
+            </a:pPr>
+            <a:r>
+              <a:rPr lang="en-US" sz="850" dirty="0">
+                <a:solidFill>
+                  <a:srgbClr val="475569"/>
+                </a:solidFill>
+                <a:latin typeface="Calibri" pitchFamily="34" charset="0"/>
+                <a:ea typeface="Calibri" pitchFamily="34" charset="-122"/>
+                <a:cs typeface="Calibri" pitchFamily="34" charset="-120"/>
+              </a:rPr>
+              <a:t>in a way that is</a:t>
+            </a:r>
+            <a:endParaRPr lang="en-US" sz="850" dirty="0"/>
+          </a:p>
+        </p:txBody>
+      </p:sp>
+      <p:sp>
+        <p:nvSpPr>
+          <p:cNvPr id="25" name="Shape 23"/>
+          <p:cNvSpPr/>
+          <p:nvPr/>
+        </p:nvSpPr>
+        <p:spPr>
+          <a:xfrm>
             <a:off x="365760" y="3273552"/>
             <a:ext cx="1371600" cy="658368"/>
           </a:xfrm>
@@ -29930,7 +29694,7 @@
       </p:sp>
       <p:sp>
         <p:nvSpPr>
-          <p:cNvPr id="23" name="Text 21"/>
+          <p:cNvPr id="26" name="Text 24"/>
           <p:cNvSpPr/>
           <p:nvPr/>
         </p:nvSpPr>
@@ -29969,7 +29733,7 @@
       </p:sp>
       <p:sp>
         <p:nvSpPr>
-          <p:cNvPr id="24" name="Shape 22"/>
+          <p:cNvPr id="27" name="Shape 25"/>
           <p:cNvSpPr/>
           <p:nvPr/>
         </p:nvSpPr>
@@ -29996,7 +29760,7 @@
       </p:sp>
       <p:sp>
         <p:nvSpPr>
-          <p:cNvPr id="25" name="Text 23"/>
+          <p:cNvPr id="28" name="Text 26"/>
           <p:cNvSpPr/>
           <p:nvPr/>
         </p:nvSpPr>
@@ -30035,7 +29799,7 @@
       </p:sp>
       <p:sp>
         <p:nvSpPr>
-          <p:cNvPr id="26" name="Shape 24"/>
+          <p:cNvPr id="29" name="Shape 27"/>
           <p:cNvSpPr/>
           <p:nvPr/>
         </p:nvSpPr>
@@ -30062,7 +29826,7 @@
       </p:sp>
       <p:sp>
         <p:nvSpPr>
-          <p:cNvPr id="27" name="Text 25"/>
+          <p:cNvPr id="30" name="Text 28"/>
           <p:cNvSpPr/>
           <p:nvPr/>
         </p:nvSpPr>
@@ -30101,7 +29865,7 @@
       </p:sp>
       <p:sp>
         <p:nvSpPr>
-          <p:cNvPr id="28" name="Shape 26"/>
+          <p:cNvPr id="31" name="Shape 29"/>
           <p:cNvSpPr/>
           <p:nvPr/>
         </p:nvSpPr>
@@ -30128,7 +29892,7 @@
       </p:sp>
       <p:sp>
         <p:nvSpPr>
-          <p:cNvPr id="29" name="Text 27"/>
+          <p:cNvPr id="32" name="Text 30"/>
           <p:cNvSpPr/>
           <p:nvPr/>
         </p:nvSpPr>
@@ -30451,7 +30215,7 @@
                 <a:ea typeface="Calibri" pitchFamily="34" charset="-122"/>
                 <a:cs typeface="Calibri" pitchFamily="34" charset="-120"/>
               </a:rPr>
-              <a:t>Word Labs  •  wordlabs.app  •  Root: 'care' = worry, concern, look after</a:t>
+              <a:t>Word Labs  •  wordlabs.app  •  Root: 'care' = worry, attention, looking after</a:t>
             </a:r>
             <a:endParaRPr lang="en-US" sz="800" dirty="0"/>
           </a:p>
@@ -30590,7 +30354,7 @@
                 <a:ea typeface="Trebuchet MS" pitchFamily="34" charset="-122"/>
                 <a:cs typeface="Trebuchet MS" pitchFamily="34" charset="-120"/>
               </a:rPr>
-              <a:t>careless</a:t>
+              <a:t>carelessly</a:t>
             </a:r>
             <a:endParaRPr lang="en-US" sz="2800" dirty="0"/>
           </a:p>
@@ -30670,7 +30434,7 @@
         </p:nvSpPr>
         <p:spPr>
           <a:xfrm>
-            <a:off x="2938272" y="2258568"/>
+            <a:off x="2221992" y="2258568"/>
             <a:ext cx="1828800" cy="292608"/>
           </a:xfrm>
           <a:prstGeom prst="rect">
@@ -30704,7 +30468,7 @@
         </p:nvSpPr>
         <p:spPr>
           <a:xfrm>
-            <a:off x="2938272" y="2258568"/>
+            <a:off x="2221992" y="2258568"/>
             <a:ext cx="1828800" cy="292608"/>
           </a:xfrm>
           <a:prstGeom prst="rect">
@@ -30743,7 +30507,7 @@
         </p:nvSpPr>
         <p:spPr>
           <a:xfrm>
-            <a:off x="2938272" y="2569464"/>
+            <a:off x="2221992" y="2569464"/>
             <a:ext cx="1828800" cy="201168"/>
           </a:xfrm>
           <a:prstGeom prst="rect">
@@ -30768,7 +30532,7 @@
                 <a:ea typeface="Calibri" pitchFamily="34" charset="-122"/>
                 <a:cs typeface="Calibri" pitchFamily="34" charset="-120"/>
               </a:rPr>
-              <a:t>to look after</a:t>
+              <a:t>attention, worry</a:t>
             </a:r>
             <a:endParaRPr lang="en-US" sz="850" dirty="0"/>
           </a:p>
@@ -30782,7 +30546,7 @@
         </p:nvSpPr>
         <p:spPr>
           <a:xfrm>
-            <a:off x="5803392" y="2258568"/>
+            <a:off x="4370832" y="2258568"/>
             <a:ext cx="1828800" cy="292608"/>
           </a:xfrm>
           <a:prstGeom prst="rect">
@@ -30816,7 +30580,7 @@
         </p:nvSpPr>
         <p:spPr>
           <a:xfrm>
-            <a:off x="5803392" y="2258568"/>
+            <a:off x="4370832" y="2258568"/>
             <a:ext cx="1828800" cy="292608"/>
           </a:xfrm>
           <a:prstGeom prst="rect">
@@ -30855,7 +30619,7 @@
         </p:nvSpPr>
         <p:spPr>
           <a:xfrm>
-            <a:off x="5803392" y="2569464"/>
+            <a:off x="4370832" y="2569464"/>
             <a:ext cx="1828800" cy="201168"/>
           </a:xfrm>
           <a:prstGeom prst="rect">
@@ -30894,6 +30658,118 @@
         </p:nvSpPr>
         <p:spPr>
           <a:xfrm>
+            <a:off x="6519672" y="2258568"/>
+            <a:ext cx="1828800" cy="292608"/>
+          </a:xfrm>
+          <a:prstGeom prst="rect">
+            <a:avLst>
+              <a:gd name="adj" fmla="val 25000"/>
+            </a:avLst>
+          </a:prstGeom>
+          <a:solidFill>
+            <a:srgbClr val="FCE7F3"/>
+          </a:solidFill>
+          <a:ln w="19050">
+            <a:solidFill>
+              <a:srgbClr val="DB2777"/>
+            </a:solidFill>
+            <a:prstDash val="solid"/>
+          </a:ln>
+          <a:effectLst>
+            <a:outerShdw sx="100000" sy="100000" kx="0" ky="0" algn="bl" rotWithShape="0" blurRad="101600" dist="38100" dir="8100000">
+              <a:srgbClr val="000000">
+                <a:alpha val="12000"/>
+              </a:srgbClr>
+            </a:outerShdw>
+          </a:effectLst>
+        </p:spPr>
+      </p:sp>
+      <p:sp>
+        <p:nvSpPr>
+          <p:cNvPr id="23" name="Text 21"/>
+          <p:cNvSpPr/>
+          <p:nvPr/>
+        </p:nvSpPr>
+        <p:spPr>
+          <a:xfrm>
+            <a:off x="6519672" y="2258568"/>
+            <a:ext cx="1828800" cy="292608"/>
+          </a:xfrm>
+          <a:prstGeom prst="rect">
+            <a:avLst/>
+          </a:prstGeom>
+          <a:noFill/>
+          <a:ln/>
+        </p:spPr>
+        <p:txBody>
+          <a:bodyPr wrap="square" lIns="0" tIns="0" rIns="0" bIns="0" rtlCol="0" anchor="ctr"/>
+          <a:lstStyle/>
+          <a:p>
+            <a:pPr algn="ctr" indent="0" marL="0">
+              <a:buNone/>
+            </a:pPr>
+            <a:r>
+              <a:rPr lang="en-US" sz="1300" b="1" dirty="0">
+                <a:solidFill>
+                  <a:srgbClr val="9D174D"/>
+                </a:solidFill>
+                <a:latin typeface="Trebuchet MS" pitchFamily="34" charset="0"/>
+                <a:ea typeface="Trebuchet MS" pitchFamily="34" charset="-122"/>
+                <a:cs typeface="Trebuchet MS" pitchFamily="34" charset="-120"/>
+              </a:rPr>
+              <a:t>ly</a:t>
+            </a:r>
+            <a:endParaRPr lang="en-US" sz="1300" dirty="0"/>
+          </a:p>
+        </p:txBody>
+      </p:sp>
+      <p:sp>
+        <p:nvSpPr>
+          <p:cNvPr id="24" name="Text 22"/>
+          <p:cNvSpPr/>
+          <p:nvPr/>
+        </p:nvSpPr>
+        <p:spPr>
+          <a:xfrm>
+            <a:off x="6519672" y="2569464"/>
+            <a:ext cx="1828800" cy="201168"/>
+          </a:xfrm>
+          <a:prstGeom prst="rect">
+            <a:avLst/>
+          </a:prstGeom>
+          <a:noFill/>
+          <a:ln/>
+        </p:spPr>
+        <p:txBody>
+          <a:bodyPr wrap="square" lIns="0" tIns="0" rIns="0" bIns="0" rtlCol="0" anchor="t"/>
+          <a:lstStyle/>
+          <a:p>
+            <a:pPr algn="ctr" indent="0" marL="0">
+              <a:buNone/>
+            </a:pPr>
+            <a:r>
+              <a:rPr lang="en-US" sz="850" dirty="0">
+                <a:solidFill>
+                  <a:srgbClr val="475569"/>
+                </a:solidFill>
+                <a:latin typeface="Calibri" pitchFamily="34" charset="0"/>
+                <a:ea typeface="Calibri" pitchFamily="34" charset="-122"/>
+                <a:cs typeface="Calibri" pitchFamily="34" charset="-120"/>
+              </a:rPr>
+              <a:t>in a way that is</a:t>
+            </a:r>
+            <a:endParaRPr lang="en-US" sz="850" dirty="0"/>
+          </a:p>
+        </p:txBody>
+      </p:sp>
+      <p:sp>
+        <p:nvSpPr>
+          <p:cNvPr id="25" name="Shape 23"/>
+          <p:cNvSpPr/>
+          <p:nvPr/>
+        </p:nvSpPr>
+        <p:spPr>
+          <a:xfrm>
             <a:off x="365760" y="3273552"/>
             <a:ext cx="1371600" cy="658368"/>
           </a:xfrm>
@@ -30915,7 +30791,7 @@
       </p:sp>
       <p:sp>
         <p:nvSpPr>
-          <p:cNvPr id="23" name="Text 21"/>
+          <p:cNvPr id="26" name="Text 24"/>
           <p:cNvSpPr/>
           <p:nvPr/>
         </p:nvSpPr>
@@ -30954,7 +30830,7 @@
       </p:sp>
       <p:sp>
         <p:nvSpPr>
-          <p:cNvPr id="24" name="Shape 22"/>
+          <p:cNvPr id="27" name="Shape 25"/>
           <p:cNvSpPr/>
           <p:nvPr/>
         </p:nvSpPr>
@@ -30981,13 +30857,13 @@
       </p:sp>
       <p:sp>
         <p:nvSpPr>
-          <p:cNvPr id="25" name="Shape 23"/>
-          <p:cNvSpPr/>
-          <p:nvPr/>
-        </p:nvSpPr>
-        <p:spPr>
-          <a:xfrm>
-            <a:off x="2999232" y="3364992"/>
+          <p:cNvPr id="28" name="Shape 26"/>
+          <p:cNvSpPr/>
+          <p:nvPr/>
+        </p:nvSpPr>
+        <p:spPr>
+          <a:xfrm>
+            <a:off x="2313432" y="3364992"/>
             <a:ext cx="1645920" cy="475488"/>
           </a:xfrm>
           <a:prstGeom prst="rect">
@@ -31008,13 +30884,13 @@
       </p:sp>
       <p:sp>
         <p:nvSpPr>
-          <p:cNvPr id="26" name="Text 24"/>
-          <p:cNvSpPr/>
-          <p:nvPr/>
-        </p:nvSpPr>
-        <p:spPr>
-          <a:xfrm>
-            <a:off x="2999232" y="3364992"/>
+          <p:cNvPr id="29" name="Text 27"/>
+          <p:cNvSpPr/>
+          <p:nvPr/>
+        </p:nvSpPr>
+        <p:spPr>
+          <a:xfrm>
+            <a:off x="2313432" y="3364992"/>
             <a:ext cx="1645920" cy="475488"/>
           </a:xfrm>
           <a:prstGeom prst="rect">
@@ -31047,14 +30923,14 @@
       </p:sp>
       <p:sp>
         <p:nvSpPr>
-          <p:cNvPr id="27" name="Text 25"/>
-          <p:cNvSpPr/>
-          <p:nvPr/>
-        </p:nvSpPr>
-        <p:spPr>
-          <a:xfrm>
-            <a:off x="4645152" y="3364992"/>
-            <a:ext cx="1097280" cy="475488"/>
+          <p:cNvPr id="30" name="Text 28"/>
+          <p:cNvSpPr/>
+          <p:nvPr/>
+        </p:nvSpPr>
+        <p:spPr>
+          <a:xfrm>
+            <a:off x="3959352" y="3364992"/>
+            <a:ext cx="411480" cy="475488"/>
           </a:xfrm>
           <a:prstGeom prst="rect">
             <a:avLst/>
@@ -31086,13 +30962,13 @@
       </p:sp>
       <p:sp>
         <p:nvSpPr>
-          <p:cNvPr id="28" name="Shape 26"/>
-          <p:cNvSpPr/>
-          <p:nvPr/>
-        </p:nvSpPr>
-        <p:spPr>
-          <a:xfrm>
-            <a:off x="5742432" y="3364992"/>
+          <p:cNvPr id="31" name="Shape 29"/>
+          <p:cNvSpPr/>
+          <p:nvPr/>
+        </p:nvSpPr>
+        <p:spPr>
+          <a:xfrm>
+            <a:off x="4370832" y="3364992"/>
             <a:ext cx="1645920" cy="475488"/>
           </a:xfrm>
           <a:prstGeom prst="rect">
@@ -31113,13 +30989,13 @@
       </p:sp>
       <p:sp>
         <p:nvSpPr>
-          <p:cNvPr id="29" name="Text 27"/>
-          <p:cNvSpPr/>
-          <p:nvPr/>
-        </p:nvSpPr>
-        <p:spPr>
-          <a:xfrm>
-            <a:off x="5742432" y="3364992"/>
+          <p:cNvPr id="32" name="Text 30"/>
+          <p:cNvSpPr/>
+          <p:nvPr/>
+        </p:nvSpPr>
+        <p:spPr>
+          <a:xfrm>
+            <a:off x="4370832" y="3364992"/>
             <a:ext cx="1645920" cy="475488"/>
           </a:xfrm>
           <a:prstGeom prst="rect">
@@ -31152,7 +31028,112 @@
       </p:sp>
       <p:sp>
         <p:nvSpPr>
-          <p:cNvPr id="30" name="Shape 28"/>
+          <p:cNvPr id="33" name="Text 31"/>
+          <p:cNvSpPr/>
+          <p:nvPr/>
+        </p:nvSpPr>
+        <p:spPr>
+          <a:xfrm>
+            <a:off x="6016752" y="3364992"/>
+            <a:ext cx="411480" cy="475488"/>
+          </a:xfrm>
+          <a:prstGeom prst="rect">
+            <a:avLst/>
+          </a:prstGeom>
+          <a:noFill/>
+          <a:ln/>
+        </p:spPr>
+        <p:txBody>
+          <a:bodyPr wrap="square" lIns="0" tIns="0" rIns="0" bIns="0" rtlCol="0" anchor="ctr"/>
+          <a:lstStyle/>
+          <a:p>
+            <a:pPr algn="ctr" indent="0" marL="0">
+              <a:buNone/>
+            </a:pPr>
+            <a:r>
+              <a:rPr lang="en-US" sz="1600" b="1" dirty="0">
+                <a:solidFill>
+                  <a:srgbClr val="0D9488"/>
+                </a:solidFill>
+                <a:latin typeface="Trebuchet MS" pitchFamily="34" charset="0"/>
+                <a:ea typeface="Trebuchet MS" pitchFamily="34" charset="-122"/>
+                <a:cs typeface="Trebuchet MS" pitchFamily="34" charset="-120"/>
+              </a:rPr>
+              <a:t>·</a:t>
+            </a:r>
+            <a:endParaRPr lang="en-US" sz="1600" dirty="0"/>
+          </a:p>
+        </p:txBody>
+      </p:sp>
+      <p:sp>
+        <p:nvSpPr>
+          <p:cNvPr id="34" name="Shape 32"/>
+          <p:cNvSpPr/>
+          <p:nvPr/>
+        </p:nvSpPr>
+        <p:spPr>
+          <a:xfrm>
+            <a:off x="6428232" y="3364992"/>
+            <a:ext cx="1645920" cy="475488"/>
+          </a:xfrm>
+          <a:prstGeom prst="rect">
+            <a:avLst>
+              <a:gd name="adj" fmla="val 9615"/>
+            </a:avLst>
+          </a:prstGeom>
+          <a:solidFill>
+            <a:srgbClr val="FFFFFF"/>
+          </a:solidFill>
+          <a:ln w="12700">
+            <a:solidFill>
+              <a:srgbClr val="0D9488"/>
+            </a:solidFill>
+            <a:prstDash val="solid"/>
+          </a:ln>
+        </p:spPr>
+      </p:sp>
+      <p:sp>
+        <p:nvSpPr>
+          <p:cNvPr id="35" name="Text 33"/>
+          <p:cNvSpPr/>
+          <p:nvPr/>
+        </p:nvSpPr>
+        <p:spPr>
+          <a:xfrm>
+            <a:off x="6428232" y="3364992"/>
+            <a:ext cx="1645920" cy="475488"/>
+          </a:xfrm>
+          <a:prstGeom prst="rect">
+            <a:avLst/>
+          </a:prstGeom>
+          <a:noFill/>
+          <a:ln/>
+        </p:spPr>
+        <p:txBody>
+          <a:bodyPr wrap="square" lIns="0" tIns="0" rIns="0" bIns="0" rtlCol="0" anchor="ctr"/>
+          <a:lstStyle/>
+          <a:p>
+            <a:pPr algn="ctr" indent="0" marL="0">
+              <a:buNone/>
+            </a:pPr>
+            <a:r>
+              <a:rPr lang="en-US" sz="1400" b="1" dirty="0">
+                <a:solidFill>
+                  <a:srgbClr val="0D9488"/>
+                </a:solidFill>
+                <a:latin typeface="Trebuchet MS" pitchFamily="34" charset="0"/>
+                <a:ea typeface="Trebuchet MS" pitchFamily="34" charset="-122"/>
+                <a:cs typeface="Trebuchet MS" pitchFamily="34" charset="-120"/>
+              </a:rPr>
+              <a:t>ly</a:t>
+            </a:r>
+            <a:endParaRPr lang="en-US" sz="1400" dirty="0"/>
+          </a:p>
+        </p:txBody>
+      </p:sp>
+      <p:sp>
+        <p:nvSpPr>
+          <p:cNvPr id="36" name="Shape 34"/>
           <p:cNvSpPr/>
           <p:nvPr/>
         </p:nvSpPr>
@@ -31179,7 +31160,7 @@
       </p:sp>
       <p:sp>
         <p:nvSpPr>
-          <p:cNvPr id="31" name="Text 29"/>
+          <p:cNvPr id="37" name="Text 35"/>
           <p:cNvSpPr/>
           <p:nvPr/>
         </p:nvSpPr>
@@ -31218,7 +31199,7 @@
       </p:sp>
       <p:sp>
         <p:nvSpPr>
-          <p:cNvPr id="32" name="Shape 30"/>
+          <p:cNvPr id="38" name="Shape 36"/>
           <p:cNvSpPr/>
           <p:nvPr/>
         </p:nvSpPr>
@@ -31245,7 +31226,7 @@
       </p:sp>
       <p:sp>
         <p:nvSpPr>
-          <p:cNvPr id="33" name="Text 31"/>
+          <p:cNvPr id="39" name="Text 37"/>
           <p:cNvSpPr/>
           <p:nvPr/>
         </p:nvSpPr>
@@ -31568,7 +31549,7 @@
                 <a:ea typeface="Calibri" pitchFamily="34" charset="-122"/>
                 <a:cs typeface="Calibri" pitchFamily="34" charset="-120"/>
               </a:rPr>
-              <a:t>Word Labs  •  wordlabs.app  •  Root: 'care' = worry, concern, look after</a:t>
+              <a:t>Word Labs  •  wordlabs.app  •  Root: 'care' = worry, attention, looking after</a:t>
             </a:r>
             <a:endParaRPr lang="en-US" sz="800" dirty="0"/>
           </a:p>
@@ -31707,7 +31688,7 @@
                 <a:ea typeface="Trebuchet MS" pitchFamily="34" charset="-122"/>
                 <a:cs typeface="Trebuchet MS" pitchFamily="34" charset="-120"/>
               </a:rPr>
-              <a:t>careless</a:t>
+              <a:t>carelessly</a:t>
             </a:r>
             <a:endParaRPr lang="en-US" sz="2800" dirty="0"/>
           </a:p>
@@ -31787,7 +31768,7 @@
         </p:nvSpPr>
         <p:spPr>
           <a:xfrm>
-            <a:off x="2938272" y="2258568"/>
+            <a:off x="2221992" y="2258568"/>
             <a:ext cx="1828800" cy="292608"/>
           </a:xfrm>
           <a:prstGeom prst="rect">
@@ -31821,7 +31802,7 @@
         </p:nvSpPr>
         <p:spPr>
           <a:xfrm>
-            <a:off x="2938272" y="2258568"/>
+            <a:off x="2221992" y="2258568"/>
             <a:ext cx="1828800" cy="292608"/>
           </a:xfrm>
           <a:prstGeom prst="rect">
@@ -31860,7 +31841,7 @@
         </p:nvSpPr>
         <p:spPr>
           <a:xfrm>
-            <a:off x="2938272" y="2569464"/>
+            <a:off x="2221992" y="2569464"/>
             <a:ext cx="1828800" cy="201168"/>
           </a:xfrm>
           <a:prstGeom prst="rect">
@@ -31885,7 +31866,7 @@
                 <a:ea typeface="Calibri" pitchFamily="34" charset="-122"/>
                 <a:cs typeface="Calibri" pitchFamily="34" charset="-120"/>
               </a:rPr>
-              <a:t>to look after</a:t>
+              <a:t>attention, worry</a:t>
             </a:r>
             <a:endParaRPr lang="en-US" sz="850" dirty="0"/>
           </a:p>
@@ -31899,7 +31880,7 @@
         </p:nvSpPr>
         <p:spPr>
           <a:xfrm>
-            <a:off x="5803392" y="2258568"/>
+            <a:off x="4370832" y="2258568"/>
             <a:ext cx="1828800" cy="292608"/>
           </a:xfrm>
           <a:prstGeom prst="rect">
@@ -31933,7 +31914,7 @@
         </p:nvSpPr>
         <p:spPr>
           <a:xfrm>
-            <a:off x="5803392" y="2258568"/>
+            <a:off x="4370832" y="2258568"/>
             <a:ext cx="1828800" cy="292608"/>
           </a:xfrm>
           <a:prstGeom prst="rect">
@@ -31972,7 +31953,7 @@
         </p:nvSpPr>
         <p:spPr>
           <a:xfrm>
-            <a:off x="5803392" y="2569464"/>
+            <a:off x="4370832" y="2569464"/>
             <a:ext cx="1828800" cy="201168"/>
           </a:xfrm>
           <a:prstGeom prst="rect">
@@ -32011,6 +31992,118 @@
         </p:nvSpPr>
         <p:spPr>
           <a:xfrm>
+            <a:off x="6519672" y="2258568"/>
+            <a:ext cx="1828800" cy="292608"/>
+          </a:xfrm>
+          <a:prstGeom prst="rect">
+            <a:avLst>
+              <a:gd name="adj" fmla="val 25000"/>
+            </a:avLst>
+          </a:prstGeom>
+          <a:solidFill>
+            <a:srgbClr val="FCE7F3"/>
+          </a:solidFill>
+          <a:ln w="19050">
+            <a:solidFill>
+              <a:srgbClr val="DB2777"/>
+            </a:solidFill>
+            <a:prstDash val="solid"/>
+          </a:ln>
+          <a:effectLst>
+            <a:outerShdw sx="100000" sy="100000" kx="0" ky="0" algn="bl" rotWithShape="0" blurRad="101600" dist="38100" dir="8100000">
+              <a:srgbClr val="000000">
+                <a:alpha val="12000"/>
+              </a:srgbClr>
+            </a:outerShdw>
+          </a:effectLst>
+        </p:spPr>
+      </p:sp>
+      <p:sp>
+        <p:nvSpPr>
+          <p:cNvPr id="23" name="Text 21"/>
+          <p:cNvSpPr/>
+          <p:nvPr/>
+        </p:nvSpPr>
+        <p:spPr>
+          <a:xfrm>
+            <a:off x="6519672" y="2258568"/>
+            <a:ext cx="1828800" cy="292608"/>
+          </a:xfrm>
+          <a:prstGeom prst="rect">
+            <a:avLst/>
+          </a:prstGeom>
+          <a:noFill/>
+          <a:ln/>
+        </p:spPr>
+        <p:txBody>
+          <a:bodyPr wrap="square" lIns="0" tIns="0" rIns="0" bIns="0" rtlCol="0" anchor="ctr"/>
+          <a:lstStyle/>
+          <a:p>
+            <a:pPr algn="ctr" indent="0" marL="0">
+              <a:buNone/>
+            </a:pPr>
+            <a:r>
+              <a:rPr lang="en-US" sz="1300" b="1" dirty="0">
+                <a:solidFill>
+                  <a:srgbClr val="9D174D"/>
+                </a:solidFill>
+                <a:latin typeface="Trebuchet MS" pitchFamily="34" charset="0"/>
+                <a:ea typeface="Trebuchet MS" pitchFamily="34" charset="-122"/>
+                <a:cs typeface="Trebuchet MS" pitchFamily="34" charset="-120"/>
+              </a:rPr>
+              <a:t>ly</a:t>
+            </a:r>
+            <a:endParaRPr lang="en-US" sz="1300" dirty="0"/>
+          </a:p>
+        </p:txBody>
+      </p:sp>
+      <p:sp>
+        <p:nvSpPr>
+          <p:cNvPr id="24" name="Text 22"/>
+          <p:cNvSpPr/>
+          <p:nvPr/>
+        </p:nvSpPr>
+        <p:spPr>
+          <a:xfrm>
+            <a:off x="6519672" y="2569464"/>
+            <a:ext cx="1828800" cy="201168"/>
+          </a:xfrm>
+          <a:prstGeom prst="rect">
+            <a:avLst/>
+          </a:prstGeom>
+          <a:noFill/>
+          <a:ln/>
+        </p:spPr>
+        <p:txBody>
+          <a:bodyPr wrap="square" lIns="0" tIns="0" rIns="0" bIns="0" rtlCol="0" anchor="t"/>
+          <a:lstStyle/>
+          <a:p>
+            <a:pPr algn="ctr" indent="0" marL="0">
+              <a:buNone/>
+            </a:pPr>
+            <a:r>
+              <a:rPr lang="en-US" sz="850" dirty="0">
+                <a:solidFill>
+                  <a:srgbClr val="475569"/>
+                </a:solidFill>
+                <a:latin typeface="Calibri" pitchFamily="34" charset="0"/>
+                <a:ea typeface="Calibri" pitchFamily="34" charset="-122"/>
+                <a:cs typeface="Calibri" pitchFamily="34" charset="-120"/>
+              </a:rPr>
+              <a:t>in a way that is</a:t>
+            </a:r>
+            <a:endParaRPr lang="en-US" sz="850" dirty="0"/>
+          </a:p>
+        </p:txBody>
+      </p:sp>
+      <p:sp>
+        <p:nvSpPr>
+          <p:cNvPr id="25" name="Shape 23"/>
+          <p:cNvSpPr/>
+          <p:nvPr/>
+        </p:nvSpPr>
+        <p:spPr>
+          <a:xfrm>
             <a:off x="365760" y="3273552"/>
             <a:ext cx="1371600" cy="658368"/>
           </a:xfrm>
@@ -32032,7 +32125,7 @@
       </p:sp>
       <p:sp>
         <p:nvSpPr>
-          <p:cNvPr id="23" name="Text 21"/>
+          <p:cNvPr id="26" name="Text 24"/>
           <p:cNvSpPr/>
           <p:nvPr/>
         </p:nvSpPr>
@@ -32071,7 +32164,7 @@
       </p:sp>
       <p:sp>
         <p:nvSpPr>
-          <p:cNvPr id="24" name="Shape 22"/>
+          <p:cNvPr id="27" name="Shape 25"/>
           <p:cNvSpPr/>
           <p:nvPr/>
         </p:nvSpPr>
@@ -32098,13 +32191,13 @@
       </p:sp>
       <p:sp>
         <p:nvSpPr>
-          <p:cNvPr id="25" name="Shape 23"/>
-          <p:cNvSpPr/>
-          <p:nvPr/>
-        </p:nvSpPr>
-        <p:spPr>
-          <a:xfrm>
-            <a:off x="2999232" y="3364992"/>
+          <p:cNvPr id="28" name="Shape 26"/>
+          <p:cNvSpPr/>
+          <p:nvPr/>
+        </p:nvSpPr>
+        <p:spPr>
+          <a:xfrm>
+            <a:off x="2313432" y="3364992"/>
             <a:ext cx="1645920" cy="475488"/>
           </a:xfrm>
           <a:prstGeom prst="rect">
@@ -32125,13 +32218,13 @@
       </p:sp>
       <p:sp>
         <p:nvSpPr>
-          <p:cNvPr id="26" name="Text 24"/>
-          <p:cNvSpPr/>
-          <p:nvPr/>
-        </p:nvSpPr>
-        <p:spPr>
-          <a:xfrm>
-            <a:off x="2999232" y="3364992"/>
+          <p:cNvPr id="29" name="Text 27"/>
+          <p:cNvSpPr/>
+          <p:nvPr/>
+        </p:nvSpPr>
+        <p:spPr>
+          <a:xfrm>
+            <a:off x="2313432" y="3364992"/>
             <a:ext cx="1645920" cy="475488"/>
           </a:xfrm>
           <a:prstGeom prst="rect">
@@ -32164,14 +32257,14 @@
       </p:sp>
       <p:sp>
         <p:nvSpPr>
-          <p:cNvPr id="27" name="Text 25"/>
-          <p:cNvSpPr/>
-          <p:nvPr/>
-        </p:nvSpPr>
-        <p:spPr>
-          <a:xfrm>
-            <a:off x="4645152" y="3364992"/>
-            <a:ext cx="1097280" cy="475488"/>
+          <p:cNvPr id="30" name="Text 28"/>
+          <p:cNvSpPr/>
+          <p:nvPr/>
+        </p:nvSpPr>
+        <p:spPr>
+          <a:xfrm>
+            <a:off x="3959352" y="3364992"/>
+            <a:ext cx="411480" cy="475488"/>
           </a:xfrm>
           <a:prstGeom prst="rect">
             <a:avLst/>
@@ -32203,13 +32296,13 @@
       </p:sp>
       <p:sp>
         <p:nvSpPr>
-          <p:cNvPr id="28" name="Shape 26"/>
-          <p:cNvSpPr/>
-          <p:nvPr/>
-        </p:nvSpPr>
-        <p:spPr>
-          <a:xfrm>
-            <a:off x="5742432" y="3364992"/>
+          <p:cNvPr id="31" name="Shape 29"/>
+          <p:cNvSpPr/>
+          <p:nvPr/>
+        </p:nvSpPr>
+        <p:spPr>
+          <a:xfrm>
+            <a:off x="4370832" y="3364992"/>
             <a:ext cx="1645920" cy="475488"/>
           </a:xfrm>
           <a:prstGeom prst="rect">
@@ -32230,13 +32323,13 @@
       </p:sp>
       <p:sp>
         <p:nvSpPr>
-          <p:cNvPr id="29" name="Text 27"/>
-          <p:cNvSpPr/>
-          <p:nvPr/>
-        </p:nvSpPr>
-        <p:spPr>
-          <a:xfrm>
-            <a:off x="5742432" y="3364992"/>
+          <p:cNvPr id="32" name="Text 30"/>
+          <p:cNvSpPr/>
+          <p:nvPr/>
+        </p:nvSpPr>
+        <p:spPr>
+          <a:xfrm>
+            <a:off x="4370832" y="3364992"/>
             <a:ext cx="1645920" cy="475488"/>
           </a:xfrm>
           <a:prstGeom prst="rect">
@@ -32269,7 +32362,112 @@
       </p:sp>
       <p:sp>
         <p:nvSpPr>
-          <p:cNvPr id="30" name="Shape 28"/>
+          <p:cNvPr id="33" name="Text 31"/>
+          <p:cNvSpPr/>
+          <p:nvPr/>
+        </p:nvSpPr>
+        <p:spPr>
+          <a:xfrm>
+            <a:off x="6016752" y="3364992"/>
+            <a:ext cx="411480" cy="475488"/>
+          </a:xfrm>
+          <a:prstGeom prst="rect">
+            <a:avLst/>
+          </a:prstGeom>
+          <a:noFill/>
+          <a:ln/>
+        </p:spPr>
+        <p:txBody>
+          <a:bodyPr wrap="square" lIns="0" tIns="0" rIns="0" bIns="0" rtlCol="0" anchor="ctr"/>
+          <a:lstStyle/>
+          <a:p>
+            <a:pPr algn="ctr" indent="0" marL="0">
+              <a:buNone/>
+            </a:pPr>
+            <a:r>
+              <a:rPr lang="en-US" sz="1600" b="1" dirty="0">
+                <a:solidFill>
+                  <a:srgbClr val="0D9488"/>
+                </a:solidFill>
+                <a:latin typeface="Trebuchet MS" pitchFamily="34" charset="0"/>
+                <a:ea typeface="Trebuchet MS" pitchFamily="34" charset="-122"/>
+                <a:cs typeface="Trebuchet MS" pitchFamily="34" charset="-120"/>
+              </a:rPr>
+              <a:t>·</a:t>
+            </a:r>
+            <a:endParaRPr lang="en-US" sz="1600" dirty="0"/>
+          </a:p>
+        </p:txBody>
+      </p:sp>
+      <p:sp>
+        <p:nvSpPr>
+          <p:cNvPr id="34" name="Shape 32"/>
+          <p:cNvSpPr/>
+          <p:nvPr/>
+        </p:nvSpPr>
+        <p:spPr>
+          <a:xfrm>
+            <a:off x="6428232" y="3364992"/>
+            <a:ext cx="1645920" cy="475488"/>
+          </a:xfrm>
+          <a:prstGeom prst="rect">
+            <a:avLst>
+              <a:gd name="adj" fmla="val 9615"/>
+            </a:avLst>
+          </a:prstGeom>
+          <a:solidFill>
+            <a:srgbClr val="FFFFFF"/>
+          </a:solidFill>
+          <a:ln w="12700">
+            <a:solidFill>
+              <a:srgbClr val="0D9488"/>
+            </a:solidFill>
+            <a:prstDash val="solid"/>
+          </a:ln>
+        </p:spPr>
+      </p:sp>
+      <p:sp>
+        <p:nvSpPr>
+          <p:cNvPr id="35" name="Text 33"/>
+          <p:cNvSpPr/>
+          <p:nvPr/>
+        </p:nvSpPr>
+        <p:spPr>
+          <a:xfrm>
+            <a:off x="6428232" y="3364992"/>
+            <a:ext cx="1645920" cy="475488"/>
+          </a:xfrm>
+          <a:prstGeom prst="rect">
+            <a:avLst/>
+          </a:prstGeom>
+          <a:noFill/>
+          <a:ln/>
+        </p:spPr>
+        <p:txBody>
+          <a:bodyPr wrap="square" lIns="0" tIns="0" rIns="0" bIns="0" rtlCol="0" anchor="ctr"/>
+          <a:lstStyle/>
+          <a:p>
+            <a:pPr algn="ctr" indent="0" marL="0">
+              <a:buNone/>
+            </a:pPr>
+            <a:r>
+              <a:rPr lang="en-US" sz="1400" b="1" dirty="0">
+                <a:solidFill>
+                  <a:srgbClr val="0D9488"/>
+                </a:solidFill>
+                <a:latin typeface="Trebuchet MS" pitchFamily="34" charset="0"/>
+                <a:ea typeface="Trebuchet MS" pitchFamily="34" charset="-122"/>
+                <a:cs typeface="Trebuchet MS" pitchFamily="34" charset="-120"/>
+              </a:rPr>
+              <a:t>ly</a:t>
+            </a:r>
+            <a:endParaRPr lang="en-US" sz="1400" dirty="0"/>
+          </a:p>
+        </p:txBody>
+      </p:sp>
+      <p:sp>
+        <p:nvSpPr>
+          <p:cNvPr id="36" name="Shape 34"/>
           <p:cNvSpPr/>
           <p:nvPr/>
         </p:nvSpPr>
@@ -32296,7 +32494,7 @@
       </p:sp>
       <p:sp>
         <p:nvSpPr>
-          <p:cNvPr id="31" name="Text 29"/>
+          <p:cNvPr id="37" name="Text 35"/>
           <p:cNvSpPr/>
           <p:nvPr/>
         </p:nvSpPr>
@@ -32335,7 +32533,7 @@
       </p:sp>
       <p:sp>
         <p:nvSpPr>
-          <p:cNvPr id="32" name="Shape 30"/>
+          <p:cNvPr id="38" name="Shape 36"/>
           <p:cNvSpPr/>
           <p:nvPr/>
         </p:nvSpPr>
@@ -32362,13 +32560,13 @@
       </p:sp>
       <p:sp>
         <p:nvSpPr>
-          <p:cNvPr id="33" name="Shape 31"/>
-          <p:cNvSpPr/>
-          <p:nvPr/>
-        </p:nvSpPr>
-        <p:spPr>
-          <a:xfrm>
-            <a:off x="2427732" y="4169664"/>
+          <p:cNvPr id="39" name="Shape 37"/>
+          <p:cNvSpPr/>
+          <p:nvPr/>
+        </p:nvSpPr>
+        <p:spPr>
+          <a:xfrm>
+            <a:off x="2023872" y="4169664"/>
             <a:ext cx="685800" cy="384048"/>
           </a:xfrm>
           <a:prstGeom prst="rect">
@@ -32389,13 +32587,13 @@
       </p:sp>
       <p:sp>
         <p:nvSpPr>
-          <p:cNvPr id="34" name="Text 32"/>
-          <p:cNvSpPr/>
-          <p:nvPr/>
-        </p:nvSpPr>
-        <p:spPr>
-          <a:xfrm>
-            <a:off x="2427732" y="4169664"/>
+          <p:cNvPr id="40" name="Text 38"/>
+          <p:cNvSpPr/>
+          <p:nvPr/>
+        </p:nvSpPr>
+        <p:spPr>
+          <a:xfrm>
+            <a:off x="2023872" y="4169664"/>
             <a:ext cx="685800" cy="384048"/>
           </a:xfrm>
           <a:prstGeom prst="rect">
@@ -32428,13 +32626,13 @@
       </p:sp>
       <p:sp>
         <p:nvSpPr>
-          <p:cNvPr id="35" name="Text 33"/>
-          <p:cNvSpPr/>
-          <p:nvPr/>
-        </p:nvSpPr>
-        <p:spPr>
-          <a:xfrm>
-            <a:off x="2427732" y="4572000"/>
+          <p:cNvPr id="41" name="Text 39"/>
+          <p:cNvSpPr/>
+          <p:nvPr/>
+        </p:nvSpPr>
+        <p:spPr>
+          <a:xfrm>
+            <a:off x="2023872" y="4572000"/>
             <a:ext cx="685800" cy="219456"/>
           </a:xfrm>
           <a:prstGeom prst="rect">
@@ -32467,13 +32665,13 @@
       </p:sp>
       <p:sp>
         <p:nvSpPr>
-          <p:cNvPr id="36" name="Shape 34"/>
-          <p:cNvSpPr/>
-          <p:nvPr/>
-        </p:nvSpPr>
-        <p:spPr>
-          <a:xfrm>
-            <a:off x="3639312" y="4169664"/>
+          <p:cNvPr id="42" name="Shape 40"/>
+          <p:cNvSpPr/>
+          <p:nvPr/>
+        </p:nvSpPr>
+        <p:spPr>
+          <a:xfrm>
+            <a:off x="2831592" y="4169664"/>
             <a:ext cx="685800" cy="384048"/>
           </a:xfrm>
           <a:prstGeom prst="rect">
@@ -32494,13 +32692,13 @@
       </p:sp>
       <p:sp>
         <p:nvSpPr>
-          <p:cNvPr id="37" name="Text 35"/>
-          <p:cNvSpPr/>
-          <p:nvPr/>
-        </p:nvSpPr>
-        <p:spPr>
-          <a:xfrm>
-            <a:off x="3639312" y="4169664"/>
+          <p:cNvPr id="43" name="Text 41"/>
+          <p:cNvSpPr/>
+          <p:nvPr/>
+        </p:nvSpPr>
+        <p:spPr>
+          <a:xfrm>
+            <a:off x="2831592" y="4169664"/>
             <a:ext cx="685800" cy="384048"/>
           </a:xfrm>
           <a:prstGeom prst="rect">
@@ -32525,7 +32723,7 @@
                 <a:ea typeface="Trebuchet MS" pitchFamily="34" charset="-122"/>
                 <a:cs typeface="Trebuchet MS" pitchFamily="34" charset="-120"/>
               </a:rPr>
-              <a:t>air</a:t>
+              <a:t>ar</a:t>
             </a:r>
             <a:endParaRPr lang="en-US" sz="900" dirty="0"/>
           </a:p>
@@ -32533,13 +32731,13 @@
       </p:sp>
       <p:sp>
         <p:nvSpPr>
-          <p:cNvPr id="38" name="Shape 36"/>
-          <p:cNvSpPr/>
-          <p:nvPr/>
-        </p:nvSpPr>
-        <p:spPr>
-          <a:xfrm>
-            <a:off x="4850892" y="4169664"/>
+          <p:cNvPr id="44" name="Shape 42"/>
+          <p:cNvSpPr/>
+          <p:nvPr/>
+        </p:nvSpPr>
+        <p:spPr>
+          <a:xfrm>
+            <a:off x="3639312" y="4169664"/>
             <a:ext cx="685800" cy="384048"/>
           </a:xfrm>
           <a:prstGeom prst="rect">
@@ -32560,13 +32758,13 @@
       </p:sp>
       <p:sp>
         <p:nvSpPr>
-          <p:cNvPr id="39" name="Text 37"/>
-          <p:cNvSpPr/>
-          <p:nvPr/>
-        </p:nvSpPr>
-        <p:spPr>
-          <a:xfrm>
-            <a:off x="4850892" y="4169664"/>
+          <p:cNvPr id="45" name="Text 43"/>
+          <p:cNvSpPr/>
+          <p:nvPr/>
+        </p:nvSpPr>
+        <p:spPr>
+          <a:xfrm>
+            <a:off x="3639312" y="4169664"/>
             <a:ext cx="685800" cy="384048"/>
           </a:xfrm>
           <a:prstGeom prst="rect">
@@ -32591,7 +32789,7 @@
                 <a:ea typeface="Trebuchet MS" pitchFamily="34" charset="-122"/>
                 <a:cs typeface="Trebuchet MS" pitchFamily="34" charset="-120"/>
               </a:rPr>
-              <a:t>l</a:t>
+              <a:t>e</a:t>
             </a:r>
             <a:endParaRPr lang="en-US" sz="900" dirty="0"/>
           </a:p>
@@ -32599,13 +32797,13 @@
       </p:sp>
       <p:sp>
         <p:nvSpPr>
-          <p:cNvPr id="40" name="Shape 38"/>
-          <p:cNvSpPr/>
-          <p:nvPr/>
-        </p:nvSpPr>
-        <p:spPr>
-          <a:xfrm>
-            <a:off x="6062472" y="4169664"/>
+          <p:cNvPr id="46" name="Shape 44"/>
+          <p:cNvSpPr/>
+          <p:nvPr/>
+        </p:nvSpPr>
+        <p:spPr>
+          <a:xfrm>
+            <a:off x="4447032" y="4169664"/>
             <a:ext cx="685800" cy="384048"/>
           </a:xfrm>
           <a:prstGeom prst="rect">
@@ -32626,13 +32824,13 @@
       </p:sp>
       <p:sp>
         <p:nvSpPr>
-          <p:cNvPr id="41" name="Text 39"/>
-          <p:cNvSpPr/>
-          <p:nvPr/>
-        </p:nvSpPr>
-        <p:spPr>
-          <a:xfrm>
-            <a:off x="6062472" y="4169664"/>
+          <p:cNvPr id="47" name="Text 45"/>
+          <p:cNvSpPr/>
+          <p:nvPr/>
+        </p:nvSpPr>
+        <p:spPr>
+          <a:xfrm>
+            <a:off x="4447032" y="4169664"/>
             <a:ext cx="685800" cy="384048"/>
           </a:xfrm>
           <a:prstGeom prst="rect">
@@ -32657,7 +32855,7 @@
                 <a:ea typeface="Trebuchet MS" pitchFamily="34" charset="-122"/>
                 <a:cs typeface="Trebuchet MS" pitchFamily="34" charset="-120"/>
               </a:rPr>
-              <a:t>e</a:t>
+              <a:t>l</a:t>
             </a:r>
             <a:endParaRPr lang="en-US" sz="900" dirty="0"/>
           </a:p>
@@ -32665,13 +32863,13 @@
       </p:sp>
       <p:sp>
         <p:nvSpPr>
-          <p:cNvPr id="42" name="Shape 40"/>
-          <p:cNvSpPr/>
-          <p:nvPr/>
-        </p:nvSpPr>
-        <p:spPr>
-          <a:xfrm>
-            <a:off x="7274052" y="4169664"/>
+          <p:cNvPr id="48" name="Shape 46"/>
+          <p:cNvSpPr/>
+          <p:nvPr/>
+        </p:nvSpPr>
+        <p:spPr>
+          <a:xfrm>
+            <a:off x="5254752" y="4169664"/>
             <a:ext cx="685800" cy="384048"/>
           </a:xfrm>
           <a:prstGeom prst="rect">
@@ -32692,13 +32890,13 @@
       </p:sp>
       <p:sp>
         <p:nvSpPr>
-          <p:cNvPr id="43" name="Text 41"/>
-          <p:cNvSpPr/>
-          <p:nvPr/>
-        </p:nvSpPr>
-        <p:spPr>
-          <a:xfrm>
-            <a:off x="7274052" y="4169664"/>
+          <p:cNvPr id="49" name="Text 47"/>
+          <p:cNvSpPr/>
+          <p:nvPr/>
+        </p:nvSpPr>
+        <p:spPr>
+          <a:xfrm>
+            <a:off x="5254752" y="4169664"/>
             <a:ext cx="685800" cy="384048"/>
           </a:xfrm>
           <a:prstGeom prst="rect">
@@ -32723,7 +32921,205 @@
                 <a:ea typeface="Trebuchet MS" pitchFamily="34" charset="-122"/>
                 <a:cs typeface="Trebuchet MS" pitchFamily="34" charset="-120"/>
               </a:rPr>
+              <a:t>e</a:t>
+            </a:r>
+            <a:endParaRPr lang="en-US" sz="900" dirty="0"/>
+          </a:p>
+        </p:txBody>
+      </p:sp>
+      <p:sp>
+        <p:nvSpPr>
+          <p:cNvPr id="50" name="Shape 48"/>
+          <p:cNvSpPr/>
+          <p:nvPr/>
+        </p:nvSpPr>
+        <p:spPr>
+          <a:xfrm>
+            <a:off x="6062472" y="4169664"/>
+            <a:ext cx="685800" cy="384048"/>
+          </a:xfrm>
+          <a:prstGeom prst="rect">
+            <a:avLst>
+              <a:gd name="adj" fmla="val 9524"/>
+            </a:avLst>
+          </a:prstGeom>
+          <a:solidFill>
+            <a:srgbClr val="FFFFFF"/>
+          </a:solidFill>
+          <a:ln w="12700">
+            <a:solidFill>
+              <a:srgbClr val="DB2777"/>
+            </a:solidFill>
+            <a:prstDash val="solid"/>
+          </a:ln>
+        </p:spPr>
+      </p:sp>
+      <p:sp>
+        <p:nvSpPr>
+          <p:cNvPr id="51" name="Text 49"/>
+          <p:cNvSpPr/>
+          <p:nvPr/>
+        </p:nvSpPr>
+        <p:spPr>
+          <a:xfrm>
+            <a:off x="6062472" y="4169664"/>
+            <a:ext cx="685800" cy="384048"/>
+          </a:xfrm>
+          <a:prstGeom prst="rect">
+            <a:avLst/>
+          </a:prstGeom>
+          <a:noFill/>
+          <a:ln/>
+        </p:spPr>
+        <p:txBody>
+          <a:bodyPr wrap="square" lIns="0" tIns="0" rIns="0" bIns="0" rtlCol="0" anchor="ctr"/>
+          <a:lstStyle/>
+          <a:p>
+            <a:pPr algn="ctr" indent="0" marL="0">
+              <a:buNone/>
+            </a:pPr>
+            <a:r>
+              <a:rPr lang="en-US" sz="900" b="1" dirty="0">
+                <a:solidFill>
+                  <a:srgbClr val="9D174D"/>
+                </a:solidFill>
+                <a:latin typeface="Trebuchet MS" pitchFamily="34" charset="0"/>
+                <a:ea typeface="Trebuchet MS" pitchFamily="34" charset="-122"/>
+                <a:cs typeface="Trebuchet MS" pitchFamily="34" charset="-120"/>
+              </a:rPr>
               <a:t>ss</a:t>
+            </a:r>
+            <a:endParaRPr lang="en-US" sz="900" dirty="0"/>
+          </a:p>
+        </p:txBody>
+      </p:sp>
+      <p:sp>
+        <p:nvSpPr>
+          <p:cNvPr id="52" name="Shape 50"/>
+          <p:cNvSpPr/>
+          <p:nvPr/>
+        </p:nvSpPr>
+        <p:spPr>
+          <a:xfrm>
+            <a:off x="6870192" y="4169664"/>
+            <a:ext cx="685800" cy="384048"/>
+          </a:xfrm>
+          <a:prstGeom prst="rect">
+            <a:avLst>
+              <a:gd name="adj" fmla="val 9524"/>
+            </a:avLst>
+          </a:prstGeom>
+          <a:solidFill>
+            <a:srgbClr val="FFFFFF"/>
+          </a:solidFill>
+          <a:ln w="12700">
+            <a:solidFill>
+              <a:srgbClr val="DB2777"/>
+            </a:solidFill>
+            <a:prstDash val="solid"/>
+          </a:ln>
+        </p:spPr>
+      </p:sp>
+      <p:sp>
+        <p:nvSpPr>
+          <p:cNvPr id="53" name="Text 51"/>
+          <p:cNvSpPr/>
+          <p:nvPr/>
+        </p:nvSpPr>
+        <p:spPr>
+          <a:xfrm>
+            <a:off x="6870192" y="4169664"/>
+            <a:ext cx="685800" cy="384048"/>
+          </a:xfrm>
+          <a:prstGeom prst="rect">
+            <a:avLst/>
+          </a:prstGeom>
+          <a:noFill/>
+          <a:ln/>
+        </p:spPr>
+        <p:txBody>
+          <a:bodyPr wrap="square" lIns="0" tIns="0" rIns="0" bIns="0" rtlCol="0" anchor="ctr"/>
+          <a:lstStyle/>
+          <a:p>
+            <a:pPr algn="ctr" indent="0" marL="0">
+              <a:buNone/>
+            </a:pPr>
+            <a:r>
+              <a:rPr lang="en-US" sz="900" b="1" dirty="0">
+                <a:solidFill>
+                  <a:srgbClr val="9D174D"/>
+                </a:solidFill>
+                <a:latin typeface="Trebuchet MS" pitchFamily="34" charset="0"/>
+                <a:ea typeface="Trebuchet MS" pitchFamily="34" charset="-122"/>
+                <a:cs typeface="Trebuchet MS" pitchFamily="34" charset="-120"/>
+              </a:rPr>
+              <a:t>l</a:t>
+            </a:r>
+            <a:endParaRPr lang="en-US" sz="900" dirty="0"/>
+          </a:p>
+        </p:txBody>
+      </p:sp>
+      <p:sp>
+        <p:nvSpPr>
+          <p:cNvPr id="54" name="Shape 52"/>
+          <p:cNvSpPr/>
+          <p:nvPr/>
+        </p:nvSpPr>
+        <p:spPr>
+          <a:xfrm>
+            <a:off x="7677912" y="4169664"/>
+            <a:ext cx="685800" cy="384048"/>
+          </a:xfrm>
+          <a:prstGeom prst="rect">
+            <a:avLst>
+              <a:gd name="adj" fmla="val 9524"/>
+            </a:avLst>
+          </a:prstGeom>
+          <a:solidFill>
+            <a:srgbClr val="FFFFFF"/>
+          </a:solidFill>
+          <a:ln w="12700">
+            <a:solidFill>
+              <a:srgbClr val="DB2777"/>
+            </a:solidFill>
+            <a:prstDash val="solid"/>
+          </a:ln>
+        </p:spPr>
+      </p:sp>
+      <p:sp>
+        <p:nvSpPr>
+          <p:cNvPr id="55" name="Text 53"/>
+          <p:cNvSpPr/>
+          <p:nvPr/>
+        </p:nvSpPr>
+        <p:spPr>
+          <a:xfrm>
+            <a:off x="7677912" y="4169664"/>
+            <a:ext cx="685800" cy="384048"/>
+          </a:xfrm>
+          <a:prstGeom prst="rect">
+            <a:avLst/>
+          </a:prstGeom>
+          <a:noFill/>
+          <a:ln/>
+        </p:spPr>
+        <p:txBody>
+          <a:bodyPr wrap="square" lIns="0" tIns="0" rIns="0" bIns="0" rtlCol="0" anchor="ctr"/>
+          <a:lstStyle/>
+          <a:p>
+            <a:pPr algn="ctr" indent="0" marL="0">
+              <a:buNone/>
+            </a:pPr>
+            <a:r>
+              <a:rPr lang="en-US" sz="900" b="1" dirty="0">
+                <a:solidFill>
+                  <a:srgbClr val="9D174D"/>
+                </a:solidFill>
+                <a:latin typeface="Trebuchet MS" pitchFamily="34" charset="0"/>
+                <a:ea typeface="Trebuchet MS" pitchFamily="34" charset="-122"/>
+                <a:cs typeface="Trebuchet MS" pitchFamily="34" charset="-120"/>
+              </a:rPr>
+              <a:t>y</a:t>
             </a:r>
             <a:endParaRPr lang="en-US" sz="900" dirty="0"/>
           </a:p>
@@ -33015,7 +33411,7 @@
                 <a:ea typeface="Calibri" pitchFamily="34" charset="-122"/>
                 <a:cs typeface="Calibri" pitchFamily="34" charset="-120"/>
               </a:rPr>
-              <a:t>Word Labs  •  wordlabs.app  •  Root: 'care' = worry, concern, look after</a:t>
+              <a:t>Word Labs  •  wordlabs.app  •  Root: 'care' = worry, attention, looking after</a:t>
             </a:r>
             <a:endParaRPr lang="en-US" sz="800" dirty="0"/>
           </a:p>
@@ -34184,7 +34580,7 @@
                 <a:ea typeface="Calibri" pitchFamily="34" charset="-122"/>
                 <a:cs typeface="Calibri" pitchFamily="34" charset="-120"/>
               </a:rPr>
-              <a:t>Word Labs  •  wordlabs.app  •  Root: 'care' = worry, concern, look after</a:t>
+              <a:t>Word Labs  •  wordlabs.app  •  Root: 'care' = worry, attention, looking after</a:t>
             </a:r>
             <a:endParaRPr lang="en-US" sz="800" dirty="0"/>
           </a:p>
@@ -34677,7 +35073,7 @@
                 <a:ea typeface="Trebuchet MS" pitchFamily="34" charset="-122"/>
                 <a:cs typeface="Trebuchet MS" pitchFamily="34" charset="-120"/>
               </a:rPr>
-              <a:t>self-</a:t>
+              <a:t>over-</a:t>
             </a:r>
             <a:endParaRPr lang="en-US" sz="1300" dirty="0"/>
           </a:p>
@@ -34830,7 +35226,7 @@
                 <a:ea typeface="Trebuchet MS" pitchFamily="34" charset="-122"/>
                 <a:cs typeface="Trebuchet MS" pitchFamily="34" charset="-120"/>
               </a:rPr>
-              <a:t>day-</a:t>
+              <a:t>self-</a:t>
             </a:r>
             <a:endParaRPr lang="en-US" sz="1300" dirty="0"/>
           </a:p>
@@ -34919,7 +35315,7 @@
                 <a:ea typeface="Trebuchet MS" pitchFamily="34" charset="-122"/>
                 <a:cs typeface="Trebuchet MS" pitchFamily="34" charset="-120"/>
               </a:rPr>
-              <a:t>-fully</a:t>
+              <a:t>-lessly</a:t>
             </a:r>
             <a:endParaRPr lang="en-US" sz="1300" dirty="0"/>
           </a:p>
@@ -34983,7 +35379,7 @@
                 <a:ea typeface="Trebuchet MS" pitchFamily="34" charset="-122"/>
                 <a:cs typeface="Trebuchet MS" pitchFamily="34" charset="-120"/>
               </a:rPr>
-              <a:t>hair-</a:t>
+              <a:t>health-</a:t>
             </a:r>
             <a:endParaRPr lang="en-US" sz="1300" dirty="0"/>
           </a:p>
@@ -35072,7 +35468,7 @@
                 <a:ea typeface="Trebuchet MS" pitchFamily="34" charset="-122"/>
                 <a:cs typeface="Trebuchet MS" pitchFamily="34" charset="-120"/>
               </a:rPr>
-              <a:t>-lessly</a:t>
+              <a:t>-fully</a:t>
             </a:r>
             <a:endParaRPr lang="en-US" sz="1300" dirty="0"/>
           </a:p>
@@ -35136,7 +35532,7 @@
                 <a:ea typeface="Trebuchet MS" pitchFamily="34" charset="-122"/>
                 <a:cs typeface="Trebuchet MS" pitchFamily="34" charset="-120"/>
               </a:rPr>
-              <a:t>skin-</a:t>
+              <a:t>child-</a:t>
             </a:r>
             <a:endParaRPr lang="en-US" sz="1300" dirty="0"/>
           </a:p>
@@ -35528,7 +35924,7 @@
                 <a:ea typeface="Trebuchet MS" pitchFamily="34" charset="-122"/>
                 <a:cs typeface="Trebuchet MS" pitchFamily="34" charset="-120"/>
               </a:rPr>
-              <a:t>carefully</a:t>
+              <a:t>uncare</a:t>
             </a:r>
             <a:endParaRPr lang="en-US" sz="1200" dirty="0"/>
           </a:p>
@@ -35594,7 +35990,7 @@
                 <a:ea typeface="Trebuchet MS" pitchFamily="34" charset="-122"/>
                 <a:cs typeface="Trebuchet MS" pitchFamily="34" charset="-120"/>
               </a:rPr>
-              <a:t>carelessly</a:t>
+              <a:t>carefully</a:t>
             </a:r>
             <a:endParaRPr lang="en-US" sz="1200" dirty="0"/>
           </a:p>
@@ -35660,7 +36056,7 @@
                 <a:ea typeface="Trebuchet MS" pitchFamily="34" charset="-122"/>
                 <a:cs typeface="Trebuchet MS" pitchFamily="34" charset="-120"/>
               </a:rPr>
-              <a:t>uncare</a:t>
+              <a:t>carelessly</a:t>
             </a:r>
             <a:endParaRPr lang="en-US" sz="1200" dirty="0"/>
           </a:p>
@@ -35726,7 +36122,7 @@
                 <a:ea typeface="Trebuchet MS" pitchFamily="34" charset="-122"/>
                 <a:cs typeface="Trebuchet MS" pitchFamily="34" charset="-120"/>
               </a:rPr>
-              <a:t>self-care</a:t>
+              <a:t>overcare</a:t>
             </a:r>
             <a:endParaRPr lang="en-US" sz="1200" dirty="0"/>
           </a:p>
@@ -35792,7 +36188,7 @@
                 <a:ea typeface="Trebuchet MS" pitchFamily="34" charset="-122"/>
                 <a:cs typeface="Trebuchet MS" pitchFamily="34" charset="-120"/>
               </a:rPr>
-              <a:t>daycare</a:t>
+              <a:t>self-care</a:t>
             </a:r>
             <a:endParaRPr lang="en-US" sz="1200" dirty="0"/>
           </a:p>
@@ -36084,7 +36480,7 @@
                 <a:ea typeface="Calibri" pitchFamily="34" charset="-122"/>
                 <a:cs typeface="Calibri" pitchFamily="34" charset="-120"/>
               </a:rPr>
-              <a:t>Word Labs  •  wordlabs.app  •  Root: 'care' = worry, concern, look after</a:t>
+              <a:t>Word Labs  •  wordlabs.app  •  Root: 'care' = worry, attention, looking after</a:t>
             </a:r>
             <a:endParaRPr lang="en-US" sz="800" dirty="0"/>
           </a:p>
@@ -36248,7 +36644,7 @@
                 <a:ea typeface="Calibri" pitchFamily="34" charset="-122"/>
                 <a:cs typeface="Calibri" pitchFamily="34" charset="-120"/>
               </a:rPr>
-              <a:t>The core part of a word carrying its basic meaning. For example, 'care' means 'worry, concern, look after'.</a:t>
+              <a:t>The core part of a word carrying its basic meaning. For example, 'care' means 'worry, attention, looking after'.</a:t>
             </a:r>
             <a:endParaRPr lang="en-US" sz="1350" dirty="0"/>
           </a:p>
@@ -36868,7 +37264,7 @@
                 <a:ea typeface="Calibri" pitchFamily="34" charset="-122"/>
                 <a:cs typeface="Calibri" pitchFamily="34" charset="-120"/>
               </a:rPr>
-              <a:t>Word Labs  •  wordlabs.app  •  Root: 'care' = worry, concern, look after</a:t>
+              <a:t>Word Labs  •  wordlabs.app  •  Root: 'care' = worry, attention, looking after</a:t>
             </a:r>
             <a:endParaRPr lang="en-US" sz="800" dirty="0"/>
           </a:p>
@@ -36980,7 +37376,7 @@
                 <a:ea typeface="Calibri" pitchFamily="34" charset="-122"/>
                 <a:cs typeface="Calibri" pitchFamily="34" charset="-120"/>
               </a:rPr>
-              <a:t>1.  The word 'careful' contains the root 'care' and the suffix '-ful'.</a:t>
+              <a:t>1.  Adding the suffix '-ful' to 'care' makes the word 'careful', meaning full of attention.</a:t>
             </a:r>
             <a:endParaRPr lang="en-US" sz="1300" dirty="0"/>
           </a:p>
@@ -37119,7 +37515,7 @@
                 <a:ea typeface="Calibri" pitchFamily="34" charset="-122"/>
                 <a:cs typeface="Calibri" pitchFamily="34" charset="-120"/>
               </a:rPr>
-              <a:t>2.  The root 'care' comes from an ancient Greek word.</a:t>
+              <a:t>2.  The word 'carefully' has three morphemes: care + ful + ly.</a:t>
             </a:r>
             <a:endParaRPr lang="en-US" sz="1300" dirty="0"/>
           </a:p>
@@ -37142,11 +37538,11 @@
             </a:avLst>
           </a:prstGeom>
           <a:solidFill>
-            <a:srgbClr val="FEE2E2"/>
-          </a:solidFill>
-          <a:ln w="12700">
-            <a:solidFill>
-              <a:srgbClr val="DC2626"/>
+            <a:srgbClr val="DCFCE7"/>
+          </a:solidFill>
+          <a:ln w="12700">
+            <a:solidFill>
+              <a:srgbClr val="16A34A"/>
             </a:solidFill>
             <a:prstDash val="solid"/>
           </a:ln>
@@ -37179,13 +37575,13 @@
             <a:r>
               <a:rPr lang="en-US" sz="1100" b="1" dirty="0">
                 <a:solidFill>
-                  <a:srgbClr val="DC2626"/>
+                  <a:srgbClr val="16A34A"/>
                 </a:solidFill>
                 <a:latin typeface="Trebuchet MS" pitchFamily="34" charset="0"/>
                 <a:ea typeface="Trebuchet MS" pitchFamily="34" charset="-122"/>
                 <a:cs typeface="Trebuchet MS" pitchFamily="34" charset="-120"/>
               </a:rPr>
-              <a:t>FALSE</a:t>
+              <a:t>TRUE</a:t>
             </a:r>
             <a:endParaRPr lang="en-US" sz="1100" dirty="0"/>
           </a:p>
@@ -37258,7 +37654,7 @@
                 <a:ea typeface="Calibri" pitchFamily="34" charset="-122"/>
                 <a:cs typeface="Calibri" pitchFamily="34" charset="-120"/>
               </a:rPr>
-              <a:t>3.  The word 'careless' means doing something without enough attention.</a:t>
+              <a:t>3.  The word 'careless' contains the root 'care' meaning attention or worry.</a:t>
             </a:r>
             <a:endParaRPr lang="en-US" sz="1300" dirty="0"/>
           </a:p>
@@ -37397,7 +37793,7 @@
                 <a:ea typeface="Calibri" pitchFamily="34" charset="-122"/>
                 <a:cs typeface="Calibri" pitchFamily="34" charset="-120"/>
               </a:rPr>
-              <a:t>4.  A caregiver is someone who looks after others.</a:t>
+              <a:t>4.  The prefix 'un-' in 'uncare' means 'many' or 'more than one'.</a:t>
             </a:r>
             <a:endParaRPr lang="en-US" sz="1300" dirty="0"/>
           </a:p>
@@ -37420,11 +37816,11 @@
             </a:avLst>
           </a:prstGeom>
           <a:solidFill>
-            <a:srgbClr val="DCFCE7"/>
-          </a:solidFill>
-          <a:ln w="12700">
-            <a:solidFill>
-              <a:srgbClr val="16A34A"/>
+            <a:srgbClr val="FEE2E2"/>
+          </a:solidFill>
+          <a:ln w="12700">
+            <a:solidFill>
+              <a:srgbClr val="DC2626"/>
             </a:solidFill>
             <a:prstDash val="solid"/>
           </a:ln>
@@ -37457,13 +37853,13 @@
             <a:r>
               <a:rPr lang="en-US" sz="1100" b="1" dirty="0">
                 <a:solidFill>
-                  <a:srgbClr val="16A34A"/>
+                  <a:srgbClr val="DC2626"/>
                 </a:solidFill>
                 <a:latin typeface="Trebuchet MS" pitchFamily="34" charset="0"/>
                 <a:ea typeface="Trebuchet MS" pitchFamily="34" charset="-122"/>
                 <a:cs typeface="Trebuchet MS" pitchFamily="34" charset="-120"/>
               </a:rPr>
-              <a:t>TRUE</a:t>
+              <a:t>FALSE</a:t>
             </a:r>
             <a:endParaRPr lang="en-US" sz="1100" dirty="0"/>
           </a:p>
@@ -37536,7 +37932,7 @@
                 <a:ea typeface="Calibri" pitchFamily="34" charset="-122"/>
                 <a:cs typeface="Calibri" pitchFamily="34" charset="-120"/>
               </a:rPr>
-              <a:t>5.  The suffix '-ful' in 'careful' means without.</a:t>
+              <a:t>5.  The root 'care' comes from the ancient Greek language.</a:t>
             </a:r>
             <a:endParaRPr lang="en-US" sz="1300" dirty="0"/>
           </a:p>
@@ -37894,7 +38290,7 @@
                 <a:ea typeface="Calibri" pitchFamily="34" charset="-122"/>
                 <a:cs typeface="Calibri" pitchFamily="34" charset="-120"/>
               </a:rPr>
-              <a:t>Word Labs  •  wordlabs.app  •  Root: 'care' = worry, concern, look after</a:t>
+              <a:t>Word Labs  •  wordlabs.app  •  Root: 'care' = worry, attention, looking after</a:t>
             </a:r>
             <a:endParaRPr lang="en-US" sz="800" dirty="0"/>
           </a:p>
@@ -38031,7 +38427,7 @@
                 <a:ea typeface="Trebuchet MS" pitchFamily="34" charset="-122"/>
                 <a:cs typeface="Trebuchet MS" pitchFamily="34" charset="-120"/>
               </a:rPr>
-              <a:t>worry, concern, look after</a:t>
+              <a:t>worry, attention, looking after</a:t>
             </a:r>
             <a:endParaRPr lang="en-US" sz="2000" dirty="0"/>
           </a:p>
@@ -38373,7 +38769,7 @@
                 <a:ea typeface="Trebuchet MS" pitchFamily="34" charset="-122"/>
                 <a:cs typeface="Trebuchet MS" pitchFamily="34" charset="-120"/>
               </a:rPr>
-              <a:t>carefully</a:t>
+              <a:t>uncare</a:t>
             </a:r>
             <a:endParaRPr lang="en-US" sz="1300" dirty="0"/>
           </a:p>
@@ -38439,7 +38835,7 @@
                 <a:ea typeface="Trebuchet MS" pitchFamily="34" charset="-122"/>
                 <a:cs typeface="Trebuchet MS" pitchFamily="34" charset="-120"/>
               </a:rPr>
-              <a:t>carelessly</a:t>
+              <a:t>carefully</a:t>
             </a:r>
             <a:endParaRPr lang="en-US" sz="1300" dirty="0"/>
           </a:p>
@@ -38505,7 +38901,7 @@
                 <a:ea typeface="Trebuchet MS" pitchFamily="34" charset="-122"/>
                 <a:cs typeface="Trebuchet MS" pitchFamily="34" charset="-120"/>
               </a:rPr>
-              <a:t>uncare</a:t>
+              <a:t>carelessly</a:t>
             </a:r>
             <a:endParaRPr lang="en-US" sz="1300" dirty="0"/>
           </a:p>
@@ -38571,7 +38967,7 @@
                 <a:ea typeface="Trebuchet MS" pitchFamily="34" charset="-122"/>
                 <a:cs typeface="Trebuchet MS" pitchFamily="34" charset="-120"/>
               </a:rPr>
-              <a:t>self-care</a:t>
+              <a:t>overcare</a:t>
             </a:r>
             <a:endParaRPr lang="en-US" sz="1300" dirty="0"/>
           </a:p>
@@ -38863,7 +39259,7 @@
                 <a:ea typeface="Calibri" pitchFamily="34" charset="-122"/>
                 <a:cs typeface="Calibri" pitchFamily="34" charset="-120"/>
               </a:rPr>
-              <a:t>Word Labs  •  wordlabs.app  •  Root: 'care' = worry, concern, look after</a:t>
+              <a:t>Word Labs  •  wordlabs.app  •  Root: 'care' = worry, attention, looking after</a:t>
             </a:r>
             <a:endParaRPr lang="en-US" sz="800" dirty="0"/>
           </a:p>
@@ -39356,7 +39752,7 @@
                 <a:ea typeface="Trebuchet MS" pitchFamily="34" charset="-122"/>
                 <a:cs typeface="Trebuchet MS" pitchFamily="34" charset="-120"/>
               </a:rPr>
-              <a:t>self-</a:t>
+              <a:t>over-</a:t>
             </a:r>
             <a:endParaRPr lang="en-US" sz="1300" dirty="0"/>
           </a:p>
@@ -39509,7 +39905,7 @@
                 <a:ea typeface="Trebuchet MS" pitchFamily="34" charset="-122"/>
                 <a:cs typeface="Trebuchet MS" pitchFamily="34" charset="-120"/>
               </a:rPr>
-              <a:t>day-</a:t>
+              <a:t>self-</a:t>
             </a:r>
             <a:endParaRPr lang="en-US" sz="1300" dirty="0"/>
           </a:p>
@@ -39598,7 +39994,7 @@
                 <a:ea typeface="Trebuchet MS" pitchFamily="34" charset="-122"/>
                 <a:cs typeface="Trebuchet MS" pitchFamily="34" charset="-120"/>
               </a:rPr>
-              <a:t>-fully</a:t>
+              <a:t>-lessly</a:t>
             </a:r>
             <a:endParaRPr lang="en-US" sz="1300" dirty="0"/>
           </a:p>
@@ -39662,7 +40058,7 @@
                 <a:ea typeface="Trebuchet MS" pitchFamily="34" charset="-122"/>
                 <a:cs typeface="Trebuchet MS" pitchFamily="34" charset="-120"/>
               </a:rPr>
-              <a:t>hair-</a:t>
+              <a:t>health-</a:t>
             </a:r>
             <a:endParaRPr lang="en-US" sz="1300" dirty="0"/>
           </a:p>
@@ -39751,7 +40147,7 @@
                 <a:ea typeface="Trebuchet MS" pitchFamily="34" charset="-122"/>
                 <a:cs typeface="Trebuchet MS" pitchFamily="34" charset="-120"/>
               </a:rPr>
-              <a:t>-lessly</a:t>
+              <a:t>-fully</a:t>
             </a:r>
             <a:endParaRPr lang="en-US" sz="1300" dirty="0"/>
           </a:p>
@@ -39815,7 +40211,7 @@
                 <a:ea typeface="Trebuchet MS" pitchFamily="34" charset="-122"/>
                 <a:cs typeface="Trebuchet MS" pitchFamily="34" charset="-120"/>
               </a:rPr>
-              <a:t>skin-</a:t>
+              <a:t>child-</a:t>
             </a:r>
             <a:endParaRPr lang="en-US" sz="1300" dirty="0"/>
           </a:p>
@@ -40637,7 +41033,7 @@
                 <a:ea typeface="Calibri" pitchFamily="34" charset="-122"/>
                 <a:cs typeface="Calibri" pitchFamily="34" charset="-120"/>
               </a:rPr>
-              <a:t>Word Labs  •  wordlabs.app  •  Root: 'care' = worry, concern, look after</a:t>
+              <a:t>Word Labs  •  wordlabs.app  •  Root: 'care' = worry, attention, looking after</a:t>
             </a:r>
             <a:endParaRPr lang="en-US" sz="800" dirty="0"/>
           </a:p>
@@ -40815,7 +41211,7 @@
                 <a:ea typeface="Calibri" pitchFamily="34" charset="-122"/>
                 <a:cs typeface="Calibri" pitchFamily="34" charset="-120"/>
               </a:rPr>
-              <a:t>Looking after your own health and wellbeing.</a:t>
+              <a:t>To worry or fuss about something far too much.</a:t>
             </a:r>
             <a:endParaRPr lang="en-US" sz="1200" dirty="0"/>
           </a:p>
@@ -40954,7 +41350,7 @@
                 <a:ea typeface="Calibri" pitchFamily="34" charset="-122"/>
                 <a:cs typeface="Calibri" pitchFamily="34" charset="-120"/>
               </a:rPr>
-              <a:t>Doing something with a lot of attention and thought.</a:t>
+              <a:t>To not show concern or attention toward something or someone.</a:t>
             </a:r>
             <a:endParaRPr lang="en-US" sz="1200" dirty="0"/>
           </a:p>
@@ -41093,7 +41489,7 @@
                 <a:ea typeface="Calibri" pitchFamily="34" charset="-122"/>
                 <a:cs typeface="Calibri" pitchFamily="34" charset="-120"/>
               </a:rPr>
-              <a:t>A lack of caring or concern for something or someone.</a:t>
+              <a:t>Doing something without paying attention, often causing mistakes.</a:t>
             </a:r>
             <a:endParaRPr lang="en-US" sz="1200" dirty="0"/>
           </a:p>
@@ -41166,7 +41562,7 @@
                 <a:ea typeface="Trebuchet MS" pitchFamily="34" charset="-122"/>
                 <a:cs typeface="Trebuchet MS" pitchFamily="34" charset="-120"/>
               </a:rPr>
-              <a:t>carefully</a:t>
+              <a:t>uncare</a:t>
             </a:r>
             <a:endParaRPr lang="en-US" sz="1200" dirty="0"/>
           </a:p>
@@ -41232,7 +41628,7 @@
                 <a:ea typeface="Calibri" pitchFamily="34" charset="-122"/>
                 <a:cs typeface="Calibri" pitchFamily="34" charset="-120"/>
               </a:rPr>
-              <a:t>Doing something without paying enough attention.</a:t>
+              <a:t>Doing something in a way that shows you are paying close attention.</a:t>
             </a:r>
             <a:endParaRPr lang="en-US" sz="1200" dirty="0"/>
           </a:p>
@@ -41305,7 +41701,7 @@
                 <a:ea typeface="Trebuchet MS" pitchFamily="34" charset="-122"/>
                 <a:cs typeface="Trebuchet MS" pitchFamily="34" charset="-120"/>
               </a:rPr>
-              <a:t>carelessly</a:t>
+              <a:t>carefully</a:t>
             </a:r>
             <a:endParaRPr lang="en-US" sz="1200" dirty="0"/>
           </a:p>
@@ -41371,7 +41767,7 @@
                 <a:ea typeface="Calibri" pitchFamily="34" charset="-122"/>
                 <a:cs typeface="Calibri" pitchFamily="34" charset="-120"/>
               </a:rPr>
-              <a:t>Giving attention to avoid mistakes or danger.</a:t>
+              <a:t>When you pay close attention and try not to make mistakes or get hurt.</a:t>
             </a:r>
             <a:endParaRPr lang="en-US" sz="1200" dirty="0"/>
           </a:p>
@@ -41444,7 +41840,7 @@
                 <a:ea typeface="Trebuchet MS" pitchFamily="34" charset="-122"/>
                 <a:cs typeface="Trebuchet MS" pitchFamily="34" charset="-120"/>
               </a:rPr>
-              <a:t>uncare</a:t>
+              <a:t>carelessly</a:t>
             </a:r>
             <a:endParaRPr lang="en-US" sz="1200" dirty="0"/>
           </a:p>
@@ -41510,7 +41906,7 @@
                 <a:ea typeface="Calibri" pitchFamily="34" charset="-122"/>
                 <a:cs typeface="Calibri" pitchFamily="34" charset="-120"/>
               </a:rPr>
-              <a:t>A person who looks after someone who needs help, like a child or elderly person.</a:t>
+              <a:t>A person who looks after someone who needs help, like a child or sick person.</a:t>
             </a:r>
             <a:endParaRPr lang="en-US" sz="1200" dirty="0"/>
           </a:p>
@@ -41583,7 +41979,7 @@
                 <a:ea typeface="Trebuchet MS" pitchFamily="34" charset="-122"/>
                 <a:cs typeface="Trebuchet MS" pitchFamily="34" charset="-120"/>
               </a:rPr>
-              <a:t>self-care</a:t>
+              <a:t>overcare</a:t>
             </a:r>
             <a:endParaRPr lang="en-US" sz="1200" dirty="0"/>
           </a:p>
@@ -41649,7 +42045,7 @@
                 <a:ea typeface="Calibri" pitchFamily="34" charset="-122"/>
                 <a:cs typeface="Calibri" pitchFamily="34" charset="-120"/>
               </a:rPr>
-              <a:t>Not paying enough attention; making mistakes easily.</a:t>
+              <a:t>When you do not pay enough attention and make mistakes because of it.</a:t>
             </a:r>
             <a:endParaRPr lang="en-US" sz="1200" dirty="0"/>
           </a:p>
@@ -41941,7 +42337,7 @@
                 <a:ea typeface="Calibri" pitchFamily="34" charset="-122"/>
                 <a:cs typeface="Calibri" pitchFamily="34" charset="-120"/>
               </a:rPr>
-              <a:t>Word Labs  •  wordlabs.app  •  Root: 'care' = worry, concern, look after</a:t>
+              <a:t>Word Labs  •  wordlabs.app  •  Root: 'care' = worry, attention, looking after</a:t>
             </a:r>
             <a:endParaRPr lang="en-US" sz="800" dirty="0"/>
           </a:p>
@@ -42144,7 +42540,7 @@
                 <a:ea typeface="Calibri" pitchFamily="34" charset="-122"/>
                 <a:cs typeface="Calibri" pitchFamily="34" charset="-120"/>
               </a:rPr>
-              <a:t>The careful student checked her work twice before handing it in.</a:t>
+              <a:t>Please be careful when you carry the glass of water across the room.</a:t>
             </a:r>
             <a:endParaRPr lang="en-US" sz="1500" dirty="0"/>
           </a:p>
@@ -42308,7 +42704,7 @@
                 <a:ea typeface="Calibri" pitchFamily="34" charset="-122"/>
                 <a:cs typeface="Calibri" pitchFamily="34" charset="-120"/>
               </a:rPr>
-              <a:t>It is important to practise self-care by getting enough sleep and eating well.</a:t>
+              <a:t>The caregiver looked after the elderly woman every day after school.</a:t>
             </a:r>
             <a:endParaRPr lang="en-US" sz="1500" dirty="0"/>
           </a:p>
@@ -42472,7 +42868,7 @@
                 <a:ea typeface="Calibri" pitchFamily="34" charset="-122"/>
                 <a:cs typeface="Calibri" pitchFamily="34" charset="-120"/>
               </a:rPr>
-              <a:t>The careless mistake cost the team the game, so they decided to slow down next time.</a:t>
+              <a:t>He worked carelessly and spilled paint all over his artwork.</a:t>
             </a:r>
             <a:endParaRPr lang="en-US" sz="1500" dirty="0"/>
           </a:p>
